--- a/03-分享PPT.pptx
+++ b/03-分享PPT.pptx
@@ -7932,7 +7932,7 @@
                 </a:solidFill>
                 <a:latin typeface="Microsoft YaHei"/>
               </a:rPr>
-              <a:t>「为我解释每一行代码作用以及每一个包每一个函数是干什么的」</a:t>
+              <a:t>「这一段代码有什么问题」——回答按「第一部分：导入包」逐条展开，即逐行解释</a:t>
             </a:r>
           </a:p>
         </p:txBody>
@@ -8212,7 +8212,7 @@
         <p:spPr>
           <a:xfrm>
             <a:off x="5806440" y="1600200"/>
-            <a:ext cx="5715000" cy="3571875"/>
+            <a:ext cx="5715000" cy="3093244"/>
           </a:xfrm>
           <a:prstGeom prst="rect">
             <a:avLst/>
@@ -8381,7 +8381,7 @@
                 </a:solidFill>
                 <a:latin typeface="Microsoft YaHei"/>
               </a:rPr>
-              <a:t>验证二、三：补全/测试生成 + Agent 闭环</a:t>
+              <a:t>验证二、三：测试生成 + Agent 闭环</a:t>
             </a:r>
           </a:p>
         </p:txBody>
@@ -8481,8 +8481,8 @@
         </p:blipFill>
         <p:spPr>
           <a:xfrm>
-            <a:off x="685800" y="1600200"/>
-            <a:ext cx="5303520" cy="3314700"/>
+            <a:off x="685800" y="1554480"/>
+            <a:ext cx="3520440" cy="1905438"/>
           </a:xfrm>
           <a:prstGeom prst="rect">
             <a:avLst/>
@@ -8497,8 +8497,8 @@
         </p:nvSpPr>
         <p:spPr>
           <a:xfrm>
-            <a:off x="685800" y="4992624"/>
-            <a:ext cx="5303520" cy="274320"/>
+            <a:off x="685800" y="3831336"/>
+            <a:ext cx="3520440" cy="274320"/>
           </a:xfrm>
           <a:prstGeom prst="rect">
             <a:avLst/>
@@ -8519,7 +8519,7 @@
                 </a:solidFill>
                 <a:latin typeface="Microsoft YaHei"/>
               </a:rPr>
-              <a:t>行内补全 / Agent 生成的 pytest 用例</a:t>
+              <a:t>① 生成 test_kmeans.py，diff 审查后「应用」</a:t>
             </a:r>
           </a:p>
         </p:txBody>
@@ -8540,8 +8540,8 @@
         </p:blipFill>
         <p:spPr>
           <a:xfrm>
-            <a:off x="6217920" y="1600200"/>
-            <a:ext cx="5303520" cy="3314700"/>
+            <a:off x="4480560" y="1554480"/>
+            <a:ext cx="3520440" cy="1905438"/>
           </a:xfrm>
           <a:prstGeom prst="rect">
             <a:avLst/>
@@ -8556,8 +8556,8 @@
         </p:nvSpPr>
         <p:spPr>
           <a:xfrm>
-            <a:off x="6217920" y="4992624"/>
-            <a:ext cx="5303520" cy="274320"/>
+            <a:off x="4480560" y="3831336"/>
+            <a:ext cx="3520440" cy="274320"/>
           </a:xfrm>
           <a:prstGeom prst="rect">
             <a:avLst/>
@@ -8578,21 +8578,45 @@
                 </a:solidFill>
                 <a:latin typeface="Microsoft YaHei"/>
               </a:rPr>
-              <a:t>Agent：跑测试 → 改错 → 重跑</a:t>
-            </a:r>
-          </a:p>
-        </p:txBody>
-      </p:sp>
-      <p:sp>
-        <p:nvSpPr>
-          <p:cNvPr id="11" name="TextBox 10"/>
+              <a:t>② 首跑失败 → 判定断言 0.99 不可达 → 改 0.95</a:t>
+            </a:r>
+          </a:p>
+        </p:txBody>
+      </p:sp>
+      <p:pic>
+        <p:nvPicPr>
+          <p:cNvPr id="11" name="Picture 10" descr="06-agent-summary.png"/>
+          <p:cNvPicPr>
+            <a:picLocks noChangeAspect="1"/>
+          </p:cNvPicPr>
+          <p:nvPr/>
+        </p:nvPicPr>
+        <p:blipFill>
+          <a:blip r:embed="rId4"/>
+          <a:stretch>
+            <a:fillRect/>
+          </a:stretch>
+        </p:blipFill>
+        <p:spPr>
+          <a:xfrm>
+            <a:off x="8275320" y="1554480"/>
+            <a:ext cx="3520440" cy="1905438"/>
+          </a:xfrm>
+          <a:prstGeom prst="rect">
+            <a:avLst/>
+          </a:prstGeom>
+        </p:spPr>
+      </p:pic>
+      <p:sp>
+        <p:nvSpPr>
+          <p:cNvPr id="12" name="TextBox 11"/>
           <p:cNvSpPr txBox="1"/>
           <p:nvPr/>
         </p:nvSpPr>
         <p:spPr>
           <a:xfrm>
-            <a:off x="685800" y="5440680"/>
-            <a:ext cx="5303520" cy="777240"/>
+            <a:off x="8275320" y="3831336"/>
+            <a:ext cx="3520440" cy="274320"/>
           </a:xfrm>
           <a:prstGeom prst="rect">
             <a:avLst/>
@@ -8605,49 +8629,29 @@
           </a:bodyPr>
           <a:lstStyle/>
           <a:p>
-            <a:pPr algn="l">
-              <a:lnSpc>
-                <a:spcPct val="135000"/>
-              </a:lnSpc>
-            </a:pPr>
-            <a:r>
-              <a:rPr sz="1150" b="0">
-                <a:solidFill>
-                  <a:srgbClr val="14213D"/>
-                </a:solidFill>
-                <a:latin typeface="Microsoft YaHei"/>
-              </a:rPr>
-              <a:t>补全是方案一的主场：Tab 接受，零打断。</a:t>
-            </a:r>
-          </a:p>
-          <a:p>
-            <a:pPr algn="l">
-              <a:lnSpc>
-                <a:spcPct val="135000"/>
-              </a:lnSpc>
-            </a:pPr>
-            <a:r>
-              <a:rPr sz="1150" b="0">
-                <a:solidFill>
-                  <a:srgbClr val="14213D"/>
-                </a:solidFill>
-                <a:latin typeface="Microsoft YaHei"/>
-              </a:rPr>
-              <a:t>但「写用例 + 运行 + 失败后自己改」只有 Agent 走得完。</a:t>
-            </a:r>
-          </a:p>
-        </p:txBody>
-      </p:sp>
-      <p:sp>
-        <p:nvSpPr>
-          <p:cNvPr id="12" name="TextBox 11"/>
+            <a:pPr algn="l"/>
+            <a:r>
+              <a:rPr sz="1100" b="0">
+                <a:solidFill>
+                  <a:srgbClr val="6B7280"/>
+                </a:solidFill>
+                <a:latin typeface="Microsoft YaHei"/>
+              </a:rPr>
+              <a:t>③ 收尾：8 用例全过，耗时 7:47 / 输入 527.5k</a:t>
+            </a:r>
+          </a:p>
+        </p:txBody>
+      </p:sp>
+      <p:sp>
+        <p:nvSpPr>
+          <p:cNvPr id="13" name="TextBox 12"/>
           <p:cNvSpPr txBox="1"/>
           <p:nvPr/>
         </p:nvSpPr>
         <p:spPr>
           <a:xfrm>
-            <a:off x="6217920" y="5440680"/>
-            <a:ext cx="5303520" cy="777240"/>
+            <a:off x="685800" y="4160520"/>
+            <a:ext cx="10972800" cy="914400"/>
           </a:xfrm>
           <a:prstGeom prst="rect">
             <a:avLst/>
@@ -8662,33 +8666,68 @@
           <a:p>
             <a:pPr algn="l">
               <a:lnSpc>
-                <a:spcPct val="135000"/>
+                <a:spcPct val="145000"/>
               </a:lnSpc>
             </a:pPr>
             <a:r>
-              <a:rPr sz="1150" b="0">
+              <a:rPr sz="1300" b="0">
                 <a:solidFill>
                   <a:srgbClr val="14213D"/>
                 </a:solidFill>
                 <a:latin typeface="Microsoft YaHei"/>
               </a:rPr>
-              <a:t>任务式指令：「跑一下 test.py，报错就定位修好，改完再跑确认」。</a:t>
+              <a:t>补全只需要 0.5 秒给我一行代码；这套流程用了 7 分 47 秒 —— 它自己建文件、装 pytest、跑测试、</a:t>
             </a:r>
           </a:p>
           <a:p>
             <a:pPr algn="l">
               <a:lnSpc>
-                <a:spcPct val="135000"/>
+                <a:spcPct val="145000"/>
               </a:lnSpc>
             </a:pPr>
             <a:r>
+              <a:rPr sz="1300" b="0">
+                <a:solidFill>
+                  <a:srgbClr val="14213D"/>
+                </a:solidFill>
+                <a:latin typeface="Microsoft YaHei"/>
+              </a:rPr>
+              <a:t>看懂失败原因、把断言改成可达的值。时间花在「执行」上，而不是「敲字」上。</a:t>
+            </a:r>
+          </a:p>
+        </p:txBody>
+      </p:sp>
+      <p:sp>
+        <p:nvSpPr>
+          <p:cNvPr id="14" name="TextBox 13"/>
+          <p:cNvSpPr txBox="1"/>
+          <p:nvPr/>
+        </p:nvSpPr>
+        <p:spPr>
+          <a:xfrm>
+            <a:off x="685800" y="5440680"/>
+            <a:ext cx="10972800" cy="548640"/>
+          </a:xfrm>
+          <a:prstGeom prst="rect">
+            <a:avLst/>
+          </a:prstGeom>
+          <a:noFill/>
+        </p:spPr>
+        <p:txBody>
+          <a:bodyPr wrap="square" anchor="t" lIns="0" rIns="0" tIns="0" bIns="0">
+            <a:spAutoFit/>
+          </a:bodyPr>
+          <a:lstStyle/>
+          <a:p>
+            <a:pPr algn="l"/>
+            <a:r>
               <a:rPr sz="1150" b="0">
                 <a:solidFill>
-                  <a:srgbClr val="14213D"/>
-                </a:solidFill>
-                <a:latin typeface="Microsoft YaHei"/>
-              </a:rPr>
-              <a:t>时间线出 Bash → Read/Edit → Bash，全程不用复制报错。</a:t>
+                  <a:srgbClr val="6B7280"/>
+                </a:solidFill>
+                <a:latin typeface="Microsoft YaHei"/>
+              </a:rPr>
+              <a:t>三张图是同一个任务的连续三段：下发 → 落盘（人工审查 diff）→ 收敛。全程没有复制过一次报错。</a:t>
             </a:r>
           </a:p>
         </p:txBody>

--- a/03-分享PPT.pptx
+++ b/03-分享PPT.pptx
@@ -1,22 +1,19 @@
 
 <file path=ppt/presentation.xml><?xml version="1.0" encoding="utf-8"?>
-<p:presentation xmlns:a="http://schemas.openxmlformats.org/drawingml/2006/main" xmlns:r="http://schemas.openxmlformats.org/officeDocument/2006/relationships" xmlns:p="http://schemas.openxmlformats.org/presentationml/2006/main" saveSubsetFonts="1" autoCompressPictures="0">
+<p:presentation xmlns:a="http://schemas.openxmlformats.org/drawingml/2006/main" xmlns:r="http://schemas.openxmlformats.org/officeDocument/2006/relationships" xmlns:p="http://schemas.openxmlformats.org/presentationml/2006/main" autoCompressPictures="0">
   <p:sldMasterIdLst>
     <p:sldMasterId id="2147483648" r:id="rId1"/>
   </p:sldMasterIdLst>
   <p:sldIdLst>
-    <p:sldId id="256" r:id="rId7"/>
-    <p:sldId id="257" r:id="rId8"/>
-    <p:sldId id="258" r:id="rId9"/>
-    <p:sldId id="259" r:id="rId10"/>
-    <p:sldId id="260" r:id="rId11"/>
-    <p:sldId id="261" r:id="rId12"/>
-    <p:sldId id="262" r:id="rId13"/>
-    <p:sldId id="263" r:id="rId14"/>
-    <p:sldId id="264" r:id="rId15"/>
-    <p:sldId id="265" r:id="rId16"/>
+    <p:sldId id="256" r:id="rId3"/>
+    <p:sldId id="257" r:id="rId4"/>
+    <p:sldId id="258" r:id="rId5"/>
+    <p:sldId id="259" r:id="rId6"/>
+    <p:sldId id="260" r:id="rId7"/>
+    <p:sldId id="263" r:id="rId8"/>
+    <p:sldId id="265" r:id="rId9"/>
   </p:sldIdLst>
-  <p:sldSz cx="12191695" cy="6858000" type="screen4x3"/>
+  <p:sldSz cx="12191365" cy="6858000" type="screen4x3"/>
   <p:notesSz cx="6858000" cy="9144000"/>
   <p:defaultTextStyle>
     <a:defPPr>
@@ -113,6 +110,22 @@
       </a:defRPr>
     </a:lvl9pPr>
   </p:defaultTextStyle>
+  <p:extLst>
+    <p:ext uri="{EFAFB233-063F-42B5-8137-9DF3F51BA10A}">
+      <p15:sldGuideLst xmlns:p15="http://schemas.microsoft.com/office/powerpoint/2012/main">
+        <p15:guide id="1" orient="horz" pos="2172" userDrawn="1">
+          <p15:clr>
+            <a:srgbClr val="A4A3A4"/>
+          </p15:clr>
+        </p15:guide>
+        <p15:guide id="2" pos="2880" userDrawn="1">
+          <p15:clr>
+            <a:srgbClr val="A4A3A4"/>
+          </p15:clr>
+        </p15:guide>
+      </p15:sldGuideLst>
+    </p:ext>
+  </p:extLst>
 </p:presentation>
 </file>
 
@@ -297,7 +310,6 @@
           <a:p>
             <a:fld id="{5BCAD085-E8A6-8845-BD4E-CB4CCA059FC4}" type="datetimeFigureOut">
               <a:rPr lang="en-US" smtClean="0"/>
-              <a:t>1/27/13</a:t>
             </a:fld>
             <a:endParaRPr lang="en-US"/>
           </a:p>
@@ -339,18 +351,12 @@
           <a:p>
             <a:fld id="{C1FF6DA9-008F-8B48-92A6-B652298478BF}" type="slidenum">
               <a:rPr lang="en-US" smtClean="0"/>
-              <a:t>‹#›</a:t>
             </a:fld>
             <a:endParaRPr lang="en-US"/>
           </a:p>
         </p:txBody>
       </p:sp>
     </p:spTree>
-    <p:extLst>
-      <p:ext uri="{BB962C8B-B14F-4D97-AF65-F5344CB8AC3E}">
-        <p14:creationId xmlns:p14="http://schemas.microsoft.com/office/powerpoint/2010/main" val="3168075583"/>
-      </p:ext>
-    </p:extLst>
   </p:cSld>
   <p:clrMapOvr>
     <a:masterClrMapping/>
@@ -418,6 +424,7 @@
               <a:rPr lang="en-US" smtClean="0"/>
               <a:t>Click to edit Master text styles</a:t>
             </a:r>
+            <a:endParaRPr lang="en-US" smtClean="0"/>
           </a:p>
           <a:p>
             <a:pPr lvl="1"/>
@@ -425,6 +432,7 @@
               <a:rPr lang="en-US" smtClean="0"/>
               <a:t>Second level</a:t>
             </a:r>
+            <a:endParaRPr lang="en-US" smtClean="0"/>
           </a:p>
           <a:p>
             <a:pPr lvl="2"/>
@@ -432,6 +440,7 @@
               <a:rPr lang="en-US" smtClean="0"/>
               <a:t>Third level</a:t>
             </a:r>
+            <a:endParaRPr lang="en-US" smtClean="0"/>
           </a:p>
           <a:p>
             <a:pPr lvl="3"/>
@@ -439,6 +448,7 @@
               <a:rPr lang="en-US" smtClean="0"/>
               <a:t>Fourth level</a:t>
             </a:r>
+            <a:endParaRPr lang="en-US" smtClean="0"/>
           </a:p>
           <a:p>
             <a:pPr lvl="4"/>
@@ -467,7 +477,6 @@
           <a:p>
             <a:fld id="{5BCAD085-E8A6-8845-BD4E-CB4CCA059FC4}" type="datetimeFigureOut">
               <a:rPr lang="en-US" smtClean="0"/>
-              <a:t>1/27/13</a:t>
             </a:fld>
             <a:endParaRPr lang="en-US"/>
           </a:p>
@@ -509,18 +518,12 @@
           <a:p>
             <a:fld id="{C1FF6DA9-008F-8B48-92A6-B652298478BF}" type="slidenum">
               <a:rPr lang="en-US" smtClean="0"/>
-              <a:t>‹#›</a:t>
             </a:fld>
             <a:endParaRPr lang="en-US"/>
           </a:p>
         </p:txBody>
       </p:sp>
     </p:spTree>
-    <p:extLst>
-      <p:ext uri="{BB962C8B-B14F-4D97-AF65-F5344CB8AC3E}">
-        <p14:creationId xmlns:p14="http://schemas.microsoft.com/office/powerpoint/2010/main" val="2910927964"/>
-      </p:ext>
-    </p:extLst>
   </p:cSld>
   <p:clrMapOvr>
     <a:masterClrMapping/>
@@ -598,6 +601,7 @@
               <a:rPr lang="en-US" smtClean="0"/>
               <a:t>Click to edit Master text styles</a:t>
             </a:r>
+            <a:endParaRPr lang="en-US" smtClean="0"/>
           </a:p>
           <a:p>
             <a:pPr lvl="1"/>
@@ -605,6 +609,7 @@
               <a:rPr lang="en-US" smtClean="0"/>
               <a:t>Second level</a:t>
             </a:r>
+            <a:endParaRPr lang="en-US" smtClean="0"/>
           </a:p>
           <a:p>
             <a:pPr lvl="2"/>
@@ -612,6 +617,7 @@
               <a:rPr lang="en-US" smtClean="0"/>
               <a:t>Third level</a:t>
             </a:r>
+            <a:endParaRPr lang="en-US" smtClean="0"/>
           </a:p>
           <a:p>
             <a:pPr lvl="3"/>
@@ -619,6 +625,7 @@
               <a:rPr lang="en-US" smtClean="0"/>
               <a:t>Fourth level</a:t>
             </a:r>
+            <a:endParaRPr lang="en-US" smtClean="0"/>
           </a:p>
           <a:p>
             <a:pPr lvl="4"/>
@@ -647,7 +654,6 @@
           <a:p>
             <a:fld id="{5BCAD085-E8A6-8845-BD4E-CB4CCA059FC4}" type="datetimeFigureOut">
               <a:rPr lang="en-US" smtClean="0"/>
-              <a:t>1/27/13</a:t>
             </a:fld>
             <a:endParaRPr lang="en-US"/>
           </a:p>
@@ -689,18 +695,12 @@
           <a:p>
             <a:fld id="{C1FF6DA9-008F-8B48-92A6-B652298478BF}" type="slidenum">
               <a:rPr lang="en-US" smtClean="0"/>
-              <a:t>‹#›</a:t>
             </a:fld>
             <a:endParaRPr lang="en-US"/>
           </a:p>
         </p:txBody>
       </p:sp>
     </p:spTree>
-    <p:extLst>
-      <p:ext uri="{BB962C8B-B14F-4D97-AF65-F5344CB8AC3E}">
-        <p14:creationId xmlns:p14="http://schemas.microsoft.com/office/powerpoint/2010/main" val="3612223792"/>
-      </p:ext>
-    </p:extLst>
   </p:cSld>
   <p:clrMapOvr>
     <a:masterClrMapping/>
@@ -768,6 +768,7 @@
               <a:rPr lang="en-US" smtClean="0"/>
               <a:t>Click to edit Master text styles</a:t>
             </a:r>
+            <a:endParaRPr lang="en-US" smtClean="0"/>
           </a:p>
           <a:p>
             <a:pPr lvl="1"/>
@@ -775,6 +776,7 @@
               <a:rPr lang="en-US" smtClean="0"/>
               <a:t>Second level</a:t>
             </a:r>
+            <a:endParaRPr lang="en-US" smtClean="0"/>
           </a:p>
           <a:p>
             <a:pPr lvl="2"/>
@@ -782,6 +784,7 @@
               <a:rPr lang="en-US" smtClean="0"/>
               <a:t>Third level</a:t>
             </a:r>
+            <a:endParaRPr lang="en-US" smtClean="0"/>
           </a:p>
           <a:p>
             <a:pPr lvl="3"/>
@@ -789,6 +792,7 @@
               <a:rPr lang="en-US" smtClean="0"/>
               <a:t>Fourth level</a:t>
             </a:r>
+            <a:endParaRPr lang="en-US" smtClean="0"/>
           </a:p>
           <a:p>
             <a:pPr lvl="4"/>
@@ -817,7 +821,6 @@
           <a:p>
             <a:fld id="{5BCAD085-E8A6-8845-BD4E-CB4CCA059FC4}" type="datetimeFigureOut">
               <a:rPr lang="en-US" smtClean="0"/>
-              <a:t>1/27/13</a:t>
             </a:fld>
             <a:endParaRPr lang="en-US"/>
           </a:p>
@@ -859,18 +862,12 @@
           <a:p>
             <a:fld id="{C1FF6DA9-008F-8B48-92A6-B652298478BF}" type="slidenum">
               <a:rPr lang="en-US" smtClean="0"/>
-              <a:t>‹#›</a:t>
             </a:fld>
             <a:endParaRPr lang="en-US"/>
           </a:p>
         </p:txBody>
       </p:sp>
     </p:spTree>
-    <p:extLst>
-      <p:ext uri="{BB962C8B-B14F-4D97-AF65-F5344CB8AC3E}">
-        <p14:creationId xmlns:p14="http://schemas.microsoft.com/office/powerpoint/2010/main" val="2614314258"/>
-      </p:ext>
-    </p:extLst>
   </p:cSld>
   <p:clrMapOvr>
     <a:masterClrMapping/>
@@ -1043,6 +1040,7 @@
               <a:rPr lang="en-US" smtClean="0"/>
               <a:t>Click to edit Master text styles</a:t>
             </a:r>
+            <a:endParaRPr lang="en-US" smtClean="0"/>
           </a:p>
         </p:txBody>
       </p:sp>
@@ -1063,7 +1061,6 @@
           <a:p>
             <a:fld id="{5BCAD085-E8A6-8845-BD4E-CB4CCA059FC4}" type="datetimeFigureOut">
               <a:rPr lang="en-US" smtClean="0"/>
-              <a:t>1/27/13</a:t>
             </a:fld>
             <a:endParaRPr lang="en-US"/>
           </a:p>
@@ -1105,18 +1102,12 @@
           <a:p>
             <a:fld id="{C1FF6DA9-008F-8B48-92A6-B652298478BF}" type="slidenum">
               <a:rPr lang="en-US" smtClean="0"/>
-              <a:t>‹#›</a:t>
             </a:fld>
             <a:endParaRPr lang="en-US"/>
           </a:p>
         </p:txBody>
       </p:sp>
     </p:spTree>
-    <p:extLst>
-      <p:ext uri="{BB962C8B-B14F-4D97-AF65-F5344CB8AC3E}">
-        <p14:creationId xmlns:p14="http://schemas.microsoft.com/office/powerpoint/2010/main" val="960648375"/>
-      </p:ext>
-    </p:extLst>
   </p:cSld>
   <p:clrMapOvr>
     <a:masterClrMapping/>
@@ -1217,6 +1208,7 @@
               <a:rPr lang="en-US" smtClean="0"/>
               <a:t>Click to edit Master text styles</a:t>
             </a:r>
+            <a:endParaRPr lang="en-US" smtClean="0"/>
           </a:p>
           <a:p>
             <a:pPr lvl="1"/>
@@ -1224,6 +1216,7 @@
               <a:rPr lang="en-US" smtClean="0"/>
               <a:t>Second level</a:t>
             </a:r>
+            <a:endParaRPr lang="en-US" smtClean="0"/>
           </a:p>
           <a:p>
             <a:pPr lvl="2"/>
@@ -1231,6 +1224,7 @@
               <a:rPr lang="en-US" smtClean="0"/>
               <a:t>Third level</a:t>
             </a:r>
+            <a:endParaRPr lang="en-US" smtClean="0"/>
           </a:p>
           <a:p>
             <a:pPr lvl="3"/>
@@ -1238,6 +1232,7 @@
               <a:rPr lang="en-US" smtClean="0"/>
               <a:t>Fourth level</a:t>
             </a:r>
+            <a:endParaRPr lang="en-US" smtClean="0"/>
           </a:p>
           <a:p>
             <a:pPr lvl="4"/>
@@ -1302,6 +1297,7 @@
               <a:rPr lang="en-US" smtClean="0"/>
               <a:t>Click to edit Master text styles</a:t>
             </a:r>
+            <a:endParaRPr lang="en-US" smtClean="0"/>
           </a:p>
           <a:p>
             <a:pPr lvl="1"/>
@@ -1309,6 +1305,7 @@
               <a:rPr lang="en-US" smtClean="0"/>
               <a:t>Second level</a:t>
             </a:r>
+            <a:endParaRPr lang="en-US" smtClean="0"/>
           </a:p>
           <a:p>
             <a:pPr lvl="2"/>
@@ -1316,6 +1313,7 @@
               <a:rPr lang="en-US" smtClean="0"/>
               <a:t>Third level</a:t>
             </a:r>
+            <a:endParaRPr lang="en-US" smtClean="0"/>
           </a:p>
           <a:p>
             <a:pPr lvl="3"/>
@@ -1323,6 +1321,7 @@
               <a:rPr lang="en-US" smtClean="0"/>
               <a:t>Fourth level</a:t>
             </a:r>
+            <a:endParaRPr lang="en-US" smtClean="0"/>
           </a:p>
           <a:p>
             <a:pPr lvl="4"/>
@@ -1351,7 +1350,6 @@
           <a:p>
             <a:fld id="{5BCAD085-E8A6-8845-BD4E-CB4CCA059FC4}" type="datetimeFigureOut">
               <a:rPr lang="en-US" smtClean="0"/>
-              <a:t>1/27/13</a:t>
             </a:fld>
             <a:endParaRPr lang="en-US"/>
           </a:p>
@@ -1393,18 +1391,12 @@
           <a:p>
             <a:fld id="{C1FF6DA9-008F-8B48-92A6-B652298478BF}" type="slidenum">
               <a:rPr lang="en-US" smtClean="0"/>
-              <a:t>‹#›</a:t>
             </a:fld>
             <a:endParaRPr lang="en-US"/>
           </a:p>
         </p:txBody>
       </p:sp>
     </p:spTree>
-    <p:extLst>
-      <p:ext uri="{BB962C8B-B14F-4D97-AF65-F5344CB8AC3E}">
-        <p14:creationId xmlns:p14="http://schemas.microsoft.com/office/powerpoint/2010/main" val="2782244947"/>
-      </p:ext>
-    </p:extLst>
   </p:cSld>
   <p:clrMapOvr>
     <a:masterClrMapping/>
@@ -1518,6 +1510,7 @@
               <a:rPr lang="en-US" smtClean="0"/>
               <a:t>Click to edit Master text styles</a:t>
             </a:r>
+            <a:endParaRPr lang="en-US" smtClean="0"/>
           </a:p>
         </p:txBody>
       </p:sp>
@@ -1574,6 +1567,7 @@
               <a:rPr lang="en-US" smtClean="0"/>
               <a:t>Click to edit Master text styles</a:t>
             </a:r>
+            <a:endParaRPr lang="en-US" smtClean="0"/>
           </a:p>
           <a:p>
             <a:pPr lvl="1"/>
@@ -1581,6 +1575,7 @@
               <a:rPr lang="en-US" smtClean="0"/>
               <a:t>Second level</a:t>
             </a:r>
+            <a:endParaRPr lang="en-US" smtClean="0"/>
           </a:p>
           <a:p>
             <a:pPr lvl="2"/>
@@ -1588,6 +1583,7 @@
               <a:rPr lang="en-US" smtClean="0"/>
               <a:t>Third level</a:t>
             </a:r>
+            <a:endParaRPr lang="en-US" smtClean="0"/>
           </a:p>
           <a:p>
             <a:pPr lvl="3"/>
@@ -1595,6 +1591,7 @@
               <a:rPr lang="en-US" smtClean="0"/>
               <a:t>Fourth level</a:t>
             </a:r>
+            <a:endParaRPr lang="en-US" smtClean="0"/>
           </a:p>
           <a:p>
             <a:pPr lvl="4"/>
@@ -1668,6 +1665,7 @@
               <a:rPr lang="en-US" smtClean="0"/>
               <a:t>Click to edit Master text styles</a:t>
             </a:r>
+            <a:endParaRPr lang="en-US" smtClean="0"/>
           </a:p>
         </p:txBody>
       </p:sp>
@@ -1724,6 +1722,7 @@
               <a:rPr lang="en-US" smtClean="0"/>
               <a:t>Click to edit Master text styles</a:t>
             </a:r>
+            <a:endParaRPr lang="en-US" smtClean="0"/>
           </a:p>
           <a:p>
             <a:pPr lvl="1"/>
@@ -1731,6 +1730,7 @@
               <a:rPr lang="en-US" smtClean="0"/>
               <a:t>Second level</a:t>
             </a:r>
+            <a:endParaRPr lang="en-US" smtClean="0"/>
           </a:p>
           <a:p>
             <a:pPr lvl="2"/>
@@ -1738,6 +1738,7 @@
               <a:rPr lang="en-US" smtClean="0"/>
               <a:t>Third level</a:t>
             </a:r>
+            <a:endParaRPr lang="en-US" smtClean="0"/>
           </a:p>
           <a:p>
             <a:pPr lvl="3"/>
@@ -1745,6 +1746,7 @@
               <a:rPr lang="en-US" smtClean="0"/>
               <a:t>Fourth level</a:t>
             </a:r>
+            <a:endParaRPr lang="en-US" smtClean="0"/>
           </a:p>
           <a:p>
             <a:pPr lvl="4"/>
@@ -1773,7 +1775,6 @@
           <a:p>
             <a:fld id="{5BCAD085-E8A6-8845-BD4E-CB4CCA059FC4}" type="datetimeFigureOut">
               <a:rPr lang="en-US" smtClean="0"/>
-              <a:t>1/27/13</a:t>
             </a:fld>
             <a:endParaRPr lang="en-US"/>
           </a:p>
@@ -1815,18 +1816,12 @@
           <a:p>
             <a:fld id="{C1FF6DA9-008F-8B48-92A6-B652298478BF}" type="slidenum">
               <a:rPr lang="en-US" smtClean="0"/>
-              <a:t>‹#›</a:t>
             </a:fld>
             <a:endParaRPr lang="en-US"/>
           </a:p>
         </p:txBody>
       </p:sp>
     </p:spTree>
-    <p:extLst>
-      <p:ext uri="{BB962C8B-B14F-4D97-AF65-F5344CB8AC3E}">
-        <p14:creationId xmlns:p14="http://schemas.microsoft.com/office/powerpoint/2010/main" val="990158736"/>
-      </p:ext>
-    </p:extLst>
   </p:cSld>
   <p:clrMapOvr>
     <a:masterClrMapping/>
@@ -1891,7 +1886,6 @@
           <a:p>
             <a:fld id="{5BCAD085-E8A6-8845-BD4E-CB4CCA059FC4}" type="datetimeFigureOut">
               <a:rPr lang="en-US" smtClean="0"/>
-              <a:t>1/27/13</a:t>
             </a:fld>
             <a:endParaRPr lang="en-US"/>
           </a:p>
@@ -1933,18 +1927,12 @@
           <a:p>
             <a:fld id="{C1FF6DA9-008F-8B48-92A6-B652298478BF}" type="slidenum">
               <a:rPr lang="en-US" smtClean="0"/>
-              <a:t>‹#›</a:t>
             </a:fld>
             <a:endParaRPr lang="en-US"/>
           </a:p>
         </p:txBody>
       </p:sp>
     </p:spTree>
-    <p:extLst>
-      <p:ext uri="{BB962C8B-B14F-4D97-AF65-F5344CB8AC3E}">
-        <p14:creationId xmlns:p14="http://schemas.microsoft.com/office/powerpoint/2010/main" val="727027711"/>
-      </p:ext>
-    </p:extLst>
   </p:cSld>
   <p:clrMapOvr>
     <a:masterClrMapping/>
@@ -1986,7 +1974,6 @@
           <a:p>
             <a:fld id="{5BCAD085-E8A6-8845-BD4E-CB4CCA059FC4}" type="datetimeFigureOut">
               <a:rPr lang="en-US" smtClean="0"/>
-              <a:t>1/27/13</a:t>
             </a:fld>
             <a:endParaRPr lang="en-US"/>
           </a:p>
@@ -2028,18 +2015,12 @@
           <a:p>
             <a:fld id="{C1FF6DA9-008F-8B48-92A6-B652298478BF}" type="slidenum">
               <a:rPr lang="en-US" smtClean="0"/>
-              <a:t>‹#›</a:t>
             </a:fld>
             <a:endParaRPr lang="en-US"/>
           </a:p>
         </p:txBody>
       </p:sp>
     </p:spTree>
-    <p:extLst>
-      <p:ext uri="{BB962C8B-B14F-4D97-AF65-F5344CB8AC3E}">
-        <p14:creationId xmlns:p14="http://schemas.microsoft.com/office/powerpoint/2010/main" val="1212999818"/>
-      </p:ext>
-    </p:extLst>
   </p:cSld>
   <p:clrMapOvr>
     <a:masterClrMapping/>
@@ -2149,6 +2130,7 @@
               <a:rPr lang="en-US" smtClean="0"/>
               <a:t>Click to edit Master text styles</a:t>
             </a:r>
+            <a:endParaRPr lang="en-US" smtClean="0"/>
           </a:p>
           <a:p>
             <a:pPr lvl="1"/>
@@ -2156,6 +2138,7 @@
               <a:rPr lang="en-US" smtClean="0"/>
               <a:t>Second level</a:t>
             </a:r>
+            <a:endParaRPr lang="en-US" smtClean="0"/>
           </a:p>
           <a:p>
             <a:pPr lvl="2"/>
@@ -2163,6 +2146,7 @@
               <a:rPr lang="en-US" smtClean="0"/>
               <a:t>Third level</a:t>
             </a:r>
+            <a:endParaRPr lang="en-US" smtClean="0"/>
           </a:p>
           <a:p>
             <a:pPr lvl="3"/>
@@ -2170,6 +2154,7 @@
               <a:rPr lang="en-US" smtClean="0"/>
               <a:t>Fourth level</a:t>
             </a:r>
+            <a:endParaRPr lang="en-US" smtClean="0"/>
           </a:p>
           <a:p>
             <a:pPr lvl="4"/>
@@ -2243,6 +2228,7 @@
               <a:rPr lang="en-US" smtClean="0"/>
               <a:t>Click to edit Master text styles</a:t>
             </a:r>
+            <a:endParaRPr lang="en-US" smtClean="0"/>
           </a:p>
         </p:txBody>
       </p:sp>
@@ -2263,7 +2249,6 @@
           <a:p>
             <a:fld id="{5BCAD085-E8A6-8845-BD4E-CB4CCA059FC4}" type="datetimeFigureOut">
               <a:rPr lang="en-US" smtClean="0"/>
-              <a:t>1/27/13</a:t>
             </a:fld>
             <a:endParaRPr lang="en-US"/>
           </a:p>
@@ -2305,18 +2290,12 @@
           <a:p>
             <a:fld id="{C1FF6DA9-008F-8B48-92A6-B652298478BF}" type="slidenum">
               <a:rPr lang="en-US" smtClean="0"/>
-              <a:t>‹#›</a:t>
             </a:fld>
             <a:endParaRPr lang="en-US"/>
           </a:p>
         </p:txBody>
       </p:sp>
     </p:spTree>
-    <p:extLst>
-      <p:ext uri="{BB962C8B-B14F-4D97-AF65-F5344CB8AC3E}">
-        <p14:creationId xmlns:p14="http://schemas.microsoft.com/office/powerpoint/2010/main" val="1840726560"/>
-      </p:ext>
-    </p:extLst>
   </p:cSld>
   <p:clrMapOvr>
     <a:masterClrMapping/>
@@ -2496,6 +2475,7 @@
               <a:rPr lang="en-US" smtClean="0"/>
               <a:t>Click to edit Master text styles</a:t>
             </a:r>
+            <a:endParaRPr lang="en-US" smtClean="0"/>
           </a:p>
         </p:txBody>
       </p:sp>
@@ -2516,7 +2496,6 @@
           <a:p>
             <a:fld id="{5BCAD085-E8A6-8845-BD4E-CB4CCA059FC4}" type="datetimeFigureOut">
               <a:rPr lang="en-US" smtClean="0"/>
-              <a:t>1/27/13</a:t>
             </a:fld>
             <a:endParaRPr lang="en-US"/>
           </a:p>
@@ -2558,18 +2537,12 @@
           <a:p>
             <a:fld id="{C1FF6DA9-008F-8B48-92A6-B652298478BF}" type="slidenum">
               <a:rPr lang="en-US" smtClean="0"/>
-              <a:t>‹#›</a:t>
             </a:fld>
             <a:endParaRPr lang="en-US"/>
           </a:p>
         </p:txBody>
       </p:sp>
     </p:spTree>
-    <p:extLst>
-      <p:ext uri="{BB962C8B-B14F-4D97-AF65-F5344CB8AC3E}">
-        <p14:creationId xmlns:p14="http://schemas.microsoft.com/office/powerpoint/2010/main" val="3889236939"/>
-      </p:ext>
-    </p:extLst>
   </p:cSld>
   <p:clrMapOvr>
     <a:masterClrMapping/>
@@ -2662,6 +2635,7 @@
               <a:rPr lang="en-US" smtClean="0"/>
               <a:t>Click to edit Master text styles</a:t>
             </a:r>
+            <a:endParaRPr lang="en-US" smtClean="0"/>
           </a:p>
           <a:p>
             <a:pPr lvl="1"/>
@@ -2669,6 +2643,7 @@
               <a:rPr lang="en-US" smtClean="0"/>
               <a:t>Second level</a:t>
             </a:r>
+            <a:endParaRPr lang="en-US" smtClean="0"/>
           </a:p>
           <a:p>
             <a:pPr lvl="2"/>
@@ -2676,6 +2651,7 @@
               <a:rPr lang="en-US" smtClean="0"/>
               <a:t>Third level</a:t>
             </a:r>
+            <a:endParaRPr lang="en-US" smtClean="0"/>
           </a:p>
           <a:p>
             <a:pPr lvl="3"/>
@@ -2683,6 +2659,7 @@
               <a:rPr lang="en-US" smtClean="0"/>
               <a:t>Fourth level</a:t>
             </a:r>
+            <a:endParaRPr lang="en-US" smtClean="0"/>
           </a:p>
           <a:p>
             <a:pPr lvl="4"/>
@@ -2729,7 +2706,6 @@
           <a:p>
             <a:fld id="{5BCAD085-E8A6-8845-BD4E-CB4CCA059FC4}" type="datetimeFigureOut">
               <a:rPr lang="en-US" smtClean="0"/>
-              <a:t>1/27/13</a:t>
             </a:fld>
             <a:endParaRPr lang="en-US"/>
           </a:p>
@@ -2807,18 +2783,12 @@
           <a:p>
             <a:fld id="{C1FF6DA9-008F-8B48-92A6-B652298478BF}" type="slidenum">
               <a:rPr lang="en-US" smtClean="0"/>
-              <a:t>‹#›</a:t>
             </a:fld>
             <a:endParaRPr lang="en-US"/>
           </a:p>
         </p:txBody>
       </p:sp>
     </p:spTree>
-    <p:extLst>
-      <p:ext uri="{BB962C8B-B14F-4D97-AF65-F5344CB8AC3E}">
-        <p14:creationId xmlns:p14="http://schemas.microsoft.com/office/powerpoint/2010/main" val="2209977519"/>
-      </p:ext>
-    </p:extLst>
   </p:cSld>
   <p:clrMap bg1="lt1" tx1="dk1" bg2="lt2" tx2="dk2" accent1="accent1" accent2="accent2" accent3="accent3" accent4="accent4" accent5="accent5" accent6="accent6" hlink="hlink" folHlink="folHlink"/>
   <p:sldLayoutIdLst>
@@ -2856,7 +2826,7 @@
         <a:spcBef>
           <a:spcPct val="20000"/>
         </a:spcBef>
-        <a:buFont typeface="Arial"/>
+        <a:buFont typeface="Arial" panose="020B0604020202020204"/>
         <a:buChar char="•"/>
         <a:defRPr sz="3200" kern="1200">
           <a:solidFill>
@@ -2871,7 +2841,7 @@
         <a:spcBef>
           <a:spcPct val="20000"/>
         </a:spcBef>
-        <a:buFont typeface="Arial"/>
+        <a:buFont typeface="Arial" panose="020B0604020202020204"/>
         <a:buChar char="–"/>
         <a:defRPr sz="2800" kern="1200">
           <a:solidFill>
@@ -2886,7 +2856,7 @@
         <a:spcBef>
           <a:spcPct val="20000"/>
         </a:spcBef>
-        <a:buFont typeface="Arial"/>
+        <a:buFont typeface="Arial" panose="020B0604020202020204"/>
         <a:buChar char="•"/>
         <a:defRPr sz="2400" kern="1200">
           <a:solidFill>
@@ -2901,7 +2871,7 @@
         <a:spcBef>
           <a:spcPct val="20000"/>
         </a:spcBef>
-        <a:buFont typeface="Arial"/>
+        <a:buFont typeface="Arial" panose="020B0604020202020204"/>
         <a:buChar char="–"/>
         <a:defRPr sz="2000" kern="1200">
           <a:solidFill>
@@ -2916,7 +2886,7 @@
         <a:spcBef>
           <a:spcPct val="20000"/>
         </a:spcBef>
-        <a:buFont typeface="Arial"/>
+        <a:buFont typeface="Arial" panose="020B0604020202020204"/>
         <a:buChar char="»"/>
         <a:defRPr sz="2000" kern="1200">
           <a:solidFill>
@@ -2931,7 +2901,7 @@
         <a:spcBef>
           <a:spcPct val="20000"/>
         </a:spcBef>
-        <a:buFont typeface="Arial"/>
+        <a:buFont typeface="Arial" panose="020B0604020202020204"/>
         <a:buChar char="•"/>
         <a:defRPr sz="2000" kern="1200">
           <a:solidFill>
@@ -2946,7 +2916,7 @@
         <a:spcBef>
           <a:spcPct val="20000"/>
         </a:spcBef>
-        <a:buFont typeface="Arial"/>
+        <a:buFont typeface="Arial" panose="020B0604020202020204"/>
         <a:buChar char="•"/>
         <a:defRPr sz="2000" kern="1200">
           <a:solidFill>
@@ -2961,7 +2931,7 @@
         <a:spcBef>
           <a:spcPct val="20000"/>
         </a:spcBef>
-        <a:buFont typeface="Arial"/>
+        <a:buFont typeface="Arial" panose="020B0604020202020204"/>
         <a:buChar char="•"/>
         <a:defRPr sz="2000" kern="1200">
           <a:solidFill>
@@ -2976,7 +2946,7 @@
         <a:spcBef>
           <a:spcPct val="20000"/>
         </a:spcBef>
-        <a:buFont typeface="Arial"/>
+        <a:buFont typeface="Arial" panose="020B0604020202020204"/>
         <a:buChar char="•"/>
         <a:defRPr sz="2000" kern="1200">
           <a:solidFill>
@@ -3088,7 +3058,7 @@
 </file>
 
 <file path=ppt/slides/slide1.xml><?xml version="1.0" encoding="utf-8"?>
-<p:sld xmlns:a="http://schemas.openxmlformats.org/drawingml/2006/main" xmlns:p="http://schemas.openxmlformats.org/presentationml/2006/main" xmlns:r="http://schemas.openxmlformats.org/officeDocument/2006/relationships">
+<p:sld xmlns:a="http://schemas.openxmlformats.org/drawingml/2006/main" xmlns:r="http://schemas.openxmlformats.org/officeDocument/2006/relationships" xmlns:p="http://schemas.openxmlformats.org/presentationml/2006/main">
   <p:cSld>
     <p:spTree>
       <p:nvGrpSpPr>
@@ -3202,7 +3172,7 @@
           <a:noFill/>
         </p:spPr>
         <p:txBody>
-          <a:bodyPr wrap="square" anchor="t" lIns="0" rIns="0" tIns="0" bIns="0">
+          <a:bodyPr wrap="square" lIns="0" tIns="0" rIns="0" bIns="0" anchor="t">
             <a:spAutoFit/>
           </a:bodyPr>
           <a:lstStyle/>
@@ -3213,10 +3183,16 @@
                 <a:solidFill>
                   <a:srgbClr val="8FB6FF"/>
                 </a:solidFill>
-                <a:latin typeface="Microsoft YaHei"/>
+                <a:latin typeface="微软雅黑" panose="020B0503020204020204" charset="-122"/>
               </a:rPr>
               <a:t>AI 编程助手配置实训 · 方案二</a:t>
             </a:r>
+            <a:endParaRPr sz="1500" b="1">
+              <a:solidFill>
+                <a:srgbClr val="8FB6FF"/>
+              </a:solidFill>
+              <a:latin typeface="微软雅黑" panose="020B0503020204020204" charset="-122"/>
+            </a:endParaRPr>
           </a:p>
         </p:txBody>
       </p:sp>
@@ -3237,7 +3213,7 @@
           <a:noFill/>
         </p:spPr>
         <p:txBody>
-          <a:bodyPr wrap="square" anchor="t" lIns="0" rIns="0" tIns="0" bIns="0">
+          <a:bodyPr wrap="square" lIns="0" tIns="0" rIns="0" bIns="0" anchor="t">
             <a:spAutoFit/>
           </a:bodyPr>
           <a:lstStyle/>
@@ -3252,10 +3228,16 @@
                 <a:solidFill>
                   <a:srgbClr val="FFFFFF"/>
                 </a:solidFill>
-                <a:latin typeface="Microsoft YaHei"/>
+                <a:latin typeface="微软雅黑" panose="020B0503020204020204" charset="-122"/>
               </a:rPr>
               <a:t>为 PyCharm 配置</a:t>
             </a:r>
+            <a:endParaRPr sz="4000" b="1">
+              <a:solidFill>
+                <a:srgbClr val="FFFFFF"/>
+              </a:solidFill>
+              <a:latin typeface="微软雅黑" panose="020B0503020204020204" charset="-122"/>
+            </a:endParaRPr>
           </a:p>
           <a:p>
             <a:pPr algn="l">
@@ -3268,10 +3250,16 @@
                 <a:solidFill>
                   <a:srgbClr val="FFFFFF"/>
                 </a:solidFill>
-                <a:latin typeface="Microsoft YaHei"/>
+                <a:latin typeface="微软雅黑" panose="020B0503020204020204" charset="-122"/>
               </a:rPr>
               <a:t>桌面 Agent + IDE 插件</a:t>
             </a:r>
+            <a:endParaRPr sz="4000" b="1">
+              <a:solidFill>
+                <a:srgbClr val="FFFFFF"/>
+              </a:solidFill>
+              <a:latin typeface="微软雅黑" panose="020B0503020204020204" charset="-122"/>
+            </a:endParaRPr>
           </a:p>
         </p:txBody>
       </p:sp>
@@ -3336,7 +3324,7 @@
           <a:noFill/>
         </p:spPr>
         <p:txBody>
-          <a:bodyPr wrap="square" anchor="t" lIns="0" rIns="0" tIns="0" bIns="0">
+          <a:bodyPr wrap="square" lIns="0" tIns="0" rIns="0" bIns="0" anchor="t">
             <a:spAutoFit/>
           </a:bodyPr>
           <a:lstStyle/>
@@ -3347,10 +3335,16 @@
                 <a:solidFill>
                   <a:srgbClr val="C7D3E6"/>
                 </a:solidFill>
-                <a:latin typeface="Microsoft YaHei"/>
+                <a:latin typeface="微软雅黑" panose="020B0503020204020204" charset="-122"/>
               </a:rPr>
               <a:t>Claude Code Agent（v2.1.283） + PyCharm 插件「Claude Code」（v0.5.7）</a:t>
             </a:r>
+            <a:endParaRPr sz="1800" b="0">
+              <a:solidFill>
+                <a:srgbClr val="C7D3E6"/>
+              </a:solidFill>
+              <a:latin typeface="微软雅黑" panose="020B0503020204020204" charset="-122"/>
+            </a:endParaRPr>
           </a:p>
         </p:txBody>
       </p:sp>
@@ -3371,7 +3365,7 @@
           <a:noFill/>
         </p:spPr>
         <p:txBody>
-          <a:bodyPr wrap="square" anchor="t" lIns="0" rIns="0" tIns="0" bIns="0">
+          <a:bodyPr wrap="square" lIns="0" tIns="0" rIns="0" bIns="0" anchor="t">
             <a:spAutoFit/>
           </a:bodyPr>
           <a:lstStyle/>
@@ -3382,10 +3376,16 @@
                 <a:solidFill>
                   <a:srgbClr val="FFFFFF"/>
                 </a:solidFill>
-                <a:latin typeface="Microsoft YaHei"/>
+                <a:latin typeface="微软雅黑" panose="020B0503020204020204" charset="-122"/>
               </a:rPr>
               <a:t>肖俊涛 · 2405100606</a:t>
             </a:r>
+            <a:endParaRPr sz="1600" b="1">
+              <a:solidFill>
+                <a:srgbClr val="FFFFFF"/>
+              </a:solidFill>
+              <a:latin typeface="微软雅黑" panose="020B0503020204020204" charset="-122"/>
+            </a:endParaRPr>
           </a:p>
         </p:txBody>
       </p:sp>
@@ -3406,7 +3406,7 @@
           <a:noFill/>
         </p:spPr>
         <p:txBody>
-          <a:bodyPr wrap="square" anchor="t" lIns="0" rIns="0" tIns="0" bIns="0">
+          <a:bodyPr wrap="square" lIns="0" tIns="0" rIns="0" bIns="0" anchor="t">
             <a:spAutoFit/>
           </a:bodyPr>
           <a:lstStyle/>
@@ -3417,276 +3417,16 @@
                 <a:solidFill>
                   <a:srgbClr val="9FAFC6"/>
                 </a:solidFill>
-                <a:latin typeface="Microsoft YaHei"/>
+                <a:latin typeface="微软雅黑" panose="020B0503020204020204" charset="-122"/>
               </a:rPr>
               <a:t>PyCharm 2026.2.2 (PY-262.10315.174) · Windows · 2026-10-21</a:t>
             </a:r>
-          </a:p>
-        </p:txBody>
-      </p:sp>
-    </p:spTree>
-  </p:cSld>
-  <p:clrMapOvr>
-    <a:masterClrMapping/>
-  </p:clrMapOvr>
-</p:sld>
-</file>
-
-<file path=ppt/slides/slide10.xml><?xml version="1.0" encoding="utf-8"?>
-<p:sld xmlns:a="http://schemas.openxmlformats.org/drawingml/2006/main" xmlns:p="http://schemas.openxmlformats.org/presentationml/2006/main" xmlns:r="http://schemas.openxmlformats.org/officeDocument/2006/relationships">
-  <p:cSld>
-    <p:spTree>
-      <p:nvGrpSpPr>
-        <p:cNvPr id="1" name=""/>
-        <p:cNvGrpSpPr/>
-        <p:nvPr/>
-      </p:nvGrpSpPr>
-      <p:grpSpPr/>
-      <p:sp>
-        <p:nvSpPr>
-          <p:cNvPr id="2" name="Rectangle 1"/>
-          <p:cNvSpPr/>
-          <p:nvPr/>
-        </p:nvSpPr>
-        <p:spPr>
-          <a:xfrm>
-            <a:off x="0" y="0"/>
-            <a:ext cx="12191695" cy="6858000"/>
-          </a:xfrm>
-          <a:prstGeom prst="rect">
-            <a:avLst/>
-          </a:prstGeom>
-          <a:solidFill>
-            <a:srgbClr val="14213D"/>
-          </a:solidFill>
-          <a:ln>
-            <a:noFill/>
-          </a:ln>
-          <a:effectLst/>
-        </p:spPr>
-        <p:style>
-          <a:lnRef idx="1">
-            <a:schemeClr val="accent1"/>
-          </a:lnRef>
-          <a:fillRef idx="3">
-            <a:schemeClr val="accent1"/>
-          </a:fillRef>
-          <a:effectRef idx="2">
-            <a:schemeClr val="accent1"/>
-          </a:effectRef>
-          <a:fontRef idx="minor">
-            <a:schemeClr val="lt1"/>
-          </a:fontRef>
-        </p:style>
-        <p:txBody>
-          <a:bodyPr rtlCol="0" anchor="ctr"/>
-          <a:lstStyle/>
-          <a:p>
-            <a:pPr algn="ctr"/>
-          </a:p>
-        </p:txBody>
-      </p:sp>
-      <p:sp>
-        <p:nvSpPr>
-          <p:cNvPr id="3" name="Rectangle 2"/>
-          <p:cNvSpPr/>
-          <p:nvPr/>
-        </p:nvSpPr>
-        <p:spPr>
-          <a:xfrm>
-            <a:off x="0" y="0"/>
-            <a:ext cx="12191695" cy="164592"/>
-          </a:xfrm>
-          <a:prstGeom prst="rect">
-            <a:avLst/>
-          </a:prstGeom>
-          <a:solidFill>
-            <a:srgbClr val="2F6FEB"/>
-          </a:solidFill>
-          <a:ln>
-            <a:noFill/>
-          </a:ln>
-          <a:effectLst/>
-        </p:spPr>
-        <p:style>
-          <a:lnRef idx="1">
-            <a:schemeClr val="accent1"/>
-          </a:lnRef>
-          <a:fillRef idx="3">
-            <a:schemeClr val="accent1"/>
-          </a:fillRef>
-          <a:effectRef idx="2">
-            <a:schemeClr val="accent1"/>
-          </a:effectRef>
-          <a:fontRef idx="minor">
-            <a:schemeClr val="lt1"/>
-          </a:fontRef>
-        </p:style>
-        <p:txBody>
-          <a:bodyPr rtlCol="0" anchor="ctr"/>
-          <a:lstStyle/>
-          <a:p>
-            <a:pPr algn="ctr"/>
-          </a:p>
-        </p:txBody>
-      </p:sp>
-      <p:sp>
-        <p:nvSpPr>
-          <p:cNvPr id="4" name="TextBox 3"/>
-          <p:cNvSpPr txBox="1"/>
-          <p:nvPr/>
-        </p:nvSpPr>
-        <p:spPr>
-          <a:xfrm>
-            <a:off x="868680" y="2011680"/>
-            <a:ext cx="10515600" cy="365760"/>
-          </a:xfrm>
-          <a:prstGeom prst="rect">
-            <a:avLst/>
-          </a:prstGeom>
-          <a:noFill/>
-        </p:spPr>
-        <p:txBody>
-          <a:bodyPr wrap="square" anchor="t" lIns="0" rIns="0" tIns="0" bIns="0">
-            <a:spAutoFit/>
-          </a:bodyPr>
-          <a:lstStyle/>
-          <a:p>
-            <a:pPr algn="l"/>
-            <a:r>
-              <a:rPr sz="1400" b="1">
-                <a:solidFill>
-                  <a:srgbClr val="8FB6FF"/>
-                </a:solidFill>
-                <a:latin typeface="Microsoft YaHei"/>
-              </a:rPr>
-              <a:t>5 分钟分享 · 现场可操作</a:t>
-            </a:r>
-          </a:p>
-        </p:txBody>
-      </p:sp>
-      <p:sp>
-        <p:nvSpPr>
-          <p:cNvPr id="5" name="TextBox 4"/>
-          <p:cNvSpPr txBox="1"/>
-          <p:nvPr/>
-        </p:nvSpPr>
-        <p:spPr>
-          <a:xfrm>
-            <a:off x="868680" y="2468880"/>
-            <a:ext cx="10424160" cy="1097280"/>
-          </a:xfrm>
-          <a:prstGeom prst="rect">
-            <a:avLst/>
-          </a:prstGeom>
-          <a:noFill/>
-        </p:spPr>
-        <p:txBody>
-          <a:bodyPr wrap="square" anchor="t" lIns="0" rIns="0" tIns="0" bIns="0">
-            <a:spAutoFit/>
-          </a:bodyPr>
-          <a:lstStyle/>
-          <a:p>
-            <a:pPr algn="l"/>
-            <a:r>
-              <a:rPr sz="4400" b="1">
-                <a:solidFill>
-                  <a:srgbClr val="FFFFFF"/>
-                </a:solidFill>
-                <a:latin typeface="Microsoft YaHei"/>
-              </a:rPr>
-              <a:t>谢谢，欢迎提问</a:t>
-            </a:r>
-          </a:p>
-        </p:txBody>
-      </p:sp>
-      <p:sp>
-        <p:nvSpPr>
-          <p:cNvPr id="6" name="TextBox 5"/>
-          <p:cNvSpPr txBox="1"/>
-          <p:nvPr/>
-        </p:nvSpPr>
-        <p:spPr>
-          <a:xfrm>
-            <a:off x="868680" y="3611880"/>
-            <a:ext cx="10424160" cy="914400"/>
-          </a:xfrm>
-          <a:prstGeom prst="rect">
-            <a:avLst/>
-          </a:prstGeom>
-          <a:noFill/>
-        </p:spPr>
-        <p:txBody>
-          <a:bodyPr wrap="square" anchor="t" lIns="0" rIns="0" tIns="0" bIns="0">
-            <a:spAutoFit/>
-          </a:bodyPr>
-          <a:lstStyle/>
-          <a:p>
-            <a:pPr algn="l">
-              <a:lnSpc>
-                <a:spcPct val="145000"/>
-              </a:lnSpc>
-            </a:pPr>
-            <a:r>
-              <a:rPr sz="1500" b="0">
-                <a:solidFill>
-                  <a:srgbClr val="C7D3E6"/>
-                </a:solidFill>
-                <a:latin typeface="Microsoft YaHei"/>
-              </a:rPr>
-              <a:t>一个可以直接复现的结论：</a:t>
-            </a:r>
-          </a:p>
-          <a:p>
-            <a:pPr algn="l">
-              <a:lnSpc>
-                <a:spcPct val="145000"/>
-              </a:lnSpc>
-            </a:pPr>
-            <a:r>
-              <a:rPr sz="1500" b="0">
-                <a:solidFill>
-                  <a:srgbClr val="C7D3E6"/>
-                </a:solidFill>
-                <a:latin typeface="Microsoft YaHei"/>
-              </a:rPr>
-              <a:t>先装手（Agent），再装窗口（插件），配置收口到 settings.json 一处。</a:t>
-            </a:r>
-          </a:p>
-        </p:txBody>
-      </p:sp>
-      <p:sp>
-        <p:nvSpPr>
-          <p:cNvPr id="7" name="TextBox 6"/>
-          <p:cNvSpPr txBox="1"/>
-          <p:nvPr/>
-        </p:nvSpPr>
-        <p:spPr>
-          <a:xfrm>
-            <a:off x="868680" y="5394960"/>
-            <a:ext cx="10424160" cy="365760"/>
-          </a:xfrm>
-          <a:prstGeom prst="rect">
-            <a:avLst/>
-          </a:prstGeom>
-          <a:noFill/>
-        </p:spPr>
-        <p:txBody>
-          <a:bodyPr wrap="square" anchor="t" lIns="0" rIns="0" tIns="0" bIns="0">
-            <a:spAutoFit/>
-          </a:bodyPr>
-          <a:lstStyle/>
-          <a:p>
-            <a:pPr algn="l"/>
-            <a:r>
-              <a:rPr sz="1200" b="0">
-                <a:solidFill>
-                  <a:srgbClr val="9FAFC6"/>
-                </a:solidFill>
-                <a:latin typeface="Microsoft YaHei"/>
-              </a:rPr>
-              <a:t>肖俊涛 · 2405100606 · 2026-10-21</a:t>
-            </a:r>
+            <a:endParaRPr sz="1300" b="0">
+              <a:solidFill>
+                <a:srgbClr val="9FAFC6"/>
+              </a:solidFill>
+              <a:latin typeface="微软雅黑" panose="020B0503020204020204" charset="-122"/>
+            </a:endParaRPr>
           </a:p>
         </p:txBody>
       </p:sp>
@@ -3699,7 +3439,7 @@
 </file>
 
 <file path=ppt/slides/slide2.xml><?xml version="1.0" encoding="utf-8"?>
-<p:sld xmlns:a="http://schemas.openxmlformats.org/drawingml/2006/main" xmlns:p="http://schemas.openxmlformats.org/presentationml/2006/main" xmlns:r="http://schemas.openxmlformats.org/officeDocument/2006/relationships">
+<p:sld xmlns:a="http://schemas.openxmlformats.org/drawingml/2006/main" xmlns:r="http://schemas.openxmlformats.org/officeDocument/2006/relationships" xmlns:p="http://schemas.openxmlformats.org/presentationml/2006/main">
   <p:cSld>
     <p:spTree>
       <p:nvGrpSpPr>
@@ -3769,7 +3509,7 @@
           <a:noFill/>
         </p:spPr>
         <p:txBody>
-          <a:bodyPr wrap="square" anchor="t" lIns="0" rIns="0" tIns="0" bIns="0">
+          <a:bodyPr wrap="square" lIns="0" tIns="0" rIns="0" bIns="0" anchor="t">
             <a:spAutoFit/>
           </a:bodyPr>
           <a:lstStyle/>
@@ -3780,10 +3520,16 @@
                 <a:solidFill>
                   <a:srgbClr val="2F6FEB"/>
                 </a:solidFill>
-                <a:latin typeface="Microsoft YaHei"/>
+                <a:latin typeface="微软雅黑" panose="020B0503020204020204" charset="-122"/>
               </a:rPr>
               <a:t>判定结论</a:t>
             </a:r>
+            <a:endParaRPr sz="1200" b="1">
+              <a:solidFill>
+                <a:srgbClr val="2F6FEB"/>
+              </a:solidFill>
+              <a:latin typeface="微软雅黑" panose="020B0503020204020204" charset="-122"/>
+            </a:endParaRPr>
           </a:p>
         </p:txBody>
       </p:sp>
@@ -3804,7 +3550,7 @@
           <a:noFill/>
         </p:spPr>
         <p:txBody>
-          <a:bodyPr wrap="square" anchor="t" lIns="0" rIns="0" tIns="0" bIns="0">
+          <a:bodyPr wrap="square" lIns="0" tIns="0" rIns="0" bIns="0" anchor="t">
             <a:spAutoFit/>
           </a:bodyPr>
           <a:lstStyle/>
@@ -3815,10 +3561,16 @@
                 <a:solidFill>
                   <a:srgbClr val="14213D"/>
                 </a:solidFill>
-                <a:latin typeface="Microsoft YaHei"/>
+                <a:latin typeface="微软雅黑" panose="020B0503020204020204" charset="-122"/>
               </a:rPr>
               <a:t>先回答一个问题：我现在配的是方案几？</a:t>
             </a:r>
+            <a:endParaRPr sz="2900" b="1">
+              <a:solidFill>
+                <a:srgbClr val="14213D"/>
+              </a:solidFill>
+              <a:latin typeface="微软雅黑" panose="020B0503020204020204" charset="-122"/>
+            </a:endParaRPr>
           </a:p>
         </p:txBody>
       </p:sp>
@@ -3883,7 +3635,7 @@
           <a:noFill/>
         </p:spPr>
         <p:txBody>
-          <a:bodyPr wrap="square" anchor="t" lIns="0" rIns="0" tIns="0" bIns="0">
+          <a:bodyPr wrap="square" lIns="0" tIns="0" rIns="0" bIns="0" anchor="t">
             <a:spAutoFit/>
           </a:bodyPr>
           <a:lstStyle/>
@@ -3894,10 +3646,16 @@
                 <a:solidFill>
                   <a:srgbClr val="6B7280"/>
                 </a:solidFill>
-                <a:latin typeface="Microsoft YaHei"/>
+                <a:latin typeface="微软雅黑" panose="020B0503020204020204" charset="-122"/>
               </a:rPr>
               <a:t>2</a:t>
             </a:r>
+            <a:endParaRPr sz="1100" b="0">
+              <a:solidFill>
+                <a:srgbClr val="6B7280"/>
+              </a:solidFill>
+              <a:latin typeface="微软雅黑" panose="020B0503020204020204" charset="-122"/>
+            </a:endParaRPr>
           </a:p>
         </p:txBody>
       </p:sp>
@@ -3962,7 +3720,7 @@
           <a:noFill/>
         </p:spPr>
         <p:txBody>
-          <a:bodyPr wrap="square" anchor="t" lIns="0" rIns="0" tIns="0" bIns="0">
+          <a:bodyPr wrap="square" lIns="0" tIns="0" rIns="0" bIns="0" anchor="t">
             <a:spAutoFit/>
           </a:bodyPr>
           <a:lstStyle/>
@@ -3973,10 +3731,16 @@
                 <a:solidFill>
                   <a:srgbClr val="1B4AA8"/>
                 </a:solidFill>
-                <a:latin typeface="Microsoft YaHei"/>
+                <a:latin typeface="微软雅黑" panose="020B0503020204020204" charset="-122"/>
               </a:rPr>
               <a:t>方案二：桌面 Agent + IDE 插件模式</a:t>
             </a:r>
+            <a:endParaRPr sz="2400" b="1">
+              <a:solidFill>
+                <a:srgbClr val="1B4AA8"/>
+              </a:solidFill>
+              <a:latin typeface="微软雅黑" panose="020B0503020204020204" charset="-122"/>
+            </a:endParaRPr>
           </a:p>
         </p:txBody>
       </p:sp>
@@ -3997,7 +3761,7 @@
           <a:noFill/>
         </p:spPr>
         <p:txBody>
-          <a:bodyPr wrap="square" anchor="t" lIns="0" rIns="0" tIns="0" bIns="0">
+          <a:bodyPr wrap="square" lIns="0" tIns="0" rIns="0" bIns="0" anchor="t">
             <a:spAutoFit/>
           </a:bodyPr>
           <a:lstStyle/>
@@ -4008,10 +3772,16 @@
                 <a:solidFill>
                   <a:srgbClr val="6B7280"/>
                 </a:solidFill>
-                <a:latin typeface="Microsoft YaHei"/>
+                <a:latin typeface="微软雅黑" panose="020B0503020204020204" charset="-122"/>
               </a:rPr>
               <a:t>任务书写的代表工具是 AionClaw；本机装的是同架构的 Claude Code + PyCharm 插件，路线一致</a:t>
             </a:r>
+            <a:endParaRPr sz="1200" b="0">
+              <a:solidFill>
+                <a:srgbClr val="6B7280"/>
+              </a:solidFill>
+              <a:latin typeface="微软雅黑" panose="020B0503020204020204" charset="-122"/>
+            </a:endParaRPr>
           </a:p>
         </p:txBody>
       </p:sp>
@@ -4078,7 +3848,7 @@
           <a:noFill/>
         </p:spPr>
         <p:txBody>
-          <a:bodyPr wrap="square" anchor="t" lIns="0" rIns="0" tIns="0" bIns="0">
+          <a:bodyPr wrap="square" lIns="0" tIns="0" rIns="0" bIns="0" anchor="t">
             <a:spAutoFit/>
           </a:bodyPr>
           <a:lstStyle/>
@@ -4089,10 +3859,16 @@
                 <a:solidFill>
                   <a:srgbClr val="2F6FEB"/>
                 </a:solidFill>
-                <a:latin typeface="Microsoft YaHei"/>
+                <a:latin typeface="微软雅黑" panose="020B0503020204020204" charset="-122"/>
               </a:rPr>
               <a:t>证据 1</a:t>
             </a:r>
+            <a:endParaRPr sz="1100" b="1">
+              <a:solidFill>
+                <a:srgbClr val="2F6FEB"/>
+              </a:solidFill>
+              <a:latin typeface="微软雅黑" panose="020B0503020204020204" charset="-122"/>
+            </a:endParaRPr>
           </a:p>
         </p:txBody>
       </p:sp>
@@ -4113,7 +3889,7 @@
           <a:noFill/>
         </p:spPr>
         <p:txBody>
-          <a:bodyPr wrap="square" anchor="t" lIns="0" rIns="0" tIns="0" bIns="0">
+          <a:bodyPr wrap="square" lIns="0" tIns="0" rIns="0" bIns="0" anchor="t">
             <a:spAutoFit/>
           </a:bodyPr>
           <a:lstStyle/>
@@ -4124,10 +3900,16 @@
                 <a:solidFill>
                   <a:srgbClr val="14213D"/>
                 </a:solidFill>
-                <a:latin typeface="Microsoft YaHei"/>
+                <a:latin typeface="微软雅黑" panose="020B0503020204020204" charset="-122"/>
               </a:rPr>
               <a:t>插件本身不含模型</a:t>
             </a:r>
+            <a:endParaRPr sz="1600" b="1">
+              <a:solidFill>
+                <a:srgbClr val="14213D"/>
+              </a:solidFill>
+              <a:latin typeface="微软雅黑" panose="020B0503020204020204" charset="-122"/>
+            </a:endParaRPr>
           </a:p>
         </p:txBody>
       </p:sp>
@@ -4148,7 +3930,7 @@
           <a:noFill/>
         </p:spPr>
         <p:txBody>
-          <a:bodyPr wrap="square" anchor="t" lIns="0" rIns="0" tIns="0" bIns="0">
+          <a:bodyPr wrap="square" lIns="0" tIns="0" rIns="0" bIns="0" anchor="t">
             <a:spAutoFit/>
           </a:bodyPr>
           <a:lstStyle/>
@@ -4159,10 +3941,16 @@
                 <a:solidFill>
                   <a:srgbClr val="6B7280"/>
                 </a:solidFill>
-                <a:latin typeface="Microsoft YaHei"/>
+                <a:latin typeface="微软雅黑" panose="020B0503020204020204" charset="-122"/>
               </a:rPr>
               <a:t>plugins\idea-claude-code-gui v0.5.7 —— 只是交互窗口 + 桥接层</a:t>
             </a:r>
+            <a:endParaRPr sz="1150" b="0">
+              <a:solidFill>
+                <a:srgbClr val="6B7280"/>
+              </a:solidFill>
+              <a:latin typeface="微软雅黑" panose="020B0503020204020204" charset="-122"/>
+            </a:endParaRPr>
           </a:p>
         </p:txBody>
       </p:sp>
@@ -4229,7 +4017,7 @@
           <a:noFill/>
         </p:spPr>
         <p:txBody>
-          <a:bodyPr wrap="square" anchor="t" lIns="0" rIns="0" tIns="0" bIns="0">
+          <a:bodyPr wrap="square" lIns="0" tIns="0" rIns="0" bIns="0" anchor="t">
             <a:spAutoFit/>
           </a:bodyPr>
           <a:lstStyle/>
@@ -4240,10 +4028,16 @@
                 <a:solidFill>
                   <a:srgbClr val="2F6FEB"/>
                 </a:solidFill>
-                <a:latin typeface="Microsoft YaHei"/>
+                <a:latin typeface="微软雅黑" panose="020B0503020204020204" charset="-122"/>
               </a:rPr>
               <a:t>证据 2</a:t>
             </a:r>
+            <a:endParaRPr sz="1100" b="1">
+              <a:solidFill>
+                <a:srgbClr val="2F6FEB"/>
+              </a:solidFill>
+              <a:latin typeface="微软雅黑" panose="020B0503020204020204" charset="-122"/>
+            </a:endParaRPr>
           </a:p>
         </p:txBody>
       </p:sp>
@@ -4264,7 +4058,7 @@
           <a:noFill/>
         </p:spPr>
         <p:txBody>
-          <a:bodyPr wrap="square" anchor="t" lIns="0" rIns="0" tIns="0" bIns="0">
+          <a:bodyPr wrap="square" lIns="0" tIns="0" rIns="0" bIns="0" anchor="t">
             <a:spAutoFit/>
           </a:bodyPr>
           <a:lstStyle/>
@@ -4275,10 +4069,16 @@
                 <a:solidFill>
                   <a:srgbClr val="14213D"/>
                 </a:solidFill>
-                <a:latin typeface="Microsoft YaHei"/>
+                <a:latin typeface="微软雅黑" panose="020B0503020204020204" charset="-122"/>
               </a:rPr>
               <a:t>外部确有 Agent 主程序</a:t>
             </a:r>
+            <a:endParaRPr sz="1600" b="1">
+              <a:solidFill>
+                <a:srgbClr val="14213D"/>
+              </a:solidFill>
+              <a:latin typeface="微软雅黑" panose="020B0503020204020204" charset="-122"/>
+            </a:endParaRPr>
           </a:p>
         </p:txBody>
       </p:sp>
@@ -4299,7 +4099,7 @@
           <a:noFill/>
         </p:spPr>
         <p:txBody>
-          <a:bodyPr wrap="square" anchor="t" lIns="0" rIns="0" tIns="0" bIns="0">
+          <a:bodyPr wrap="square" lIns="0" tIns="0" rIns="0" bIns="0" anchor="t">
             <a:spAutoFit/>
           </a:bodyPr>
           <a:lstStyle/>
@@ -4310,10 +4110,16 @@
                 <a:solidFill>
                   <a:srgbClr val="6B7280"/>
                 </a:solidFill>
-                <a:latin typeface="Microsoft YaHei"/>
+                <a:latin typeface="微软雅黑" panose="020B0503020204020204" charset="-122"/>
               </a:rPr>
               <a:t>claude --version → 2.1.283，落在 AppData\Roaming\npm</a:t>
             </a:r>
+            <a:endParaRPr sz="1150" b="0">
+              <a:solidFill>
+                <a:srgbClr val="6B7280"/>
+              </a:solidFill>
+              <a:latin typeface="微软雅黑" panose="020B0503020204020204" charset="-122"/>
+            </a:endParaRPr>
           </a:p>
         </p:txBody>
       </p:sp>
@@ -4380,7 +4186,7 @@
           <a:noFill/>
         </p:spPr>
         <p:txBody>
-          <a:bodyPr wrap="square" anchor="t" lIns="0" rIns="0" tIns="0" bIns="0">
+          <a:bodyPr wrap="square" lIns="0" tIns="0" rIns="0" bIns="0" anchor="t">
             <a:spAutoFit/>
           </a:bodyPr>
           <a:lstStyle/>
@@ -4391,10 +4197,16 @@
                 <a:solidFill>
                   <a:srgbClr val="2F6FEB"/>
                 </a:solidFill>
-                <a:latin typeface="Microsoft YaHei"/>
+                <a:latin typeface="微软雅黑" panose="020B0503020204020204" charset="-122"/>
               </a:rPr>
               <a:t>证据 3</a:t>
             </a:r>
+            <a:endParaRPr sz="1100" b="1">
+              <a:solidFill>
+                <a:srgbClr val="2F6FEB"/>
+              </a:solidFill>
+              <a:latin typeface="微软雅黑" panose="020B0503020204020204" charset="-122"/>
+            </a:endParaRPr>
           </a:p>
         </p:txBody>
       </p:sp>
@@ -4415,7 +4227,7 @@
           <a:noFill/>
         </p:spPr>
         <p:txBody>
-          <a:bodyPr wrap="square" anchor="t" lIns="0" rIns="0" tIns="0" bIns="0">
+          <a:bodyPr wrap="square" lIns="0" tIns="0" rIns="0" bIns="0" anchor="t">
             <a:spAutoFit/>
           </a:bodyPr>
           <a:lstStyle/>
@@ -4426,10 +4238,16 @@
                 <a:solidFill>
                   <a:srgbClr val="14213D"/>
                 </a:solidFill>
-                <a:latin typeface="Microsoft YaHei"/>
+                <a:latin typeface="微软雅黑" panose="020B0503020204020204" charset="-122"/>
               </a:rPr>
               <a:t>会话从 IDE 内发起</a:t>
             </a:r>
+            <a:endParaRPr sz="1600" b="1">
+              <a:solidFill>
+                <a:srgbClr val="14213D"/>
+              </a:solidFill>
+              <a:latin typeface="微软雅黑" panose="020B0503020204020204" charset="-122"/>
+            </a:endParaRPr>
           </a:p>
         </p:txBody>
       </p:sp>
@@ -4450,7 +4268,7 @@
           <a:noFill/>
         </p:spPr>
         <p:txBody>
-          <a:bodyPr wrap="square" anchor="t" lIns="0" rIns="0" tIns="0" bIns="0">
+          <a:bodyPr wrap="square" lIns="0" tIns="0" rIns="0" bIns="0" anchor="t">
             <a:spAutoFit/>
           </a:bodyPr>
           <a:lstStyle/>
@@ -4461,10 +4279,16 @@
                 <a:solidFill>
                   <a:srgbClr val="6B7280"/>
                 </a:solidFill>
-                <a:latin typeface="Microsoft YaHei"/>
+                <a:latin typeface="微软雅黑" panose="020B0503020204020204" charset="-122"/>
               </a:rPr>
               <a:t>.idea\claudeCodeTabState.xml：provider=claude，model=claude-sonnet-5[1m]</a:t>
             </a:r>
+            <a:endParaRPr sz="1150" b="0">
+              <a:solidFill>
+                <a:srgbClr val="6B7280"/>
+              </a:solidFill>
+              <a:latin typeface="微软雅黑" panose="020B0503020204020204" charset="-122"/>
+            </a:endParaRPr>
           </a:p>
         </p:txBody>
       </p:sp>
@@ -4531,7 +4355,7 @@
           <a:noFill/>
         </p:spPr>
         <p:txBody>
-          <a:bodyPr wrap="square" anchor="t" lIns="0" rIns="0" tIns="0" bIns="0">
+          <a:bodyPr wrap="square" lIns="0" tIns="0" rIns="0" bIns="0" anchor="t">
             <a:spAutoFit/>
           </a:bodyPr>
           <a:lstStyle/>
@@ -4542,10 +4366,16 @@
                 <a:solidFill>
                   <a:srgbClr val="2F6FEB"/>
                 </a:solidFill>
-                <a:latin typeface="Microsoft YaHei"/>
+                <a:latin typeface="微软雅黑" panose="020B0503020204020204" charset="-122"/>
               </a:rPr>
               <a:t>证据 4</a:t>
             </a:r>
+            <a:endParaRPr sz="1100" b="1">
+              <a:solidFill>
+                <a:srgbClr val="2F6FEB"/>
+              </a:solidFill>
+              <a:latin typeface="微软雅黑" panose="020B0503020204020204" charset="-122"/>
+            </a:endParaRPr>
           </a:p>
         </p:txBody>
       </p:sp>
@@ -4566,7 +4396,7 @@
           <a:noFill/>
         </p:spPr>
         <p:txBody>
-          <a:bodyPr wrap="square" anchor="t" lIns="0" rIns="0" tIns="0" bIns="0">
+          <a:bodyPr wrap="square" lIns="0" tIns="0" rIns="0" bIns="0" anchor="t">
             <a:spAutoFit/>
           </a:bodyPr>
           <a:lstStyle/>
@@ -4577,10 +4407,16 @@
                 <a:solidFill>
                   <a:srgbClr val="14213D"/>
                 </a:solidFill>
-                <a:latin typeface="Microsoft YaHei"/>
+                <a:latin typeface="微软雅黑" panose="020B0503020204020204" charset="-122"/>
               </a:rPr>
               <a:t>API 收口在 Agent 侧</a:t>
             </a:r>
+            <a:endParaRPr sz="1600" b="1">
+              <a:solidFill>
+                <a:srgbClr val="14213D"/>
+              </a:solidFill>
+              <a:latin typeface="微软雅黑" panose="020B0503020204020204" charset="-122"/>
+            </a:endParaRPr>
           </a:p>
         </p:txBody>
       </p:sp>
@@ -4601,7 +4437,7 @@
           <a:noFill/>
         </p:spPr>
         <p:txBody>
-          <a:bodyPr wrap="square" anchor="t" lIns="0" rIns="0" tIns="0" bIns="0">
+          <a:bodyPr wrap="square" lIns="0" tIns="0" rIns="0" bIns="0" anchor="t">
             <a:spAutoFit/>
           </a:bodyPr>
           <a:lstStyle/>
@@ -4612,10 +4448,16 @@
                 <a:solidFill>
                   <a:srgbClr val="6B7280"/>
                 </a:solidFill>
-                <a:latin typeface="Microsoft YaHei"/>
+                <a:latin typeface="微软雅黑" panose="020B0503020204020204" charset="-122"/>
               </a:rPr>
               <a:t>settings.json：BASE_URL 指向 /anthropic 兼容端点，模型别名统一映射</a:t>
             </a:r>
+            <a:endParaRPr sz="1150" b="0">
+              <a:solidFill>
+                <a:srgbClr val="6B7280"/>
+              </a:solidFill>
+              <a:latin typeface="微软雅黑" panose="020B0503020204020204" charset="-122"/>
+            </a:endParaRPr>
           </a:p>
         </p:txBody>
       </p:sp>
@@ -4628,7 +4470,7 @@
 </file>
 
 <file path=ppt/slides/slide3.xml><?xml version="1.0" encoding="utf-8"?>
-<p:sld xmlns:a="http://schemas.openxmlformats.org/drawingml/2006/main" xmlns:p="http://schemas.openxmlformats.org/presentationml/2006/main" xmlns:r="http://schemas.openxmlformats.org/officeDocument/2006/relationships">
+<p:sld xmlns:a="http://schemas.openxmlformats.org/drawingml/2006/main" xmlns:r="http://schemas.openxmlformats.org/officeDocument/2006/relationships" xmlns:p="http://schemas.openxmlformats.org/presentationml/2006/main">
   <p:cSld>
     <p:spTree>
       <p:nvGrpSpPr>
@@ -4698,7 +4540,7 @@
           <a:noFill/>
         </p:spPr>
         <p:txBody>
-          <a:bodyPr wrap="square" anchor="t" lIns="0" rIns="0" tIns="0" bIns="0">
+          <a:bodyPr wrap="square" lIns="0" tIns="0" rIns="0" bIns="0" anchor="t">
             <a:spAutoFit/>
           </a:bodyPr>
           <a:lstStyle/>
@@ -4709,10 +4551,16 @@
                 <a:solidFill>
                   <a:srgbClr val="2F6FEB"/>
                 </a:solidFill>
-                <a:latin typeface="Microsoft YaHei"/>
+                <a:latin typeface="微软雅黑" panose="020B0503020204020204" charset="-122"/>
               </a:rPr>
               <a:t>选型理由</a:t>
             </a:r>
+            <a:endParaRPr sz="1200" b="1">
+              <a:solidFill>
+                <a:srgbClr val="2F6FEB"/>
+              </a:solidFill>
+              <a:latin typeface="微软雅黑" panose="020B0503020204020204" charset="-122"/>
+            </a:endParaRPr>
           </a:p>
         </p:txBody>
       </p:sp>
@@ -4733,7 +4581,7 @@
           <a:noFill/>
         </p:spPr>
         <p:txBody>
-          <a:bodyPr wrap="square" anchor="t" lIns="0" rIns="0" tIns="0" bIns="0">
+          <a:bodyPr wrap="square" lIns="0" tIns="0" rIns="0" bIns="0" anchor="t">
             <a:spAutoFit/>
           </a:bodyPr>
           <a:lstStyle/>
@@ -4744,10 +4592,16 @@
                 <a:solidFill>
                   <a:srgbClr val="14213D"/>
                 </a:solidFill>
-                <a:latin typeface="Microsoft YaHei"/>
+                <a:latin typeface="微软雅黑" panose="020B0503020204020204" charset="-122"/>
               </a:rPr>
               <a:t>为什么选方案二：任务形态决定了工具形态</a:t>
             </a:r>
+            <a:endParaRPr sz="2900" b="1">
+              <a:solidFill>
+                <a:srgbClr val="14213D"/>
+              </a:solidFill>
+              <a:latin typeface="微软雅黑" panose="020B0503020204020204" charset="-122"/>
+            </a:endParaRPr>
           </a:p>
         </p:txBody>
       </p:sp>
@@ -4812,7 +4666,7 @@
           <a:noFill/>
         </p:spPr>
         <p:txBody>
-          <a:bodyPr wrap="square" anchor="t" lIns="0" rIns="0" tIns="0" bIns="0">
+          <a:bodyPr wrap="square" lIns="0" tIns="0" rIns="0" bIns="0" anchor="t">
             <a:spAutoFit/>
           </a:bodyPr>
           <a:lstStyle/>
@@ -4823,10 +4677,16 @@
                 <a:solidFill>
                   <a:srgbClr val="6B7280"/>
                 </a:solidFill>
-                <a:latin typeface="Microsoft YaHei"/>
+                <a:latin typeface="微软雅黑" panose="020B0503020204020204" charset="-122"/>
               </a:rPr>
               <a:t>3</a:t>
             </a:r>
+            <a:endParaRPr sz="1100" b="0">
+              <a:solidFill>
+                <a:srgbClr val="6B7280"/>
+              </a:solidFill>
+              <a:latin typeface="微软雅黑" panose="020B0503020204020204" charset="-122"/>
+            </a:endParaRPr>
           </a:p>
         </p:txBody>
       </p:sp>
@@ -4890,7 +4750,7 @@
           <a:noFill/>
         </p:spPr>
         <p:txBody>
-          <a:bodyPr wrap="square" lIns="0" rIns="0" tIns="0" bIns="0">
+          <a:bodyPr wrap="square" lIns="0" tIns="0" rIns="0" bIns="0">
             <a:spAutoFit/>
           </a:bodyPr>
           <a:lstStyle/>
@@ -4900,7 +4760,7 @@
                 <a:solidFill>
                   <a:srgbClr val="1B4AA8"/>
                 </a:solidFill>
-                <a:latin typeface="Microsoft YaHei"/>
+                <a:latin typeface="微软雅黑" panose="020B0503020204020204" charset="-122"/>
               </a:rPr>
               <a:t>读陌生工程，第一步是「把链路读出来」。</a:t>
             </a:r>
@@ -4909,10 +4769,16 @@
                 <a:solidFill>
                   <a:srgbClr val="14213D"/>
                 </a:solidFill>
-                <a:latin typeface="Microsoft YaHei"/>
+                <a:latin typeface="微软雅黑" panose="020B0503020204020204" charset="-122"/>
               </a:rPr>
               <a:t>方案一只能解释打开着的那个文件，Agent 能自己把 parser → matcher → api 走一遍。</a:t>
             </a:r>
+            <a:endParaRPr sz="1500">
+              <a:solidFill>
+                <a:srgbClr val="14213D"/>
+              </a:solidFill>
+              <a:latin typeface="微软雅黑" panose="020B0503020204020204" charset="-122"/>
+            </a:endParaRPr>
           </a:p>
         </p:txBody>
       </p:sp>
@@ -4976,7 +4842,7 @@
           <a:noFill/>
         </p:spPr>
         <p:txBody>
-          <a:bodyPr wrap="square" lIns="0" rIns="0" tIns="0" bIns="0">
+          <a:bodyPr wrap="square" lIns="0" tIns="0" rIns="0" bIns="0">
             <a:spAutoFit/>
           </a:bodyPr>
           <a:lstStyle/>
@@ -4986,7 +4852,7 @@
                 <a:solidFill>
                   <a:srgbClr val="1B4AA8"/>
                 </a:solidFill>
-                <a:latin typeface="Microsoft YaHei"/>
+                <a:latin typeface="微软雅黑" panose="020B0503020204020204" charset="-122"/>
               </a:rPr>
               <a:t>读完之后紧接着是改造：改代码、加用例、跑测试。</a:t>
             </a:r>
@@ -4995,10 +4861,16 @@
                 <a:solidFill>
                   <a:srgbClr val="14213D"/>
                 </a:solidFill>
-                <a:latin typeface="Microsoft YaHei"/>
+                <a:latin typeface="微软雅黑" panose="020B0503020204020204" charset="-122"/>
               </a:rPr>
               <a:t>这是任务级动作，需要连续执行 + 看懂报错再回头改，只有 Agent 有这双手。</a:t>
             </a:r>
+            <a:endParaRPr sz="1500">
+              <a:solidFill>
+                <a:srgbClr val="14213D"/>
+              </a:solidFill>
+              <a:latin typeface="微软雅黑" panose="020B0503020204020204" charset="-122"/>
+            </a:endParaRPr>
           </a:p>
         </p:txBody>
       </p:sp>
@@ -5062,7 +4934,7 @@
           <a:noFill/>
         </p:spPr>
         <p:txBody>
-          <a:bodyPr wrap="square" lIns="0" rIns="0" tIns="0" bIns="0">
+          <a:bodyPr wrap="square" lIns="0" tIns="0" rIns="0" bIns="0">
             <a:spAutoFit/>
           </a:bodyPr>
           <a:lstStyle/>
@@ -5072,7 +4944,7 @@
                 <a:solidFill>
                   <a:srgbClr val="1B4AA8"/>
                 </a:solidFill>
-                <a:latin typeface="Microsoft YaHei"/>
+                <a:latin typeface="微软雅黑" panose="020B0503020204020204" charset="-122"/>
               </a:rPr>
               <a:t>API 只需收口一处。</a:t>
             </a:r>
@@ -5081,10 +4953,16 @@
                 <a:solidFill>
                   <a:srgbClr val="14213D"/>
                 </a:solidFill>
-                <a:latin typeface="Microsoft YaHei"/>
+                <a:latin typeface="微软雅黑" panose="020B0503020204020204" charset="-122"/>
               </a:rPr>
               <a:t>Agent 侧一份 settings.json 定死端点/密钥/模型别名，IDE 侧不再各自配。</a:t>
             </a:r>
+            <a:endParaRPr sz="1500">
+              <a:solidFill>
+                <a:srgbClr val="14213D"/>
+              </a:solidFill>
+              <a:latin typeface="微软雅黑" panose="020B0503020204020204" charset="-122"/>
+            </a:endParaRPr>
           </a:p>
         </p:txBody>
       </p:sp>
@@ -5149,7 +5027,7 @@
           <a:noFill/>
         </p:spPr>
         <p:txBody>
-          <a:bodyPr wrap="square" anchor="t" lIns="0" rIns="0" tIns="0" bIns="0">
+          <a:bodyPr wrap="square" lIns="0" tIns="0" rIns="0" bIns="0" anchor="t">
             <a:spAutoFit/>
           </a:bodyPr>
           <a:lstStyle/>
@@ -5160,10 +5038,16 @@
                 <a:solidFill>
                   <a:srgbClr val="8FB6FF"/>
                 </a:solidFill>
-                <a:latin typeface="Microsoft YaHei"/>
+                <a:latin typeface="微软雅黑" panose="020B0503020204020204" charset="-122"/>
               </a:rPr>
               <a:t>一句话选型逻辑</a:t>
             </a:r>
+            <a:endParaRPr sz="1200" b="1">
+              <a:solidFill>
+                <a:srgbClr val="8FB6FF"/>
+              </a:solidFill>
+              <a:latin typeface="微软雅黑" panose="020B0503020204020204" charset="-122"/>
+            </a:endParaRPr>
           </a:p>
         </p:txBody>
       </p:sp>
@@ -5184,7 +5068,7 @@
           <a:noFill/>
         </p:spPr>
         <p:txBody>
-          <a:bodyPr wrap="square" anchor="t" lIns="0" rIns="0" tIns="0" bIns="0">
+          <a:bodyPr wrap="square" lIns="0" tIns="0" rIns="0" bIns="0" anchor="t">
             <a:spAutoFit/>
           </a:bodyPr>
           <a:lstStyle/>
@@ -5199,10 +5083,16 @@
                 <a:solidFill>
                   <a:srgbClr val="FFFFFF"/>
                 </a:solidFill>
-                <a:latin typeface="Microsoft YaHei"/>
+                <a:latin typeface="微软雅黑" panose="020B0503020204020204" charset="-122"/>
               </a:rPr>
               <a:t>行级、跟随光标的工作</a:t>
             </a:r>
+            <a:endParaRPr sz="1700" b="1">
+              <a:solidFill>
+                <a:srgbClr val="FFFFFF"/>
+              </a:solidFill>
+              <a:latin typeface="微软雅黑" panose="020B0503020204020204" charset="-122"/>
+            </a:endParaRPr>
           </a:p>
           <a:p>
             <a:pPr algn="l">
@@ -5215,10 +5105,16 @@
                 <a:solidFill>
                   <a:srgbClr val="FFFFFF"/>
                 </a:solidFill>
-                <a:latin typeface="Microsoft YaHei"/>
+                <a:latin typeface="微软雅黑" panose="020B0503020204020204" charset="-122"/>
               </a:rPr>
               <a:t>交给 IDE；</a:t>
             </a:r>
+            <a:endParaRPr sz="1700" b="1">
+              <a:solidFill>
+                <a:srgbClr val="FFFFFF"/>
+              </a:solidFill>
+              <a:latin typeface="微软雅黑" panose="020B0503020204020204" charset="-122"/>
+            </a:endParaRPr>
           </a:p>
           <a:p>
             <a:pPr algn="l">
@@ -5231,10 +5127,16 @@
                 <a:solidFill>
                   <a:srgbClr val="FFFFFF"/>
                 </a:solidFill>
-                <a:latin typeface="Microsoft YaHei"/>
+                <a:latin typeface="微软雅黑" panose="020B0503020204020204" charset="-122"/>
               </a:rPr>
               <a:t>任务级、跨文件的工作</a:t>
             </a:r>
+            <a:endParaRPr sz="1700" b="1">
+              <a:solidFill>
+                <a:srgbClr val="FFFFFF"/>
+              </a:solidFill>
+              <a:latin typeface="微软雅黑" panose="020B0503020204020204" charset="-122"/>
+            </a:endParaRPr>
           </a:p>
           <a:p>
             <a:pPr algn="l">
@@ -5247,10 +5149,16 @@
                 <a:solidFill>
                   <a:srgbClr val="FFFFFF"/>
                 </a:solidFill>
-                <a:latin typeface="Microsoft YaHei"/>
+                <a:latin typeface="微软雅黑" panose="020B0503020204020204" charset="-122"/>
               </a:rPr>
               <a:t>交给 Agent。</a:t>
             </a:r>
+            <a:endParaRPr sz="1700" b="1">
+              <a:solidFill>
+                <a:srgbClr val="FFFFFF"/>
+              </a:solidFill>
+              <a:latin typeface="微软雅黑" panose="020B0503020204020204" charset="-122"/>
+            </a:endParaRPr>
           </a:p>
         </p:txBody>
       </p:sp>
@@ -5315,7 +5223,7 @@
           <a:noFill/>
         </p:spPr>
         <p:txBody>
-          <a:bodyPr wrap="square" anchor="t" lIns="0" rIns="0" tIns="0" bIns="0">
+          <a:bodyPr wrap="square" lIns="0" tIns="0" rIns="0" bIns="0" anchor="t">
             <a:spAutoFit/>
           </a:bodyPr>
           <a:lstStyle/>
@@ -5326,10 +5234,16 @@
                 <a:solidFill>
                   <a:srgbClr val="1B4AA8"/>
                 </a:solidFill>
-                <a:latin typeface="Microsoft YaHei"/>
+                <a:latin typeface="微软雅黑" panose="020B0503020204020204" charset="-122"/>
               </a:rPr>
               <a:t>本机还有方案一的对照组</a:t>
             </a:r>
+            <a:endParaRPr sz="1200" b="1">
+              <a:solidFill>
+                <a:srgbClr val="1B4AA8"/>
+              </a:solidFill>
+              <a:latin typeface="微软雅黑" panose="020B0503020204020204" charset="-122"/>
+            </a:endParaRPr>
           </a:p>
         </p:txBody>
       </p:sp>
@@ -5350,7 +5264,7 @@
           <a:noFill/>
         </p:spPr>
         <p:txBody>
-          <a:bodyPr wrap="square" anchor="t" lIns="0" rIns="0" tIns="0" bIns="0">
+          <a:bodyPr wrap="square" lIns="0" tIns="0" rIns="0" bIns="0" anchor="t">
             <a:spAutoFit/>
           </a:bodyPr>
           <a:lstStyle/>
@@ -5365,10 +5279,16 @@
                 <a:solidFill>
                   <a:srgbClr val="14213D"/>
                 </a:solidFill>
-                <a:latin typeface="Microsoft YaHei"/>
+                <a:latin typeface="微软雅黑" panose="020B0503020204020204" charset="-122"/>
               </a:rPr>
               <a:t>Comate 4.14.0 / Copilot 1.17.0 / Qoder CN 2026.917</a:t>
             </a:r>
+            <a:endParaRPr sz="1250" b="0">
+              <a:solidFill>
+                <a:srgbClr val="14213D"/>
+              </a:solidFill>
+              <a:latin typeface="微软雅黑" panose="020B0503020204020204" charset="-122"/>
+            </a:endParaRPr>
           </a:p>
           <a:p>
             <a:pPr algn="l">
@@ -5381,10 +5301,16 @@
                 <a:solidFill>
                   <a:srgbClr val="14213D"/>
                 </a:solidFill>
-                <a:latin typeface="Microsoft YaHei"/>
+                <a:latin typeface="微软雅黑" panose="020B0503020204020204" charset="-122"/>
               </a:rPr>
               <a:t>都在同一台机器、同一个工程里跑过——</a:t>
             </a:r>
+            <a:endParaRPr sz="1250" b="0">
+              <a:solidFill>
+                <a:srgbClr val="14213D"/>
+              </a:solidFill>
+              <a:latin typeface="微软雅黑" panose="020B0503020204020204" charset="-122"/>
+            </a:endParaRPr>
           </a:p>
           <a:p>
             <a:pPr algn="l">
@@ -5397,10 +5323,16 @@
                 <a:solidFill>
                   <a:srgbClr val="14213D"/>
                 </a:solidFill>
-                <a:latin typeface="Microsoft YaHei"/>
+                <a:latin typeface="微软雅黑" panose="020B0503020204020204" charset="-122"/>
               </a:rPr>
               <a:t>对比数据来自实测，不是查资料。</a:t>
             </a:r>
+            <a:endParaRPr sz="1250" b="0">
+              <a:solidFill>
+                <a:srgbClr val="14213D"/>
+              </a:solidFill>
+              <a:latin typeface="微软雅黑" panose="020B0503020204020204" charset="-122"/>
+            </a:endParaRPr>
           </a:p>
         </p:txBody>
       </p:sp>
@@ -5413,7 +5345,7 @@
 </file>
 
 <file path=ppt/slides/slide4.xml><?xml version="1.0" encoding="utf-8"?>
-<p:sld xmlns:a="http://schemas.openxmlformats.org/drawingml/2006/main" xmlns:p="http://schemas.openxmlformats.org/presentationml/2006/main" xmlns:r="http://schemas.openxmlformats.org/officeDocument/2006/relationships">
+<p:sld xmlns:a="http://schemas.openxmlformats.org/drawingml/2006/main" xmlns:r="http://schemas.openxmlformats.org/officeDocument/2006/relationships" xmlns:p="http://schemas.openxmlformats.org/presentationml/2006/main">
   <p:cSld>
     <p:spTree>
       <p:nvGrpSpPr>
@@ -5483,7 +5415,7 @@
           <a:noFill/>
         </p:spPr>
         <p:txBody>
-          <a:bodyPr wrap="square" anchor="t" lIns="0" rIns="0" tIns="0" bIns="0">
+          <a:bodyPr wrap="square" lIns="0" tIns="0" rIns="0" bIns="0" anchor="t">
             <a:spAutoFit/>
           </a:bodyPr>
           <a:lstStyle/>
@@ -5494,10 +5426,16 @@
                 <a:solidFill>
                   <a:srgbClr val="2F6FEB"/>
                 </a:solidFill>
-                <a:latin typeface="Microsoft YaHei"/>
+                <a:latin typeface="微软雅黑" panose="020B0503020204020204" charset="-122"/>
               </a:rPr>
               <a:t>实施路径</a:t>
             </a:r>
+            <a:endParaRPr sz="1200" b="1">
+              <a:solidFill>
+                <a:srgbClr val="2F6FEB"/>
+              </a:solidFill>
+              <a:latin typeface="微软雅黑" panose="020B0503020204020204" charset="-122"/>
+            </a:endParaRPr>
           </a:p>
         </p:txBody>
       </p:sp>
@@ -5518,7 +5456,7 @@
           <a:noFill/>
         </p:spPr>
         <p:txBody>
-          <a:bodyPr wrap="square" anchor="t" lIns="0" rIns="0" tIns="0" bIns="0">
+          <a:bodyPr wrap="square" lIns="0" tIns="0" rIns="0" bIns="0" anchor="t">
             <a:spAutoFit/>
           </a:bodyPr>
           <a:lstStyle/>
@@ -5529,10 +5467,16 @@
                 <a:solidFill>
                   <a:srgbClr val="14213D"/>
                 </a:solidFill>
-                <a:latin typeface="Microsoft YaHei"/>
+                <a:latin typeface="微软雅黑" panose="020B0503020204020204" charset="-122"/>
               </a:rPr>
               <a:t>安装：先装手，再装窗口</a:t>
             </a:r>
+            <a:endParaRPr sz="2900" b="1">
+              <a:solidFill>
+                <a:srgbClr val="14213D"/>
+              </a:solidFill>
+              <a:latin typeface="微软雅黑" panose="020B0503020204020204" charset="-122"/>
+            </a:endParaRPr>
           </a:p>
         </p:txBody>
       </p:sp>
@@ -5597,7 +5541,7 @@
           <a:noFill/>
         </p:spPr>
         <p:txBody>
-          <a:bodyPr wrap="square" anchor="t" lIns="0" rIns="0" tIns="0" bIns="0">
+          <a:bodyPr wrap="square" lIns="0" tIns="0" rIns="0" bIns="0" anchor="t">
             <a:spAutoFit/>
           </a:bodyPr>
           <a:lstStyle/>
@@ -5608,10 +5552,16 @@
                 <a:solidFill>
                   <a:srgbClr val="6B7280"/>
                 </a:solidFill>
-                <a:latin typeface="Microsoft YaHei"/>
+                <a:latin typeface="微软雅黑" panose="020B0503020204020204" charset="-122"/>
               </a:rPr>
               <a:t>4</a:t>
             </a:r>
+            <a:endParaRPr sz="1100" b="0">
+              <a:solidFill>
+                <a:srgbClr val="6B7280"/>
+              </a:solidFill>
+              <a:latin typeface="微软雅黑" panose="020B0503020204020204" charset="-122"/>
+            </a:endParaRPr>
           </a:p>
         </p:txBody>
       </p:sp>
@@ -5678,7 +5628,7 @@
           <a:noFill/>
         </p:spPr>
         <p:txBody>
-          <a:bodyPr wrap="square" anchor="t" lIns="0" rIns="0" tIns="0" bIns="0">
+          <a:bodyPr wrap="square" lIns="0" tIns="0" rIns="0" bIns="0" anchor="t">
             <a:spAutoFit/>
           </a:bodyPr>
           <a:lstStyle/>
@@ -5689,10 +5639,16 @@
                 <a:solidFill>
                   <a:srgbClr val="2F6FEB"/>
                 </a:solidFill>
-                <a:latin typeface="Microsoft YaHei"/>
+                <a:latin typeface="微软雅黑" panose="020B0503020204020204" charset="-122"/>
               </a:rPr>
               <a:t>STEP 1</a:t>
             </a:r>
+            <a:endParaRPr sz="1100" b="1">
+              <a:solidFill>
+                <a:srgbClr val="2F6FEB"/>
+              </a:solidFill>
+              <a:latin typeface="微软雅黑" panose="020B0503020204020204" charset="-122"/>
+            </a:endParaRPr>
           </a:p>
         </p:txBody>
       </p:sp>
@@ -5713,7 +5669,7 @@
           <a:noFill/>
         </p:spPr>
         <p:txBody>
-          <a:bodyPr wrap="square" anchor="t" lIns="0" rIns="0" tIns="0" bIns="0">
+          <a:bodyPr wrap="square" lIns="0" tIns="0" rIns="0" bIns="0" anchor="t">
             <a:spAutoFit/>
           </a:bodyPr>
           <a:lstStyle/>
@@ -5724,10 +5680,16 @@
                 <a:solidFill>
                   <a:srgbClr val="14213D"/>
                 </a:solidFill>
-                <a:latin typeface="Microsoft YaHei"/>
+                <a:latin typeface="微软雅黑" panose="020B0503020204020204" charset="-122"/>
               </a:rPr>
               <a:t>装 Node 与 CLI</a:t>
             </a:r>
+            <a:endParaRPr sz="1700" b="1">
+              <a:solidFill>
+                <a:srgbClr val="14213D"/>
+              </a:solidFill>
+              <a:latin typeface="微软雅黑" panose="020B0503020204020204" charset="-122"/>
+            </a:endParaRPr>
           </a:p>
         </p:txBody>
       </p:sp>
@@ -5748,7 +5710,7 @@
           <a:noFill/>
         </p:spPr>
         <p:txBody>
-          <a:bodyPr wrap="square" anchor="t" lIns="0" rIns="0" tIns="0" bIns="0">
+          <a:bodyPr wrap="square" lIns="0" tIns="0" rIns="0" bIns="0" anchor="t">
             <a:spAutoFit/>
           </a:bodyPr>
           <a:lstStyle/>
@@ -5763,10 +5725,16 @@
                 <a:solidFill>
                   <a:srgbClr val="1B4AA8"/>
                 </a:solidFill>
-                <a:latin typeface="Microsoft YaHei"/>
+                <a:latin typeface="微软雅黑" panose="020B0503020204020204" charset="-122"/>
               </a:rPr>
               <a:t>npm i -g @anthropic-ai/claude-code</a:t>
             </a:r>
+            <a:endParaRPr sz="1150" b="0">
+              <a:solidFill>
+                <a:srgbClr val="1B4AA8"/>
+              </a:solidFill>
+              <a:latin typeface="微软雅黑" panose="020B0503020204020204" charset="-122"/>
+            </a:endParaRPr>
           </a:p>
           <a:p>
             <a:pPr algn="l">
@@ -5779,10 +5747,16 @@
                 <a:solidFill>
                   <a:srgbClr val="1B4AA8"/>
                 </a:solidFill>
-                <a:latin typeface="Microsoft YaHei"/>
+                <a:latin typeface="微软雅黑" panose="020B0503020204020204" charset="-122"/>
               </a:rPr>
               <a:t>claude --version → 2.1.283</a:t>
             </a:r>
+            <a:endParaRPr sz="1150" b="0">
+              <a:solidFill>
+                <a:srgbClr val="1B4AA8"/>
+              </a:solidFill>
+              <a:latin typeface="微软雅黑" panose="020B0503020204020204" charset="-122"/>
+            </a:endParaRPr>
           </a:p>
         </p:txBody>
       </p:sp>
@@ -5803,7 +5777,7 @@
           <a:noFill/>
         </p:spPr>
         <p:txBody>
-          <a:bodyPr wrap="square" anchor="t" lIns="0" rIns="0" tIns="0" bIns="0">
+          <a:bodyPr wrap="square" lIns="0" tIns="0" rIns="0" bIns="0" anchor="t">
             <a:spAutoFit/>
           </a:bodyPr>
           <a:lstStyle/>
@@ -5814,10 +5788,16 @@
                 <a:solidFill>
                   <a:srgbClr val="6B7280"/>
                 </a:solidFill>
-                <a:latin typeface="Microsoft YaHei"/>
+                <a:latin typeface="微软雅黑" panose="020B0503020204020204" charset="-122"/>
               </a:rPr>
               <a:t>Agent 主程序：读写文件、跑命令</a:t>
             </a:r>
+            <a:endParaRPr sz="1100" b="0">
+              <a:solidFill>
+                <a:srgbClr val="6B7280"/>
+              </a:solidFill>
+              <a:latin typeface="微软雅黑" panose="020B0503020204020204" charset="-122"/>
+            </a:endParaRPr>
           </a:p>
         </p:txBody>
       </p:sp>
@@ -5838,7 +5818,7 @@
           <a:noFill/>
         </p:spPr>
         <p:txBody>
-          <a:bodyPr wrap="square" anchor="t" lIns="0" rIns="0" tIns="0" bIns="0">
+          <a:bodyPr wrap="square" lIns="0" tIns="0" rIns="0" bIns="0" anchor="t">
             <a:spAutoFit/>
           </a:bodyPr>
           <a:lstStyle/>
@@ -5849,10 +5829,16 @@
                 <a:solidFill>
                   <a:srgbClr val="D6DEEA"/>
                 </a:solidFill>
-                <a:latin typeface="Microsoft YaHei"/>
+                <a:latin typeface="微软雅黑" panose="020B0503020204020204" charset="-122"/>
               </a:rPr>
               <a:t>&gt;</a:t>
             </a:r>
+            <a:endParaRPr sz="2000" b="1">
+              <a:solidFill>
+                <a:srgbClr val="D6DEEA"/>
+              </a:solidFill>
+              <a:latin typeface="微软雅黑" panose="020B0503020204020204" charset="-122"/>
+            </a:endParaRPr>
           </a:p>
         </p:txBody>
       </p:sp>
@@ -5919,7 +5905,7 @@
           <a:noFill/>
         </p:spPr>
         <p:txBody>
-          <a:bodyPr wrap="square" anchor="t" lIns="0" rIns="0" tIns="0" bIns="0">
+          <a:bodyPr wrap="square" lIns="0" tIns="0" rIns="0" bIns="0" anchor="t">
             <a:spAutoFit/>
           </a:bodyPr>
           <a:lstStyle/>
@@ -5930,10 +5916,16 @@
                 <a:solidFill>
                   <a:srgbClr val="2F6FEB"/>
                 </a:solidFill>
-                <a:latin typeface="Microsoft YaHei"/>
+                <a:latin typeface="微软雅黑" panose="020B0503020204020204" charset="-122"/>
               </a:rPr>
               <a:t>STEP 2</a:t>
             </a:r>
+            <a:endParaRPr sz="1100" b="1">
+              <a:solidFill>
+                <a:srgbClr val="2F6FEB"/>
+              </a:solidFill>
+              <a:latin typeface="微软雅黑" panose="020B0503020204020204" charset="-122"/>
+            </a:endParaRPr>
           </a:p>
         </p:txBody>
       </p:sp>
@@ -5954,7 +5946,7 @@
           <a:noFill/>
         </p:spPr>
         <p:txBody>
-          <a:bodyPr wrap="square" anchor="t" lIns="0" rIns="0" tIns="0" bIns="0">
+          <a:bodyPr wrap="square" lIns="0" tIns="0" rIns="0" bIns="0" anchor="t">
             <a:spAutoFit/>
           </a:bodyPr>
           <a:lstStyle/>
@@ -5965,10 +5957,16 @@
                 <a:solidFill>
                   <a:srgbClr val="14213D"/>
                 </a:solidFill>
-                <a:latin typeface="Microsoft YaHei"/>
+                <a:latin typeface="微软雅黑" panose="020B0503020204020204" charset="-122"/>
               </a:rPr>
               <a:t>PyCharm 装插件</a:t>
             </a:r>
+            <a:endParaRPr sz="1700" b="1">
+              <a:solidFill>
+                <a:srgbClr val="14213D"/>
+              </a:solidFill>
+              <a:latin typeface="微软雅黑" panose="020B0503020204020204" charset="-122"/>
+            </a:endParaRPr>
           </a:p>
         </p:txBody>
       </p:sp>
@@ -5989,7 +5987,7 @@
           <a:noFill/>
         </p:spPr>
         <p:txBody>
-          <a:bodyPr wrap="square" anchor="t" lIns="0" rIns="0" tIns="0" bIns="0">
+          <a:bodyPr wrap="square" lIns="0" tIns="0" rIns="0" bIns="0" anchor="t">
             <a:spAutoFit/>
           </a:bodyPr>
           <a:lstStyle/>
@@ -6004,10 +6002,16 @@
                 <a:solidFill>
                   <a:srgbClr val="1B4AA8"/>
                 </a:solidFill>
-                <a:latin typeface="Microsoft YaHei"/>
+                <a:latin typeface="微软雅黑" panose="020B0503020204020204" charset="-122"/>
               </a:rPr>
               <a:t>Settings → Plugins →</a:t>
             </a:r>
+            <a:endParaRPr sz="1150" b="0">
+              <a:solidFill>
+                <a:srgbClr val="1B4AA8"/>
+              </a:solidFill>
+              <a:latin typeface="微软雅黑" panose="020B0503020204020204" charset="-122"/>
+            </a:endParaRPr>
           </a:p>
           <a:p>
             <a:pPr algn="l">
@@ -6020,10 +6024,16 @@
                 <a:solidFill>
                   <a:srgbClr val="1B4AA8"/>
                 </a:solidFill>
-                <a:latin typeface="Microsoft YaHei"/>
+                <a:latin typeface="微软雅黑" panose="020B0503020204020204" charset="-122"/>
               </a:rPr>
               <a:t>搜 Claude Code → Install → 重启</a:t>
             </a:r>
+            <a:endParaRPr sz="1150" b="0">
+              <a:solidFill>
+                <a:srgbClr val="1B4AA8"/>
+              </a:solidFill>
+              <a:latin typeface="微软雅黑" panose="020B0503020204020204" charset="-122"/>
+            </a:endParaRPr>
           </a:p>
         </p:txBody>
       </p:sp>
@@ -6044,7 +6054,7 @@
           <a:noFill/>
         </p:spPr>
         <p:txBody>
-          <a:bodyPr wrap="square" anchor="t" lIns="0" rIns="0" tIns="0" bIns="0">
+          <a:bodyPr wrap="square" lIns="0" tIns="0" rIns="0" bIns="0" anchor="t">
             <a:spAutoFit/>
           </a:bodyPr>
           <a:lstStyle/>
@@ -6055,10 +6065,16 @@
                 <a:solidFill>
                   <a:srgbClr val="6B7280"/>
                 </a:solidFill>
-                <a:latin typeface="Microsoft YaHei"/>
+                <a:latin typeface="微软雅黑" panose="020B0503020204020204" charset="-122"/>
               </a:rPr>
               <a:t>交互窗口 + 上下文桥接</a:t>
             </a:r>
+            <a:endParaRPr sz="1100" b="0">
+              <a:solidFill>
+                <a:srgbClr val="6B7280"/>
+              </a:solidFill>
+              <a:latin typeface="微软雅黑" panose="020B0503020204020204" charset="-122"/>
+            </a:endParaRPr>
           </a:p>
         </p:txBody>
       </p:sp>
@@ -6079,7 +6095,7 @@
           <a:noFill/>
         </p:spPr>
         <p:txBody>
-          <a:bodyPr wrap="square" anchor="t" lIns="0" rIns="0" tIns="0" bIns="0">
+          <a:bodyPr wrap="square" lIns="0" tIns="0" rIns="0" bIns="0" anchor="t">
             <a:spAutoFit/>
           </a:bodyPr>
           <a:lstStyle/>
@@ -6090,10 +6106,16 @@
                 <a:solidFill>
                   <a:srgbClr val="D6DEEA"/>
                 </a:solidFill>
-                <a:latin typeface="Microsoft YaHei"/>
+                <a:latin typeface="微软雅黑" panose="020B0503020204020204" charset="-122"/>
               </a:rPr>
               <a:t>&gt;</a:t>
             </a:r>
+            <a:endParaRPr sz="2000" b="1">
+              <a:solidFill>
+                <a:srgbClr val="D6DEEA"/>
+              </a:solidFill>
+              <a:latin typeface="微软雅黑" panose="020B0503020204020204" charset="-122"/>
+            </a:endParaRPr>
           </a:p>
         </p:txBody>
       </p:sp>
@@ -6160,7 +6182,7 @@
           <a:noFill/>
         </p:spPr>
         <p:txBody>
-          <a:bodyPr wrap="square" anchor="t" lIns="0" rIns="0" tIns="0" bIns="0">
+          <a:bodyPr wrap="square" lIns="0" tIns="0" rIns="0" bIns="0" anchor="t">
             <a:spAutoFit/>
           </a:bodyPr>
           <a:lstStyle/>
@@ -6171,10 +6193,16 @@
                 <a:solidFill>
                   <a:srgbClr val="2F6FEB"/>
                 </a:solidFill>
-                <a:latin typeface="Microsoft YaHei"/>
+                <a:latin typeface="微软雅黑" panose="020B0503020204020204" charset="-122"/>
               </a:rPr>
               <a:t>STEP 3</a:t>
             </a:r>
+            <a:endParaRPr sz="1100" b="1">
+              <a:solidFill>
+                <a:srgbClr val="2F6FEB"/>
+              </a:solidFill>
+              <a:latin typeface="微软雅黑" panose="020B0503020204020204" charset="-122"/>
+            </a:endParaRPr>
           </a:p>
         </p:txBody>
       </p:sp>
@@ -6195,7 +6223,7 @@
           <a:noFill/>
         </p:spPr>
         <p:txBody>
-          <a:bodyPr wrap="square" anchor="t" lIns="0" rIns="0" tIns="0" bIns="0">
+          <a:bodyPr wrap="square" lIns="0" tIns="0" rIns="0" bIns="0" anchor="t">
             <a:spAutoFit/>
           </a:bodyPr>
           <a:lstStyle/>
@@ -6206,10 +6234,16 @@
                 <a:solidFill>
                   <a:srgbClr val="14213D"/>
                 </a:solidFill>
-                <a:latin typeface="Microsoft YaHei"/>
+                <a:latin typeface="微软雅黑" panose="020B0503020204020204" charset="-122"/>
               </a:rPr>
               <a:t>打开面板握手</a:t>
             </a:r>
+            <a:endParaRPr sz="1700" b="1">
+              <a:solidFill>
+                <a:srgbClr val="14213D"/>
+              </a:solidFill>
+              <a:latin typeface="微软雅黑" panose="020B0503020204020204" charset="-122"/>
+            </a:endParaRPr>
           </a:p>
         </p:txBody>
       </p:sp>
@@ -6230,7 +6264,7 @@
           <a:noFill/>
         </p:spPr>
         <p:txBody>
-          <a:bodyPr wrap="square" anchor="t" lIns="0" rIns="0" tIns="0" bIns="0">
+          <a:bodyPr wrap="square" lIns="0" tIns="0" rIns="0" bIns="0" anchor="t">
             <a:spAutoFit/>
           </a:bodyPr>
           <a:lstStyle/>
@@ -6245,10 +6279,16 @@
                 <a:solidFill>
                   <a:srgbClr val="1B4AA8"/>
                 </a:solidFill>
-                <a:latin typeface="Microsoft YaHei"/>
+                <a:latin typeface="微软雅黑" panose="020B0503020204020204" charset="-122"/>
               </a:rPr>
               <a:t>右侧 Claude Code 图标 →</a:t>
             </a:r>
+            <a:endParaRPr sz="1150" b="0">
+              <a:solidFill>
+                <a:srgbClr val="1B4AA8"/>
+              </a:solidFill>
+              <a:latin typeface="微软雅黑" panose="020B0503020204020204" charset="-122"/>
+            </a:endParaRPr>
           </a:p>
           <a:p>
             <a:pPr algn="l">
@@ -6261,10 +6301,16 @@
                 <a:solidFill>
                   <a:srgbClr val="1B4AA8"/>
                 </a:solidFill>
-                <a:latin typeface="Microsoft YaHei"/>
+                <a:latin typeface="微软雅黑" panose="020B0503020204020204" charset="-122"/>
               </a:rPr>
               <a:t>生成 .idea\claudeCodeTabState.xml</a:t>
             </a:r>
+            <a:endParaRPr sz="1150" b="0">
+              <a:solidFill>
+                <a:srgbClr val="1B4AA8"/>
+              </a:solidFill>
+              <a:latin typeface="微软雅黑" panose="020B0503020204020204" charset="-122"/>
+            </a:endParaRPr>
           </a:p>
         </p:txBody>
       </p:sp>
@@ -6285,7 +6331,7 @@
           <a:noFill/>
         </p:spPr>
         <p:txBody>
-          <a:bodyPr wrap="square" anchor="t" lIns="0" rIns="0" tIns="0" bIns="0">
+          <a:bodyPr wrap="square" lIns="0" tIns="0" rIns="0" bIns="0" anchor="t">
             <a:spAutoFit/>
           </a:bodyPr>
           <a:lstStyle/>
@@ -6296,10 +6342,16 @@
                 <a:solidFill>
                   <a:srgbClr val="6B7280"/>
                 </a:solidFill>
-                <a:latin typeface="Microsoft YaHei"/>
+                <a:latin typeface="微软雅黑" panose="020B0503020204020204" charset="-122"/>
               </a:rPr>
               <a:t>握手成功的证据文件</a:t>
             </a:r>
+            <a:endParaRPr sz="1100" b="0">
+              <a:solidFill>
+                <a:srgbClr val="6B7280"/>
+              </a:solidFill>
+              <a:latin typeface="微软雅黑" panose="020B0503020204020204" charset="-122"/>
+            </a:endParaRPr>
           </a:p>
         </p:txBody>
       </p:sp>
@@ -6337,13 +6389,19 @@
                           <a:solidFill>
                             <a:srgbClr val="FFFFFF"/>
                           </a:solidFill>
-                          <a:latin typeface="Microsoft YaHei"/>
+                          <a:latin typeface="微软雅黑" panose="020B0503020204020204" charset="-122"/>
                         </a:rPr>
                         <a:t>组件</a:t>
                       </a:r>
+                      <a:endParaRPr sz="1200" b="1">
+                        <a:solidFill>
+                          <a:srgbClr val="FFFFFF"/>
+                        </a:solidFill>
+                        <a:latin typeface="微软雅黑" panose="020B0503020204020204" charset="-122"/>
+                      </a:endParaRPr>
                     </a:p>
                   </a:txBody>
-                  <a:tcPr marL="91440" marR="73152" marT="36576" marB="36576" anchor="ctr">
+                  <a:tcPr marR="73152" marT="36576" marB="36576" anchor="ctr">
                     <a:solidFill>
                       <a:srgbClr val="1B4AA8"/>
                     </a:solidFill>
@@ -6359,13 +6417,19 @@
                           <a:solidFill>
                             <a:srgbClr val="FFFFFF"/>
                           </a:solidFill>
-                          <a:latin typeface="Microsoft YaHei"/>
+                          <a:latin typeface="微软雅黑" panose="020B0503020204020204" charset="-122"/>
                         </a:rPr>
                         <a:t>版本 / 路径</a:t>
                       </a:r>
+                      <a:endParaRPr sz="1200" b="1">
+                        <a:solidFill>
+                          <a:srgbClr val="FFFFFF"/>
+                        </a:solidFill>
+                        <a:latin typeface="微软雅黑" panose="020B0503020204020204" charset="-122"/>
+                      </a:endParaRPr>
                     </a:p>
                   </a:txBody>
-                  <a:tcPr marL="91440" marR="73152" marT="36576" marB="36576" anchor="ctr">
+                  <a:tcPr marR="73152" marT="36576" marB="36576" anchor="ctr">
                     <a:solidFill>
                       <a:srgbClr val="1B4AA8"/>
                     </a:solidFill>
@@ -6381,13 +6445,19 @@
                           <a:solidFill>
                             <a:srgbClr val="FFFFFF"/>
                           </a:solidFill>
-                          <a:latin typeface="Microsoft YaHei"/>
+                          <a:latin typeface="微软雅黑" panose="020B0503020204020204" charset="-122"/>
                         </a:rPr>
                         <a:t>作用</a:t>
                       </a:r>
+                      <a:endParaRPr sz="1200" b="1">
+                        <a:solidFill>
+                          <a:srgbClr val="FFFFFF"/>
+                        </a:solidFill>
+                        <a:latin typeface="微软雅黑" panose="020B0503020204020204" charset="-122"/>
+                      </a:endParaRPr>
                     </a:p>
                   </a:txBody>
-                  <a:tcPr marL="91440" marR="73152" marT="36576" marB="36576" anchor="ctr">
+                  <a:tcPr marR="73152" marT="36576" marB="36576" anchor="ctr">
                     <a:solidFill>
                       <a:srgbClr val="1B4AA8"/>
                     </a:solidFill>
@@ -6405,13 +6475,19 @@
                           <a:solidFill>
                             <a:srgbClr val="14213D"/>
                           </a:solidFill>
-                          <a:latin typeface="Microsoft YaHei"/>
+                          <a:latin typeface="微软雅黑" panose="020B0503020204020204" charset="-122"/>
                         </a:rPr>
                         <a:t>PyCharm</a:t>
                       </a:r>
+                      <a:endParaRPr sz="1200">
+                        <a:solidFill>
+                          <a:srgbClr val="14213D"/>
+                        </a:solidFill>
+                        <a:latin typeface="微软雅黑" panose="020B0503020204020204" charset="-122"/>
+                      </a:endParaRPr>
                     </a:p>
                   </a:txBody>
-                  <a:tcPr marL="91440" marR="73152" marT="36576" marB="36576" anchor="ctr">
+                  <a:tcPr marR="73152" marT="36576" marB="36576" anchor="ctr">
                     <a:solidFill>
                       <a:srgbClr val="FFFFFF"/>
                     </a:solidFill>
@@ -6427,13 +6503,19 @@
                           <a:solidFill>
                             <a:srgbClr val="14213D"/>
                           </a:solidFill>
-                          <a:latin typeface="Microsoft YaHei"/>
+                          <a:latin typeface="微软雅黑" panose="020B0503020204020204" charset="-122"/>
                         </a:rPr>
                         <a:t>2026.2.2 · PY-262.10315.174</a:t>
                       </a:r>
+                      <a:endParaRPr sz="1200">
+                        <a:solidFill>
+                          <a:srgbClr val="14213D"/>
+                        </a:solidFill>
+                        <a:latin typeface="微软雅黑" panose="020B0503020204020204" charset="-122"/>
+                      </a:endParaRPr>
                     </a:p>
                   </a:txBody>
-                  <a:tcPr marL="91440" marR="73152" marT="36576" marB="36576" anchor="ctr">
+                  <a:tcPr marR="73152" marT="36576" marB="36576" anchor="ctr">
                     <a:solidFill>
                       <a:srgbClr val="FFFFFF"/>
                     </a:solidFill>
@@ -6449,13 +6531,19 @@
                           <a:solidFill>
                             <a:srgbClr val="14213D"/>
                           </a:solidFill>
-                          <a:latin typeface="Microsoft YaHei"/>
+                          <a:latin typeface="微软雅黑" panose="020B0503020204020204" charset="-122"/>
                         </a:rPr>
                         <a:t>解释器、调试、诊断、上下文来源</a:t>
                       </a:r>
+                      <a:endParaRPr sz="1200">
+                        <a:solidFill>
+                          <a:srgbClr val="14213D"/>
+                        </a:solidFill>
+                        <a:latin typeface="微软雅黑" panose="020B0503020204020204" charset="-122"/>
+                      </a:endParaRPr>
                     </a:p>
                   </a:txBody>
-                  <a:tcPr marL="91440" marR="73152" marT="36576" marB="36576" anchor="ctr">
+                  <a:tcPr marR="73152" marT="36576" marB="36576" anchor="ctr">
                     <a:solidFill>
                       <a:srgbClr val="FFFFFF"/>
                     </a:solidFill>
@@ -6473,13 +6561,19 @@
                           <a:solidFill>
                             <a:srgbClr val="14213D"/>
                           </a:solidFill>
-                          <a:latin typeface="Microsoft YaHei"/>
+                          <a:latin typeface="微软雅黑" panose="020B0503020204020204" charset="-122"/>
                         </a:rPr>
                         <a:t>插件 idea-claude-code-gui</a:t>
                       </a:r>
+                      <a:endParaRPr sz="1200">
+                        <a:solidFill>
+                          <a:srgbClr val="14213D"/>
+                        </a:solidFill>
+                        <a:latin typeface="微软雅黑" panose="020B0503020204020204" charset="-122"/>
+                      </a:endParaRPr>
                     </a:p>
                   </a:txBody>
-                  <a:tcPr marL="91440" marR="73152" marT="36576" marB="36576" anchor="ctr">
+                  <a:tcPr marR="73152" marT="36576" marB="36576" anchor="ctr">
                     <a:solidFill>
                       <a:srgbClr val="EEF3FC"/>
                     </a:solidFill>
@@ -6495,13 +6589,19 @@
                           <a:solidFill>
                             <a:srgbClr val="14213D"/>
                           </a:solidFill>
-                          <a:latin typeface="Microsoft YaHei"/>
+                          <a:latin typeface="微软雅黑" panose="020B0503020204020204" charset="-122"/>
                         </a:rPr>
                         <a:t>0.5.7</a:t>
                       </a:r>
+                      <a:endParaRPr sz="1200">
+                        <a:solidFill>
+                          <a:srgbClr val="14213D"/>
+                        </a:solidFill>
+                        <a:latin typeface="微软雅黑" panose="020B0503020204020204" charset="-122"/>
+                      </a:endParaRPr>
                     </a:p>
                   </a:txBody>
-                  <a:tcPr marL="91440" marR="73152" marT="36576" marB="36576" anchor="ctr">
+                  <a:tcPr marR="73152" marT="36576" marB="36576" anchor="ctr">
                     <a:solidFill>
                       <a:srgbClr val="EEF3FC"/>
                     </a:solidFill>
@@ -6517,13 +6617,19 @@
                           <a:solidFill>
                             <a:srgbClr val="14213D"/>
                           </a:solidFill>
-                          <a:latin typeface="Microsoft YaHei"/>
+                          <a:latin typeface="微软雅黑" panose="020B0503020204020204" charset="-122"/>
                         </a:rPr>
                         <a:t>会话界面，把改动以 diff 回填</a:t>
                       </a:r>
+                      <a:endParaRPr sz="1200">
+                        <a:solidFill>
+                          <a:srgbClr val="14213D"/>
+                        </a:solidFill>
+                        <a:latin typeface="微软雅黑" panose="020B0503020204020204" charset="-122"/>
+                      </a:endParaRPr>
                     </a:p>
                   </a:txBody>
-                  <a:tcPr marL="91440" marR="73152" marT="36576" marB="36576" anchor="ctr">
+                  <a:tcPr marR="73152" marT="36576" marB="36576" anchor="ctr">
                     <a:solidFill>
                       <a:srgbClr val="EEF3FC"/>
                     </a:solidFill>
@@ -6541,13 +6647,19 @@
                           <a:solidFill>
                             <a:srgbClr val="14213D"/>
                           </a:solidFill>
-                          <a:latin typeface="Microsoft YaHei"/>
+                          <a:latin typeface="微软雅黑" panose="020B0503020204020204" charset="-122"/>
                         </a:rPr>
                         <a:t>Claude Code CLI</a:t>
                       </a:r>
+                      <a:endParaRPr sz="1200">
+                        <a:solidFill>
+                          <a:srgbClr val="14213D"/>
+                        </a:solidFill>
+                        <a:latin typeface="微软雅黑" panose="020B0503020204020204" charset="-122"/>
+                      </a:endParaRPr>
                     </a:p>
                   </a:txBody>
-                  <a:tcPr marL="91440" marR="73152" marT="36576" marB="36576" anchor="ctr">
+                  <a:tcPr marR="73152" marT="36576" marB="36576" anchor="ctr">
                     <a:solidFill>
                       <a:srgbClr val="FFFFFF"/>
                     </a:solidFill>
@@ -6563,13 +6675,19 @@
                           <a:solidFill>
                             <a:srgbClr val="14213D"/>
                           </a:solidFill>
-                          <a:latin typeface="Microsoft YaHei"/>
+                          <a:latin typeface="微软雅黑" panose="020B0503020204020204" charset="-122"/>
                         </a:rPr>
                         <a:t>2.1.283 · Node v24.17.0</a:t>
                       </a:r>
+                      <a:endParaRPr sz="1200">
+                        <a:solidFill>
+                          <a:srgbClr val="14213D"/>
+                        </a:solidFill>
+                        <a:latin typeface="微软雅黑" panose="020B0503020204020204" charset="-122"/>
+                      </a:endParaRPr>
                     </a:p>
                   </a:txBody>
-                  <a:tcPr marL="91440" marR="73152" marT="36576" marB="36576" anchor="ctr">
+                  <a:tcPr marR="73152" marT="36576" marB="36576" anchor="ctr">
                     <a:solidFill>
                       <a:srgbClr val="FFFFFF"/>
                     </a:solidFill>
@@ -6585,13 +6703,19 @@
                           <a:solidFill>
                             <a:srgbClr val="14213D"/>
                           </a:solidFill>
-                          <a:latin typeface="Microsoft YaHei"/>
+                          <a:latin typeface="微软雅黑" panose="020B0503020204020204" charset="-122"/>
                         </a:rPr>
                         <a:t>执行：Read / Write / Edit / Bash</a:t>
                       </a:r>
+                      <a:endParaRPr sz="1200">
+                        <a:solidFill>
+                          <a:srgbClr val="14213D"/>
+                        </a:solidFill>
+                        <a:latin typeface="微软雅黑" panose="020B0503020204020204" charset="-122"/>
+                      </a:endParaRPr>
                     </a:p>
                   </a:txBody>
-                  <a:tcPr marL="91440" marR="73152" marT="36576" marB="36576" anchor="ctr">
+                  <a:tcPr marR="73152" marT="36576" marB="36576" anchor="ctr">
                     <a:solidFill>
                       <a:srgbClr val="FFFFFF"/>
                     </a:solidFill>
@@ -6611,7 +6735,7 @@
 </file>
 
 <file path=ppt/slides/slide5.xml><?xml version="1.0" encoding="utf-8"?>
-<p:sld xmlns:a="http://schemas.openxmlformats.org/drawingml/2006/main" xmlns:p="http://schemas.openxmlformats.org/presentationml/2006/main" xmlns:r="http://schemas.openxmlformats.org/officeDocument/2006/relationships">
+<p:sld xmlns:a="http://schemas.openxmlformats.org/drawingml/2006/main" xmlns:r="http://schemas.openxmlformats.org/officeDocument/2006/relationships" xmlns:p="http://schemas.openxmlformats.org/presentationml/2006/main">
   <p:cSld>
     <p:spTree>
       <p:nvGrpSpPr>
@@ -6681,7 +6805,7 @@
           <a:noFill/>
         </p:spPr>
         <p:txBody>
-          <a:bodyPr wrap="square" anchor="t" lIns="0" rIns="0" tIns="0" bIns="0">
+          <a:bodyPr wrap="square" lIns="0" tIns="0" rIns="0" bIns="0" anchor="t">
             <a:spAutoFit/>
           </a:bodyPr>
           <a:lstStyle/>
@@ -6692,10 +6816,16 @@
                 <a:solidFill>
                   <a:srgbClr val="2F6FEB"/>
                 </a:solidFill>
-                <a:latin typeface="Microsoft YaHei"/>
+                <a:latin typeface="微软雅黑" panose="020B0503020204020204" charset="-122"/>
               </a:rPr>
               <a:t>关键配置</a:t>
             </a:r>
+            <a:endParaRPr sz="1200" b="1">
+              <a:solidFill>
+                <a:srgbClr val="2F6FEB"/>
+              </a:solidFill>
+              <a:latin typeface="微软雅黑" panose="020B0503020204020204" charset="-122"/>
+            </a:endParaRPr>
           </a:p>
         </p:txBody>
       </p:sp>
@@ -6716,7 +6846,7 @@
           <a:noFill/>
         </p:spPr>
         <p:txBody>
-          <a:bodyPr wrap="square" anchor="t" lIns="0" rIns="0" tIns="0" bIns="0">
+          <a:bodyPr wrap="square" lIns="0" tIns="0" rIns="0" bIns="0" anchor="t">
             <a:spAutoFit/>
           </a:bodyPr>
           <a:lstStyle/>
@@ -6727,10 +6857,16 @@
                 <a:solidFill>
                   <a:srgbClr val="14213D"/>
                 </a:solidFill>
-                <a:latin typeface="Microsoft YaHei"/>
+                <a:latin typeface="微软雅黑" panose="020B0503020204020204" charset="-122"/>
               </a:rPr>
               <a:t>配置：API 地址、模型名、角色分工</a:t>
             </a:r>
+            <a:endParaRPr sz="2900" b="1">
+              <a:solidFill>
+                <a:srgbClr val="14213D"/>
+              </a:solidFill>
+              <a:latin typeface="微软雅黑" panose="020B0503020204020204" charset="-122"/>
+            </a:endParaRPr>
           </a:p>
         </p:txBody>
       </p:sp>
@@ -6795,7 +6931,7 @@
           <a:noFill/>
         </p:spPr>
         <p:txBody>
-          <a:bodyPr wrap="square" anchor="t" lIns="0" rIns="0" tIns="0" bIns="0">
+          <a:bodyPr wrap="square" lIns="0" tIns="0" rIns="0" bIns="0" anchor="t">
             <a:spAutoFit/>
           </a:bodyPr>
           <a:lstStyle/>
@@ -6806,10 +6942,16 @@
                 <a:solidFill>
                   <a:srgbClr val="6B7280"/>
                 </a:solidFill>
-                <a:latin typeface="Microsoft YaHei"/>
+                <a:latin typeface="微软雅黑" panose="020B0503020204020204" charset="-122"/>
               </a:rPr>
               <a:t>5</a:t>
             </a:r>
+            <a:endParaRPr sz="1100" b="0">
+              <a:solidFill>
+                <a:srgbClr val="6B7280"/>
+              </a:solidFill>
+              <a:latin typeface="微软雅黑" panose="020B0503020204020204" charset="-122"/>
+            </a:endParaRPr>
           </a:p>
         </p:txBody>
       </p:sp>
@@ -6874,7 +7016,7 @@
           <a:noFill/>
         </p:spPr>
         <p:txBody>
-          <a:bodyPr wrap="square" anchor="t" lIns="0" rIns="0" tIns="0" bIns="0">
+          <a:bodyPr wrap="square" lIns="0" tIns="0" rIns="0" bIns="0" anchor="t">
             <a:spAutoFit/>
           </a:bodyPr>
           <a:lstStyle/>
@@ -6885,10 +7027,16 @@
                 <a:solidFill>
                   <a:srgbClr val="8FB6FF"/>
                 </a:solidFill>
-                <a:latin typeface="Microsoft YaHei"/>
+                <a:latin typeface="微软雅黑" panose="020B0503020204020204" charset="-122"/>
               </a:rPr>
               <a:t>C:\Users\16218\.claude\settings.json</a:t>
             </a:r>
+            <a:endParaRPr sz="1050" b="0">
+              <a:solidFill>
+                <a:srgbClr val="8FB6FF"/>
+              </a:solidFill>
+              <a:latin typeface="微软雅黑" panose="020B0503020204020204" charset="-122"/>
+            </a:endParaRPr>
           </a:p>
         </p:txBody>
       </p:sp>
@@ -6909,7 +7057,7 @@
           <a:noFill/>
         </p:spPr>
         <p:txBody>
-          <a:bodyPr wrap="square" anchor="t" lIns="0" rIns="0" tIns="0" bIns="0">
+          <a:bodyPr wrap="square" lIns="0" tIns="0" rIns="0" bIns="0" anchor="t">
             <a:spAutoFit/>
           </a:bodyPr>
           <a:lstStyle/>
@@ -6924,10 +7072,16 @@
                 <a:solidFill>
                   <a:srgbClr val="C9E3FF"/>
                 </a:solidFill>
-                <a:latin typeface="Microsoft YaHei"/>
+                <a:latin typeface="微软雅黑" panose="020B0503020204020204" charset="-122"/>
               </a:rPr>
               <a:t>"ANTHROPIC_BASE_URL": "https://api.deepseek.com/anthropic",</a:t>
             </a:r>
+            <a:endParaRPr sz="1150" b="0">
+              <a:solidFill>
+                <a:srgbClr val="C9E3FF"/>
+              </a:solidFill>
+              <a:latin typeface="微软雅黑" panose="020B0503020204020204" charset="-122"/>
+            </a:endParaRPr>
           </a:p>
           <a:p>
             <a:pPr algn="l">
@@ -6940,10 +7094,16 @@
                 <a:solidFill>
                   <a:srgbClr val="C9E3FF"/>
                 </a:solidFill>
-                <a:latin typeface="Microsoft YaHei"/>
+                <a:latin typeface="微软雅黑" panose="020B0503020204020204" charset="-122"/>
               </a:rPr>
               <a:t>"ANTHROPIC_AUTH_TOKEN": "sk-****（脱敏）",</a:t>
             </a:r>
+            <a:endParaRPr sz="1150" b="0">
+              <a:solidFill>
+                <a:srgbClr val="C9E3FF"/>
+              </a:solidFill>
+              <a:latin typeface="微软雅黑" panose="020B0503020204020204" charset="-122"/>
+            </a:endParaRPr>
           </a:p>
           <a:p>
             <a:pPr algn="l">
@@ -6956,10 +7116,16 @@
                 <a:solidFill>
                   <a:srgbClr val="C9E3FF"/>
                 </a:solidFill>
-                <a:latin typeface="Microsoft YaHei"/>
+                <a:latin typeface="微软雅黑" panose="020B0503020204020204" charset="-122"/>
               </a:rPr>
               <a:t>"ANTHROPIC_DEFAULT_SONNET_MODEL": "deepseek-flash"</a:t>
             </a:r>
+            <a:endParaRPr sz="1150" b="0">
+              <a:solidFill>
+                <a:srgbClr val="C9E3FF"/>
+              </a:solidFill>
+              <a:latin typeface="微软雅黑" panose="020B0503020204020204" charset="-122"/>
+            </a:endParaRPr>
           </a:p>
         </p:txBody>
       </p:sp>
@@ -6996,13 +7162,19 @@
                           <a:solidFill>
                             <a:srgbClr val="FFFFFF"/>
                           </a:solidFill>
-                          <a:latin typeface="Microsoft YaHei"/>
+                          <a:latin typeface="微软雅黑" panose="020B0503020204020204" charset="-122"/>
                         </a:rPr>
                         <a:t>插件下拉显示</a:t>
                       </a:r>
+                      <a:endParaRPr sz="1200" b="1">
+                        <a:solidFill>
+                          <a:srgbClr val="FFFFFF"/>
+                        </a:solidFill>
+                        <a:latin typeface="微软雅黑" panose="020B0503020204020204" charset="-122"/>
+                      </a:endParaRPr>
                     </a:p>
                   </a:txBody>
-                  <a:tcPr marL="91440" marR="73152" marT="36576" marB="36576" anchor="ctr">
+                  <a:tcPr marR="73152" marT="36576" marB="36576" anchor="ctr">
                     <a:solidFill>
                       <a:srgbClr val="1B4AA8"/>
                     </a:solidFill>
@@ -7018,13 +7190,19 @@
                           <a:solidFill>
                             <a:srgbClr val="FFFFFF"/>
                           </a:solidFill>
-                          <a:latin typeface="Microsoft YaHei"/>
+                          <a:latin typeface="微软雅黑" panose="020B0503020204020204" charset="-122"/>
                         </a:rPr>
                         <a:t>实际模型</a:t>
                       </a:r>
+                      <a:endParaRPr sz="1200" b="1">
+                        <a:solidFill>
+                          <a:srgbClr val="FFFFFF"/>
+                        </a:solidFill>
+                        <a:latin typeface="微软雅黑" panose="020B0503020204020204" charset="-122"/>
+                      </a:endParaRPr>
                     </a:p>
                   </a:txBody>
-                  <a:tcPr marL="91440" marR="73152" marT="36576" marB="36576" anchor="ctr">
+                  <a:tcPr marR="73152" marT="36576" marB="36576" anchor="ctr">
                     <a:solidFill>
                       <a:srgbClr val="1B4AA8"/>
                     </a:solidFill>
@@ -7042,13 +7220,19 @@
                           <a:solidFill>
                             <a:srgbClr val="14213D"/>
                           </a:solidFill>
-                          <a:latin typeface="Microsoft YaHei"/>
+                          <a:latin typeface="微软雅黑" panose="020B0503020204020204" charset="-122"/>
                         </a:rPr>
                         <a:t>Sonnet</a:t>
                       </a:r>
+                      <a:endParaRPr sz="1200">
+                        <a:solidFill>
+                          <a:srgbClr val="14213D"/>
+                        </a:solidFill>
+                        <a:latin typeface="微软雅黑" panose="020B0503020204020204" charset="-122"/>
+                      </a:endParaRPr>
                     </a:p>
                   </a:txBody>
-                  <a:tcPr marL="91440" marR="73152" marT="36576" marB="36576" anchor="ctr">
+                  <a:tcPr marR="73152" marT="36576" marB="36576" anchor="ctr">
                     <a:solidFill>
                       <a:srgbClr val="FFFFFF"/>
                     </a:solidFill>
@@ -7064,13 +7248,19 @@
                           <a:solidFill>
                             <a:srgbClr val="14213D"/>
                           </a:solidFill>
-                          <a:latin typeface="Microsoft YaHei"/>
+                          <a:latin typeface="微软雅黑" panose="020B0503020204020204" charset="-122"/>
                         </a:rPr>
                         <a:t>deepseek-flash</a:t>
                       </a:r>
+                      <a:endParaRPr sz="1200">
+                        <a:solidFill>
+                          <a:srgbClr val="14213D"/>
+                        </a:solidFill>
+                        <a:latin typeface="微软雅黑" panose="020B0503020204020204" charset="-122"/>
+                      </a:endParaRPr>
                     </a:p>
                   </a:txBody>
-                  <a:tcPr marL="91440" marR="73152" marT="36576" marB="36576" anchor="ctr">
+                  <a:tcPr marR="73152" marT="36576" marB="36576" anchor="ctr">
                     <a:solidFill>
                       <a:srgbClr val="FFFFFF"/>
                     </a:solidFill>
@@ -7088,13 +7278,19 @@
                           <a:solidFill>
                             <a:srgbClr val="14213D"/>
                           </a:solidFill>
-                          <a:latin typeface="Microsoft YaHei"/>
+                          <a:latin typeface="微软雅黑" panose="020B0503020204020204" charset="-122"/>
                         </a:rPr>
                         <a:t>Opus / Haiku / 兜底</a:t>
                       </a:r>
+                      <a:endParaRPr sz="1200">
+                        <a:solidFill>
+                          <a:srgbClr val="14213D"/>
+                        </a:solidFill>
+                        <a:latin typeface="微软雅黑" panose="020B0503020204020204" charset="-122"/>
+                      </a:endParaRPr>
                     </a:p>
                   </a:txBody>
-                  <a:tcPr marL="91440" marR="73152" marT="36576" marB="36576" anchor="ctr">
+                  <a:tcPr marR="73152" marT="36576" marB="36576" anchor="ctr">
                     <a:solidFill>
                       <a:srgbClr val="EEF3FC"/>
                     </a:solidFill>
@@ -7110,13 +7306,19 @@
                           <a:solidFill>
                             <a:srgbClr val="14213D"/>
                           </a:solidFill>
-                          <a:latin typeface="Microsoft YaHei"/>
+                          <a:latin typeface="微软雅黑" panose="020B0503020204020204" charset="-122"/>
                         </a:rPr>
                         <a:t>deepseek-flash</a:t>
                       </a:r>
+                      <a:endParaRPr sz="1200">
+                        <a:solidFill>
+                          <a:srgbClr val="14213D"/>
+                        </a:solidFill>
+                        <a:latin typeface="微软雅黑" panose="020B0503020204020204" charset="-122"/>
+                      </a:endParaRPr>
                     </a:p>
                   </a:txBody>
-                  <a:tcPr marL="91440" marR="73152" marT="36576" marB="36576" anchor="ctr">
+                  <a:tcPr marR="73152" marT="36576" marB="36576" anchor="ctr">
                     <a:solidFill>
                       <a:srgbClr val="EEF3FC"/>
                     </a:solidFill>
@@ -7144,7 +7346,7 @@
           <a:noFill/>
         </p:spPr>
         <p:txBody>
-          <a:bodyPr wrap="square" anchor="t" lIns="0" rIns="0" tIns="0" bIns="0">
+          <a:bodyPr wrap="square" lIns="0" tIns="0" rIns="0" bIns="0" anchor="t">
             <a:spAutoFit/>
           </a:bodyPr>
           <a:lstStyle/>
@@ -7159,10 +7361,16 @@
                 <a:solidFill>
                   <a:srgbClr val="6B7280"/>
                 </a:solidFill>
-                <a:latin typeface="Microsoft YaHei"/>
+                <a:latin typeface="微软雅黑" panose="020B0503020204020204" charset="-122"/>
               </a:rPr>
               <a:t>模型名以网关回显为准：历史会话计费记录里服务端返回的是 DeepSeek-V4-Pro。</a:t>
             </a:r>
+            <a:endParaRPr sz="1100" b="0">
+              <a:solidFill>
+                <a:srgbClr val="6B7280"/>
+              </a:solidFill>
+              <a:latin typeface="微软雅黑" panose="020B0503020204020204" charset="-122"/>
+            </a:endParaRPr>
           </a:p>
         </p:txBody>
       </p:sp>
@@ -7227,7 +7435,7 @@
           <a:noFill/>
         </p:spPr>
         <p:txBody>
-          <a:bodyPr wrap="square" anchor="t" lIns="0" rIns="0" tIns="0" bIns="0">
+          <a:bodyPr wrap="square" lIns="0" tIns="0" rIns="0" bIns="0" anchor="t">
             <a:spAutoFit/>
           </a:bodyPr>
           <a:lstStyle/>
@@ -7238,10 +7446,16 @@
                 <a:solidFill>
                   <a:srgbClr val="FFFFFF"/>
                 </a:solidFill>
-                <a:latin typeface="Microsoft YaHei"/>
+                <a:latin typeface="微软雅黑" panose="020B0503020204020204" charset="-122"/>
               </a:rPr>
               <a:t>角色分工</a:t>
             </a:r>
+            <a:endParaRPr sz="1300" b="1">
+              <a:solidFill>
+                <a:srgbClr val="FFFFFF"/>
+              </a:solidFill>
+              <a:latin typeface="微软雅黑" panose="020B0503020204020204" charset="-122"/>
+            </a:endParaRPr>
           </a:p>
         </p:txBody>
       </p:sp>
@@ -7308,7 +7522,7 @@
           <a:noFill/>
         </p:spPr>
         <p:txBody>
-          <a:bodyPr wrap="square" anchor="t" lIns="0" rIns="0" tIns="0" bIns="0">
+          <a:bodyPr wrap="square" lIns="0" tIns="0" rIns="0" bIns="0" anchor="t">
             <a:spAutoFit/>
           </a:bodyPr>
           <a:lstStyle/>
@@ -7319,10 +7533,16 @@
                 <a:solidFill>
                   <a:srgbClr val="1B4AA8"/>
                 </a:solidFill>
-                <a:latin typeface="Microsoft YaHei"/>
+                <a:latin typeface="微软雅黑" panose="020B0503020204020204" charset="-122"/>
               </a:rPr>
               <a:t>IDE（PyCharm）</a:t>
             </a:r>
+            <a:endParaRPr sz="1300" b="1">
+              <a:solidFill>
+                <a:srgbClr val="1B4AA8"/>
+              </a:solidFill>
+              <a:latin typeface="微软雅黑" panose="020B0503020204020204" charset="-122"/>
+            </a:endParaRPr>
           </a:p>
         </p:txBody>
       </p:sp>
@@ -7343,7 +7563,7 @@
           <a:noFill/>
         </p:spPr>
         <p:txBody>
-          <a:bodyPr wrap="square" anchor="t" lIns="0" rIns="0" tIns="0" bIns="0">
+          <a:bodyPr wrap="square" lIns="0" tIns="0" rIns="0" bIns="0" anchor="t">
             <a:spAutoFit/>
           </a:bodyPr>
           <a:lstStyle/>
@@ -7358,10 +7578,16 @@
                 <a:solidFill>
                   <a:srgbClr val="14213D"/>
                 </a:solidFill>
-                <a:latin typeface="Microsoft YaHei"/>
+                <a:latin typeface="微软雅黑" panose="020B0503020204020204" charset="-122"/>
               </a:rPr>
               <a:t>给上下文：解释器、断点、诊断、Git 视图</a:t>
             </a:r>
+            <a:endParaRPr sz="1150" b="0">
+              <a:solidFill>
+                <a:srgbClr val="14213D"/>
+              </a:solidFill>
+              <a:latin typeface="微软雅黑" panose="020B0503020204020204" charset="-122"/>
+            </a:endParaRPr>
           </a:p>
         </p:txBody>
       </p:sp>
@@ -7428,7 +7654,7 @@
           <a:noFill/>
         </p:spPr>
         <p:txBody>
-          <a:bodyPr wrap="square" anchor="t" lIns="0" rIns="0" tIns="0" bIns="0">
+          <a:bodyPr wrap="square" lIns="0" tIns="0" rIns="0" bIns="0" anchor="t">
             <a:spAutoFit/>
           </a:bodyPr>
           <a:lstStyle/>
@@ -7439,10 +7665,16 @@
                 <a:solidFill>
                   <a:srgbClr val="1B4AA8"/>
                 </a:solidFill>
-                <a:latin typeface="Microsoft YaHei"/>
+                <a:latin typeface="微软雅黑" panose="020B0503020204020204" charset="-122"/>
               </a:rPr>
               <a:t>插件（GUI）</a:t>
             </a:r>
+            <a:endParaRPr sz="1300" b="1">
+              <a:solidFill>
+                <a:srgbClr val="1B4AA8"/>
+              </a:solidFill>
+              <a:latin typeface="微软雅黑" panose="020B0503020204020204" charset="-122"/>
+            </a:endParaRPr>
           </a:p>
         </p:txBody>
       </p:sp>
@@ -7463,7 +7695,7 @@
           <a:noFill/>
         </p:spPr>
         <p:txBody>
-          <a:bodyPr wrap="square" anchor="t" lIns="0" rIns="0" tIns="0" bIns="0">
+          <a:bodyPr wrap="square" lIns="0" tIns="0" rIns="0" bIns="0" anchor="t">
             <a:spAutoFit/>
           </a:bodyPr>
           <a:lstStyle/>
@@ -7478,10 +7710,16 @@
                 <a:solidFill>
                   <a:srgbClr val="14213D"/>
                 </a:solidFill>
-                <a:latin typeface="Microsoft YaHei"/>
+                <a:latin typeface="微软雅黑" panose="020B0503020204020204" charset="-122"/>
               </a:rPr>
               <a:t>给界面：会话渲染、diff 回填、上下文投递</a:t>
             </a:r>
+            <a:endParaRPr sz="1150" b="0">
+              <a:solidFill>
+                <a:srgbClr val="14213D"/>
+              </a:solidFill>
+              <a:latin typeface="微软雅黑" panose="020B0503020204020204" charset="-122"/>
+            </a:endParaRPr>
           </a:p>
         </p:txBody>
       </p:sp>
@@ -7548,7 +7786,7 @@
           <a:noFill/>
         </p:spPr>
         <p:txBody>
-          <a:bodyPr wrap="square" anchor="t" lIns="0" rIns="0" tIns="0" bIns="0">
+          <a:bodyPr wrap="square" lIns="0" tIns="0" rIns="0" bIns="0" anchor="t">
             <a:spAutoFit/>
           </a:bodyPr>
           <a:lstStyle/>
@@ -7559,10 +7797,16 @@
                 <a:solidFill>
                   <a:srgbClr val="1B4AA8"/>
                 </a:solidFill>
-                <a:latin typeface="Microsoft YaHei"/>
+                <a:latin typeface="微软雅黑" panose="020B0503020204020204" charset="-122"/>
               </a:rPr>
               <a:t>Agent（CLI）</a:t>
             </a:r>
+            <a:endParaRPr sz="1300" b="1">
+              <a:solidFill>
+                <a:srgbClr val="1B4AA8"/>
+              </a:solidFill>
+              <a:latin typeface="微软雅黑" panose="020B0503020204020204" charset="-122"/>
+            </a:endParaRPr>
           </a:p>
         </p:txBody>
       </p:sp>
@@ -7583,7 +7827,7 @@
           <a:noFill/>
         </p:spPr>
         <p:txBody>
-          <a:bodyPr wrap="square" anchor="t" lIns="0" rIns="0" tIns="0" bIns="0">
+          <a:bodyPr wrap="square" lIns="0" tIns="0" rIns="0" bIns="0" anchor="t">
             <a:spAutoFit/>
           </a:bodyPr>
           <a:lstStyle/>
@@ -7598,10 +7842,16 @@
                 <a:solidFill>
                   <a:srgbClr val="14213D"/>
                 </a:solidFill>
-                <a:latin typeface="Microsoft YaHei"/>
+                <a:latin typeface="微软雅黑" panose="020B0503020204020204" charset="-122"/>
               </a:rPr>
               <a:t>给手脚：读写文件、执行命令、多步编排</a:t>
             </a:r>
+            <a:endParaRPr sz="1150" b="0">
+              <a:solidFill>
+                <a:srgbClr val="14213D"/>
+              </a:solidFill>
+              <a:latin typeface="微软雅黑" panose="020B0503020204020204" charset="-122"/>
+            </a:endParaRPr>
           </a:p>
         </p:txBody>
       </p:sp>
@@ -7622,7 +7872,7 @@
           <a:noFill/>
         </p:spPr>
         <p:txBody>
-          <a:bodyPr wrap="square" anchor="t" lIns="0" rIns="0" tIns="0" bIns="0">
+          <a:bodyPr wrap="square" lIns="0" tIns="0" rIns="0" bIns="0" anchor="t">
             <a:spAutoFit/>
           </a:bodyPr>
           <a:lstStyle/>
@@ -7633,10 +7883,16 @@
                 <a:solidFill>
                   <a:srgbClr val="6B7280"/>
                 </a:solidFill>
-                <a:latin typeface="Microsoft YaHei"/>
+                <a:latin typeface="微软雅黑" panose="020B0503020204020204" charset="-122"/>
               </a:rPr>
               <a:t>一句话：IDE 给上下文，插件给界面，Agent 给手脚。</a:t>
             </a:r>
+            <a:endParaRPr sz="1150" b="1">
+              <a:solidFill>
+                <a:srgbClr val="6B7280"/>
+              </a:solidFill>
+              <a:latin typeface="微软雅黑" panose="020B0503020204020204" charset="-122"/>
+            </a:endParaRPr>
           </a:p>
         </p:txBody>
       </p:sp>
@@ -7649,7 +7905,7 @@
 </file>
 
 <file path=ppt/slides/slide6.xml><?xml version="1.0" encoding="utf-8"?>
-<p:sld xmlns:a="http://schemas.openxmlformats.org/drawingml/2006/main" xmlns:p="http://schemas.openxmlformats.org/presentationml/2006/main" xmlns:r="http://schemas.openxmlformats.org/officeDocument/2006/relationships">
+<p:sld xmlns:a="http://schemas.openxmlformats.org/drawingml/2006/main" xmlns:r="http://schemas.openxmlformats.org/officeDocument/2006/relationships" xmlns:p="http://schemas.openxmlformats.org/presentationml/2006/main">
   <p:cSld>
     <p:spTree>
       <p:nvGrpSpPr>
@@ -7719,7 +7975,7 @@
           <a:noFill/>
         </p:spPr>
         <p:txBody>
-          <a:bodyPr wrap="square" anchor="t" lIns="0" rIns="0" tIns="0" bIns="0">
+          <a:bodyPr wrap="square" lIns="0" tIns="0" rIns="0" bIns="0" anchor="t">
             <a:spAutoFit/>
           </a:bodyPr>
           <a:lstStyle/>
@@ -7730,10 +7986,16 @@
                 <a:solidFill>
                   <a:srgbClr val="2F6FEB"/>
                 </a:solidFill>
-                <a:latin typeface="Microsoft YaHei"/>
+                <a:latin typeface="微软雅黑" panose="020B0503020204020204" charset="-122"/>
               </a:rPr>
-              <a:t>功能验证 1/3</a:t>
-            </a:r>
+              <a:t>方案一 vs 方案二</a:t>
+            </a:r>
+            <a:endParaRPr sz="1200" b="1">
+              <a:solidFill>
+                <a:srgbClr val="2F6FEB"/>
+              </a:solidFill>
+              <a:latin typeface="微软雅黑" panose="020B0503020204020204" charset="-122"/>
+            </a:endParaRPr>
           </a:p>
         </p:txBody>
       </p:sp>
@@ -7754,7 +8016,7 @@
           <a:noFill/>
         </p:spPr>
         <p:txBody>
-          <a:bodyPr wrap="square" anchor="t" lIns="0" rIns="0" tIns="0" bIns="0">
+          <a:bodyPr wrap="square" lIns="0" tIns="0" rIns="0" bIns="0" anchor="t">
             <a:spAutoFit/>
           </a:bodyPr>
           <a:lstStyle/>
@@ -7765,10 +8027,16 @@
                 <a:solidFill>
                   <a:srgbClr val="14213D"/>
                 </a:solidFill>
-                <a:latin typeface="Microsoft YaHei"/>
+                <a:latin typeface="微软雅黑" panose="020B0503020204020204" charset="-122"/>
               </a:rPr>
-              <a:t>验证一：对话 —— 代码逐行解释</a:t>
-            </a:r>
+              <a:t>对比：建议层 vs 执行层</a:t>
+            </a:r>
+            <a:endParaRPr sz="2900" b="1">
+              <a:solidFill>
+                <a:srgbClr val="14213D"/>
+              </a:solidFill>
+              <a:latin typeface="微软雅黑" panose="020B0503020204020204" charset="-122"/>
+            </a:endParaRPr>
           </a:p>
         </p:txBody>
       </p:sp>
@@ -7833,7 +8101,7 @@
           <a:noFill/>
         </p:spPr>
         <p:txBody>
-          <a:bodyPr wrap="square" anchor="t" lIns="0" rIns="0" tIns="0" bIns="0">
+          <a:bodyPr wrap="square" lIns="0" tIns="0" rIns="0" bIns="0" anchor="t">
             <a:spAutoFit/>
           </a:bodyPr>
           <a:lstStyle/>
@@ -7844,1102 +8112,16 @@
                 <a:solidFill>
                   <a:srgbClr val="6B7280"/>
                 </a:solidFill>
-                <a:latin typeface="Microsoft YaHei"/>
-              </a:rPr>
-              <a:t>6</a:t>
-            </a:r>
-          </a:p>
-        </p:txBody>
-      </p:sp>
-      <p:sp>
-        <p:nvSpPr>
-          <p:cNvPr id="7" name="Oval 6"/>
-          <p:cNvSpPr/>
-          <p:nvPr/>
-        </p:nvSpPr>
-        <p:spPr>
-          <a:xfrm>
-            <a:off x="685800" y="1672209"/>
-            <a:ext cx="82296" cy="82296"/>
-          </a:xfrm>
-          <a:prstGeom prst="ellipse">
-            <a:avLst/>
-          </a:prstGeom>
-          <a:solidFill>
-            <a:srgbClr val="2F6FEB"/>
-          </a:solidFill>
-          <a:ln>
-            <a:noFill/>
-          </a:ln>
-        </p:spPr>
-        <p:style>
-          <a:lnRef idx="1">
-            <a:schemeClr val="accent1"/>
-          </a:lnRef>
-          <a:fillRef idx="3">
-            <a:schemeClr val="accent1"/>
-          </a:fillRef>
-          <a:effectRef idx="2">
-            <a:schemeClr val="accent1"/>
-          </a:effectRef>
-          <a:fontRef idx="minor">
-            <a:schemeClr val="lt1"/>
-          </a:fontRef>
-        </p:style>
-        <p:txBody>
-          <a:bodyPr rtlCol="0" anchor="ctr"/>
-          <a:lstStyle/>
-          <a:p>
-            <a:pPr algn="ctr"/>
-          </a:p>
-        </p:txBody>
-      </p:sp>
-      <p:sp>
-        <p:nvSpPr>
-          <p:cNvPr id="8" name="TextBox 7"/>
-          <p:cNvSpPr txBox="1"/>
-          <p:nvPr/>
-        </p:nvSpPr>
-        <p:spPr>
-          <a:xfrm>
-            <a:off x="941832" y="1600200"/>
-            <a:ext cx="4636007" cy="548640"/>
-          </a:xfrm>
-          <a:prstGeom prst="rect">
-            <a:avLst/>
-          </a:prstGeom>
-          <a:noFill/>
-        </p:spPr>
-        <p:txBody>
-          <a:bodyPr wrap="square" lIns="0" rIns="0" tIns="0" bIns="0">
-            <a:spAutoFit/>
-          </a:bodyPr>
-          <a:lstStyle/>
-          <a:p>
-            <a:r>
-              <a:rPr sz="1350" b="1">
-                <a:solidFill>
-                  <a:srgbClr val="1B4AA8"/>
-                </a:solidFill>
-                <a:latin typeface="Microsoft YaHei"/>
-              </a:rPr>
-              <a:t>提问：</a:t>
-            </a:r>
-            <a:r>
-              <a:rPr sz="1350">
-                <a:solidFill>
-                  <a:srgbClr val="14213D"/>
-                </a:solidFill>
-                <a:latin typeface="Microsoft YaHei"/>
-              </a:rPr>
-              <a:t>「这一段代码有什么问题」——回答按「第一部分：导入包」逐条展开，即逐行解释</a:t>
-            </a:r>
-          </a:p>
-        </p:txBody>
-      </p:sp>
-      <p:sp>
-        <p:nvSpPr>
-          <p:cNvPr id="9" name="Oval 8"/>
-          <p:cNvSpPr/>
-          <p:nvPr/>
-        </p:nvSpPr>
-        <p:spPr>
-          <a:xfrm>
-            <a:off x="685800" y="2577465"/>
-            <a:ext cx="82296" cy="82296"/>
-          </a:xfrm>
-          <a:prstGeom prst="ellipse">
-            <a:avLst/>
-          </a:prstGeom>
-          <a:solidFill>
-            <a:srgbClr val="2F6FEB"/>
-          </a:solidFill>
-          <a:ln>
-            <a:noFill/>
-          </a:ln>
-        </p:spPr>
-        <p:style>
-          <a:lnRef idx="1">
-            <a:schemeClr val="accent1"/>
-          </a:lnRef>
-          <a:fillRef idx="3">
-            <a:schemeClr val="accent1"/>
-          </a:fillRef>
-          <a:effectRef idx="2">
-            <a:schemeClr val="accent1"/>
-          </a:effectRef>
-          <a:fontRef idx="minor">
-            <a:schemeClr val="lt1"/>
-          </a:fontRef>
-        </p:style>
-        <p:txBody>
-          <a:bodyPr rtlCol="0" anchor="ctr"/>
-          <a:lstStyle/>
-          <a:p>
-            <a:pPr algn="ctr"/>
-          </a:p>
-        </p:txBody>
-      </p:sp>
-      <p:sp>
-        <p:nvSpPr>
-          <p:cNvPr id="10" name="TextBox 9"/>
-          <p:cNvSpPr txBox="1"/>
-          <p:nvPr/>
-        </p:nvSpPr>
-        <p:spPr>
-          <a:xfrm>
-            <a:off x="941832" y="2505456"/>
-            <a:ext cx="4636007" cy="548640"/>
-          </a:xfrm>
-          <a:prstGeom prst="rect">
-            <a:avLst/>
-          </a:prstGeom>
-          <a:noFill/>
-        </p:spPr>
-        <p:txBody>
-          <a:bodyPr wrap="square" lIns="0" rIns="0" tIns="0" bIns="0">
-            <a:spAutoFit/>
-          </a:bodyPr>
-          <a:lstStyle/>
-          <a:p>
-            <a:r>
-              <a:rPr sz="1350" b="1">
-                <a:solidFill>
-                  <a:srgbClr val="1B4AA8"/>
-                </a:solidFill>
-                <a:latin typeface="Microsoft YaHei"/>
-              </a:rPr>
-              <a:t>输入：</a:t>
-            </a:r>
-            <a:r>
-              <a:rPr sz="1350">
-                <a:solidFill>
-                  <a:srgbClr val="14213D"/>
-                </a:solidFill>
-                <a:latin typeface="Microsoft YaHei"/>
-              </a:rPr>
-              <a:t>G:\PycharmProjects\test.py（KMeans 四簇聚类示例）</a:t>
-            </a:r>
-          </a:p>
-        </p:txBody>
-      </p:sp>
-      <p:sp>
-        <p:nvSpPr>
-          <p:cNvPr id="11" name="Oval 10"/>
-          <p:cNvSpPr/>
-          <p:nvPr/>
-        </p:nvSpPr>
-        <p:spPr>
-          <a:xfrm>
-            <a:off x="685800" y="3482721"/>
-            <a:ext cx="82296" cy="82296"/>
-          </a:xfrm>
-          <a:prstGeom prst="ellipse">
-            <a:avLst/>
-          </a:prstGeom>
-          <a:solidFill>
-            <a:srgbClr val="2F6FEB"/>
-          </a:solidFill>
-          <a:ln>
-            <a:noFill/>
-          </a:ln>
-        </p:spPr>
-        <p:style>
-          <a:lnRef idx="1">
-            <a:schemeClr val="accent1"/>
-          </a:lnRef>
-          <a:fillRef idx="3">
-            <a:schemeClr val="accent1"/>
-          </a:fillRef>
-          <a:effectRef idx="2">
-            <a:schemeClr val="accent1"/>
-          </a:effectRef>
-          <a:fontRef idx="minor">
-            <a:schemeClr val="lt1"/>
-          </a:fontRef>
-        </p:style>
-        <p:txBody>
-          <a:bodyPr rtlCol="0" anchor="ctr"/>
-          <a:lstStyle/>
-          <a:p>
-            <a:pPr algn="ctr"/>
-          </a:p>
-        </p:txBody>
-      </p:sp>
-      <p:sp>
-        <p:nvSpPr>
-          <p:cNvPr id="12" name="TextBox 11"/>
-          <p:cNvSpPr txBox="1"/>
-          <p:nvPr/>
-        </p:nvSpPr>
-        <p:spPr>
-          <a:xfrm>
-            <a:off x="941832" y="3410712"/>
-            <a:ext cx="4636007" cy="548640"/>
-          </a:xfrm>
-          <a:prstGeom prst="rect">
-            <a:avLst/>
-          </a:prstGeom>
-          <a:noFill/>
-        </p:spPr>
-        <p:txBody>
-          <a:bodyPr wrap="square" lIns="0" rIns="0" tIns="0" bIns="0">
-            <a:spAutoFit/>
-          </a:bodyPr>
-          <a:lstStyle/>
-          <a:p>
-            <a:r>
-              <a:rPr sz="1350" b="1">
-                <a:solidFill>
-                  <a:srgbClr val="1B4AA8"/>
-                </a:solidFill>
-                <a:latin typeface="Microsoft YaHei"/>
-              </a:rPr>
-              <a:t>结果：</a:t>
-            </a:r>
-            <a:r>
-              <a:rPr sz="1350">
-                <a:solidFill>
-                  <a:srgbClr val="14213D"/>
-                </a:solidFill>
-                <a:latin typeface="Microsoft YaHei"/>
-              </a:rPr>
-              <a:t>讲清 make_blobs 的 n_features=2 是为二维可视化服务、centers 必须是 4 个 2 维点、fit_predict 一步完成拟合+打标</a:t>
-            </a:r>
-          </a:p>
-        </p:txBody>
-      </p:sp>
-      <p:sp>
-        <p:nvSpPr>
-          <p:cNvPr id="13" name="Oval 12"/>
-          <p:cNvSpPr/>
-          <p:nvPr/>
-        </p:nvSpPr>
-        <p:spPr>
-          <a:xfrm>
-            <a:off x="685800" y="4648581"/>
-            <a:ext cx="82296" cy="82296"/>
-          </a:xfrm>
-          <a:prstGeom prst="ellipse">
-            <a:avLst/>
-          </a:prstGeom>
-          <a:solidFill>
-            <a:srgbClr val="2F6FEB"/>
-          </a:solidFill>
-          <a:ln>
-            <a:noFill/>
-          </a:ln>
-        </p:spPr>
-        <p:style>
-          <a:lnRef idx="1">
-            <a:schemeClr val="accent1"/>
-          </a:lnRef>
-          <a:fillRef idx="3">
-            <a:schemeClr val="accent1"/>
-          </a:fillRef>
-          <a:effectRef idx="2">
-            <a:schemeClr val="accent1"/>
-          </a:effectRef>
-          <a:fontRef idx="minor">
-            <a:schemeClr val="lt1"/>
-          </a:fontRef>
-        </p:style>
-        <p:txBody>
-          <a:bodyPr rtlCol="0" anchor="ctr"/>
-          <a:lstStyle/>
-          <a:p>
-            <a:pPr algn="ctr"/>
-          </a:p>
-        </p:txBody>
-      </p:sp>
-      <p:sp>
-        <p:nvSpPr>
-          <p:cNvPr id="14" name="TextBox 13"/>
-          <p:cNvSpPr txBox="1"/>
-          <p:nvPr/>
-        </p:nvSpPr>
-        <p:spPr>
-          <a:xfrm>
-            <a:off x="941832" y="4576572"/>
-            <a:ext cx="4636007" cy="548640"/>
-          </a:xfrm>
-          <a:prstGeom prst="rect">
-            <a:avLst/>
-          </a:prstGeom>
-          <a:noFill/>
-        </p:spPr>
-        <p:txBody>
-          <a:bodyPr wrap="square" lIns="0" rIns="0" tIns="0" bIns="0">
-            <a:spAutoFit/>
-          </a:bodyPr>
-          <a:lstStyle/>
-          <a:p>
-            <a:r>
-              <a:rPr sz="1350" b="1">
-                <a:solidFill>
-                  <a:srgbClr val="1B4AA8"/>
-                </a:solidFill>
-                <a:latin typeface="Microsoft YaHei"/>
-              </a:rPr>
-              <a:t>价值：</a:t>
-            </a:r>
-            <a:r>
-              <a:rPr sz="1350">
-                <a:solidFill>
-                  <a:srgbClr val="14213D"/>
-                </a:solidFill>
-                <a:latin typeface="Microsoft YaHei"/>
-              </a:rPr>
-              <a:t>把「隐含约束」讲出来，而不只是翻译语法</a:t>
-            </a:r>
-          </a:p>
-        </p:txBody>
-      </p:sp>
-      <p:pic>
-        <p:nvPicPr>
-          <p:cNvPr id="15" name="Picture 14" descr="03-dialog-explain.png"/>
-          <p:cNvPicPr>
-            <a:picLocks noChangeAspect="1"/>
-          </p:cNvPicPr>
-          <p:nvPr/>
-        </p:nvPicPr>
-        <p:blipFill>
-          <a:blip r:embed="rId2"/>
-          <a:stretch>
-            <a:fillRect/>
-          </a:stretch>
-        </p:blipFill>
-        <p:spPr>
-          <a:xfrm>
-            <a:off x="5806440" y="1600200"/>
-            <a:ext cx="5715000" cy="3093244"/>
-          </a:xfrm>
-          <a:prstGeom prst="rect">
-            <a:avLst/>
-          </a:prstGeom>
-        </p:spPr>
-      </p:pic>
-      <p:sp>
-        <p:nvSpPr>
-          <p:cNvPr id="16" name="TextBox 15"/>
-          <p:cNvSpPr txBox="1"/>
-          <p:nvPr/>
-        </p:nvSpPr>
-        <p:spPr>
-          <a:xfrm>
-            <a:off x="5806440" y="5248656"/>
-            <a:ext cx="5715000" cy="274320"/>
-          </a:xfrm>
-          <a:prstGeom prst="rect">
-            <a:avLst/>
-          </a:prstGeom>
-          <a:noFill/>
-        </p:spPr>
-        <p:txBody>
-          <a:bodyPr wrap="square" anchor="t" lIns="0" rIns="0" tIns="0" bIns="0">
-            <a:spAutoFit/>
-          </a:bodyPr>
-          <a:lstStyle/>
-          <a:p>
-            <a:pPr algn="l"/>
-            <a:r>
-              <a:rPr sz="1100" b="0">
-                <a:solidFill>
-                  <a:srgbClr val="6B7280"/>
-                </a:solidFill>
-                <a:latin typeface="Microsoft YaHei"/>
-              </a:rPr>
-              <a:t>Claude Code 面板内的逐行解释</a:t>
-            </a:r>
-          </a:p>
-        </p:txBody>
-      </p:sp>
-    </p:spTree>
-  </p:cSld>
-  <p:clrMapOvr>
-    <a:masterClrMapping/>
-  </p:clrMapOvr>
-</p:sld>
-</file>
-
-<file path=ppt/slides/slide7.xml><?xml version="1.0" encoding="utf-8"?>
-<p:sld xmlns:a="http://schemas.openxmlformats.org/drawingml/2006/main" xmlns:p="http://schemas.openxmlformats.org/presentationml/2006/main" xmlns:r="http://schemas.openxmlformats.org/officeDocument/2006/relationships">
-  <p:cSld>
-    <p:spTree>
-      <p:nvGrpSpPr>
-        <p:cNvPr id="1" name=""/>
-        <p:cNvGrpSpPr/>
-        <p:nvPr/>
-      </p:nvGrpSpPr>
-      <p:grpSpPr/>
-      <p:sp>
-        <p:nvSpPr>
-          <p:cNvPr id="2" name="Rectangle 1"/>
-          <p:cNvSpPr/>
-          <p:nvPr/>
-        </p:nvSpPr>
-        <p:spPr>
-          <a:xfrm>
-            <a:off x="0" y="0"/>
-            <a:ext cx="12191695" cy="91440"/>
-          </a:xfrm>
-          <a:prstGeom prst="rect">
-            <a:avLst/>
-          </a:prstGeom>
-          <a:solidFill>
-            <a:srgbClr val="2F6FEB"/>
-          </a:solidFill>
-          <a:ln>
-            <a:noFill/>
-          </a:ln>
-          <a:effectLst/>
-        </p:spPr>
-        <p:style>
-          <a:lnRef idx="1">
-            <a:schemeClr val="accent1"/>
-          </a:lnRef>
-          <a:fillRef idx="3">
-            <a:schemeClr val="accent1"/>
-          </a:fillRef>
-          <a:effectRef idx="2">
-            <a:schemeClr val="accent1"/>
-          </a:effectRef>
-          <a:fontRef idx="minor">
-            <a:schemeClr val="lt1"/>
-          </a:fontRef>
-        </p:style>
-        <p:txBody>
-          <a:bodyPr rtlCol="0" anchor="ctr"/>
-          <a:lstStyle/>
-          <a:p>
-            <a:pPr algn="ctr"/>
-          </a:p>
-        </p:txBody>
-      </p:sp>
-      <p:sp>
-        <p:nvSpPr>
-          <p:cNvPr id="3" name="TextBox 2"/>
-          <p:cNvSpPr txBox="1"/>
-          <p:nvPr/>
-        </p:nvSpPr>
-        <p:spPr>
-          <a:xfrm>
-            <a:off x="685800" y="384048"/>
-            <a:ext cx="10058400" cy="292608"/>
-          </a:xfrm>
-          <a:prstGeom prst="rect">
-            <a:avLst/>
-          </a:prstGeom>
-          <a:noFill/>
-        </p:spPr>
-        <p:txBody>
-          <a:bodyPr wrap="square" anchor="t" lIns="0" rIns="0" tIns="0" bIns="0">
-            <a:spAutoFit/>
-          </a:bodyPr>
-          <a:lstStyle/>
-          <a:p>
-            <a:pPr algn="l"/>
-            <a:r>
-              <a:rPr sz="1200" b="1">
-                <a:solidFill>
-                  <a:srgbClr val="2F6FEB"/>
-                </a:solidFill>
-                <a:latin typeface="Microsoft YaHei"/>
-              </a:rPr>
-              <a:t>功能验证 2/3 · 3/3</a:t>
-            </a:r>
-          </a:p>
-        </p:txBody>
-      </p:sp>
-      <p:sp>
-        <p:nvSpPr>
-          <p:cNvPr id="4" name="TextBox 3"/>
-          <p:cNvSpPr txBox="1"/>
-          <p:nvPr/>
-        </p:nvSpPr>
-        <p:spPr>
-          <a:xfrm>
-            <a:off x="685800" y="658368"/>
-            <a:ext cx="10789920" cy="566928"/>
-          </a:xfrm>
-          <a:prstGeom prst="rect">
-            <a:avLst/>
-          </a:prstGeom>
-          <a:noFill/>
-        </p:spPr>
-        <p:txBody>
-          <a:bodyPr wrap="square" anchor="t" lIns="0" rIns="0" tIns="0" bIns="0">
-            <a:spAutoFit/>
-          </a:bodyPr>
-          <a:lstStyle/>
-          <a:p>
-            <a:pPr algn="l"/>
-            <a:r>
-              <a:rPr sz="2900" b="1">
-                <a:solidFill>
-                  <a:srgbClr val="14213D"/>
-                </a:solidFill>
-                <a:latin typeface="Microsoft YaHei"/>
-              </a:rPr>
-              <a:t>验证二、三：测试生成 + Agent 闭环</a:t>
-            </a:r>
-          </a:p>
-        </p:txBody>
-      </p:sp>
-      <p:sp>
-        <p:nvSpPr>
-          <p:cNvPr id="5" name="Rectangle 4"/>
-          <p:cNvSpPr/>
-          <p:nvPr/>
-        </p:nvSpPr>
-        <p:spPr>
-          <a:xfrm>
-            <a:off x="685800" y="1298448"/>
-            <a:ext cx="822960" cy="50292"/>
-          </a:xfrm>
-          <a:prstGeom prst="rect">
-            <a:avLst/>
-          </a:prstGeom>
-          <a:solidFill>
-            <a:srgbClr val="2F6FEB"/>
-          </a:solidFill>
-          <a:ln>
-            <a:noFill/>
-          </a:ln>
-          <a:effectLst/>
-        </p:spPr>
-        <p:style>
-          <a:lnRef idx="1">
-            <a:schemeClr val="accent1"/>
-          </a:lnRef>
-          <a:fillRef idx="3">
-            <a:schemeClr val="accent1"/>
-          </a:fillRef>
-          <a:effectRef idx="2">
-            <a:schemeClr val="accent1"/>
-          </a:effectRef>
-          <a:fontRef idx="minor">
-            <a:schemeClr val="lt1"/>
-          </a:fontRef>
-        </p:style>
-        <p:txBody>
-          <a:bodyPr rtlCol="0" anchor="ctr"/>
-          <a:lstStyle/>
-          <a:p>
-            <a:pPr algn="ctr"/>
-          </a:p>
-        </p:txBody>
-      </p:sp>
-      <p:sp>
-        <p:nvSpPr>
-          <p:cNvPr id="6" name="TextBox 5"/>
-          <p:cNvSpPr txBox="1"/>
-          <p:nvPr/>
-        </p:nvSpPr>
-        <p:spPr>
-          <a:xfrm>
-            <a:off x="11155680" y="6355080"/>
-            <a:ext cx="457200" cy="274320"/>
-          </a:xfrm>
-          <a:prstGeom prst="rect">
-            <a:avLst/>
-          </a:prstGeom>
-          <a:noFill/>
-        </p:spPr>
-        <p:txBody>
-          <a:bodyPr wrap="square" anchor="t" lIns="0" rIns="0" tIns="0" bIns="0">
-            <a:spAutoFit/>
-          </a:bodyPr>
-          <a:lstStyle/>
-          <a:p>
-            <a:pPr algn="r"/>
-            <a:r>
-              <a:rPr sz="1100" b="0">
-                <a:solidFill>
-                  <a:srgbClr val="6B7280"/>
-                </a:solidFill>
-                <a:latin typeface="Microsoft YaHei"/>
-              </a:rPr>
-              <a:t>7</a:t>
-            </a:r>
-          </a:p>
-        </p:txBody>
-      </p:sp>
-      <p:pic>
-        <p:nvPicPr>
-          <p:cNvPr id="7" name="Picture 6" descr="04-completion-test.png"/>
-          <p:cNvPicPr>
-            <a:picLocks noChangeAspect="1"/>
-          </p:cNvPicPr>
-          <p:nvPr/>
-        </p:nvPicPr>
-        <p:blipFill>
-          <a:blip r:embed="rId2"/>
-          <a:stretch>
-            <a:fillRect/>
-          </a:stretch>
-        </p:blipFill>
-        <p:spPr>
-          <a:xfrm>
-            <a:off x="685800" y="1554480"/>
-            <a:ext cx="3520440" cy="1905438"/>
-          </a:xfrm>
-          <a:prstGeom prst="rect">
-            <a:avLst/>
-          </a:prstGeom>
-        </p:spPr>
-      </p:pic>
-      <p:sp>
-        <p:nvSpPr>
-          <p:cNvPr id="8" name="TextBox 7"/>
-          <p:cNvSpPr txBox="1"/>
-          <p:nvPr/>
-        </p:nvSpPr>
-        <p:spPr>
-          <a:xfrm>
-            <a:off x="685800" y="3831336"/>
-            <a:ext cx="3520440" cy="274320"/>
-          </a:xfrm>
-          <a:prstGeom prst="rect">
-            <a:avLst/>
-          </a:prstGeom>
-          <a:noFill/>
-        </p:spPr>
-        <p:txBody>
-          <a:bodyPr wrap="square" anchor="t" lIns="0" rIns="0" tIns="0" bIns="0">
-            <a:spAutoFit/>
-          </a:bodyPr>
-          <a:lstStyle/>
-          <a:p>
-            <a:pPr algn="l"/>
-            <a:r>
-              <a:rPr sz="1100" b="0">
-                <a:solidFill>
-                  <a:srgbClr val="6B7280"/>
-                </a:solidFill>
-                <a:latin typeface="Microsoft YaHei"/>
-              </a:rPr>
-              <a:t>① 生成 test_kmeans.py，diff 审查后「应用」</a:t>
-            </a:r>
-          </a:p>
-        </p:txBody>
-      </p:sp>
-      <p:pic>
-        <p:nvPicPr>
-          <p:cNvPr id="9" name="Picture 8" descr="05-agent-task.png"/>
-          <p:cNvPicPr>
-            <a:picLocks noChangeAspect="1"/>
-          </p:cNvPicPr>
-          <p:nvPr/>
-        </p:nvPicPr>
-        <p:blipFill>
-          <a:blip r:embed="rId3"/>
-          <a:stretch>
-            <a:fillRect/>
-          </a:stretch>
-        </p:blipFill>
-        <p:spPr>
-          <a:xfrm>
-            <a:off x="4480560" y="1554480"/>
-            <a:ext cx="3520440" cy="1905438"/>
-          </a:xfrm>
-          <a:prstGeom prst="rect">
-            <a:avLst/>
-          </a:prstGeom>
-        </p:spPr>
-      </p:pic>
-      <p:sp>
-        <p:nvSpPr>
-          <p:cNvPr id="10" name="TextBox 9"/>
-          <p:cNvSpPr txBox="1"/>
-          <p:nvPr/>
-        </p:nvSpPr>
-        <p:spPr>
-          <a:xfrm>
-            <a:off x="4480560" y="3831336"/>
-            <a:ext cx="3520440" cy="274320"/>
-          </a:xfrm>
-          <a:prstGeom prst="rect">
-            <a:avLst/>
-          </a:prstGeom>
-          <a:noFill/>
-        </p:spPr>
-        <p:txBody>
-          <a:bodyPr wrap="square" anchor="t" lIns="0" rIns="0" tIns="0" bIns="0">
-            <a:spAutoFit/>
-          </a:bodyPr>
-          <a:lstStyle/>
-          <a:p>
-            <a:pPr algn="l"/>
-            <a:r>
-              <a:rPr sz="1100" b="0">
-                <a:solidFill>
-                  <a:srgbClr val="6B7280"/>
-                </a:solidFill>
-                <a:latin typeface="Microsoft YaHei"/>
-              </a:rPr>
-              <a:t>② 首跑失败 → 判定断言 0.99 不可达 → 改 0.95</a:t>
-            </a:r>
-          </a:p>
-        </p:txBody>
-      </p:sp>
-      <p:pic>
-        <p:nvPicPr>
-          <p:cNvPr id="11" name="Picture 10" descr="06-agent-summary.png"/>
-          <p:cNvPicPr>
-            <a:picLocks noChangeAspect="1"/>
-          </p:cNvPicPr>
-          <p:nvPr/>
-        </p:nvPicPr>
-        <p:blipFill>
-          <a:blip r:embed="rId4"/>
-          <a:stretch>
-            <a:fillRect/>
-          </a:stretch>
-        </p:blipFill>
-        <p:spPr>
-          <a:xfrm>
-            <a:off x="8275320" y="1554480"/>
-            <a:ext cx="3520440" cy="1905438"/>
-          </a:xfrm>
-          <a:prstGeom prst="rect">
-            <a:avLst/>
-          </a:prstGeom>
-        </p:spPr>
-      </p:pic>
-      <p:sp>
-        <p:nvSpPr>
-          <p:cNvPr id="12" name="TextBox 11"/>
-          <p:cNvSpPr txBox="1"/>
-          <p:nvPr/>
-        </p:nvSpPr>
-        <p:spPr>
-          <a:xfrm>
-            <a:off x="8275320" y="3831336"/>
-            <a:ext cx="3520440" cy="274320"/>
-          </a:xfrm>
-          <a:prstGeom prst="rect">
-            <a:avLst/>
-          </a:prstGeom>
-          <a:noFill/>
-        </p:spPr>
-        <p:txBody>
-          <a:bodyPr wrap="square" anchor="t" lIns="0" rIns="0" tIns="0" bIns="0">
-            <a:spAutoFit/>
-          </a:bodyPr>
-          <a:lstStyle/>
-          <a:p>
-            <a:pPr algn="l"/>
-            <a:r>
-              <a:rPr sz="1100" b="0">
-                <a:solidFill>
-                  <a:srgbClr val="6B7280"/>
-                </a:solidFill>
-                <a:latin typeface="Microsoft YaHei"/>
-              </a:rPr>
-              <a:t>③ 收尾：8 用例全过，耗时 7:47 / 输入 527.5k</a:t>
-            </a:r>
-          </a:p>
-        </p:txBody>
-      </p:sp>
-      <p:sp>
-        <p:nvSpPr>
-          <p:cNvPr id="13" name="TextBox 12"/>
-          <p:cNvSpPr txBox="1"/>
-          <p:nvPr/>
-        </p:nvSpPr>
-        <p:spPr>
-          <a:xfrm>
-            <a:off x="685800" y="4160520"/>
-            <a:ext cx="10972800" cy="914400"/>
-          </a:xfrm>
-          <a:prstGeom prst="rect">
-            <a:avLst/>
-          </a:prstGeom>
-          <a:noFill/>
-        </p:spPr>
-        <p:txBody>
-          <a:bodyPr wrap="square" anchor="t" lIns="0" rIns="0" tIns="0" bIns="0">
-            <a:spAutoFit/>
-          </a:bodyPr>
-          <a:lstStyle/>
-          <a:p>
-            <a:pPr algn="l">
-              <a:lnSpc>
-                <a:spcPct val="145000"/>
-              </a:lnSpc>
-            </a:pPr>
-            <a:r>
-              <a:rPr sz="1300" b="0">
-                <a:solidFill>
-                  <a:srgbClr val="14213D"/>
-                </a:solidFill>
-                <a:latin typeface="Microsoft YaHei"/>
-              </a:rPr>
-              <a:t>补全只需要 0.5 秒给我一行代码；这套流程用了 7 分 47 秒 —— 它自己建文件、装 pytest、跑测试、</a:t>
-            </a:r>
-          </a:p>
-          <a:p>
-            <a:pPr algn="l">
-              <a:lnSpc>
-                <a:spcPct val="145000"/>
-              </a:lnSpc>
-            </a:pPr>
-            <a:r>
-              <a:rPr sz="1300" b="0">
-                <a:solidFill>
-                  <a:srgbClr val="14213D"/>
-                </a:solidFill>
-                <a:latin typeface="Microsoft YaHei"/>
-              </a:rPr>
-              <a:t>看懂失败原因、把断言改成可达的值。时间花在「执行」上，而不是「敲字」上。</a:t>
-            </a:r>
-          </a:p>
-        </p:txBody>
-      </p:sp>
-      <p:sp>
-        <p:nvSpPr>
-          <p:cNvPr id="14" name="TextBox 13"/>
-          <p:cNvSpPr txBox="1"/>
-          <p:nvPr/>
-        </p:nvSpPr>
-        <p:spPr>
-          <a:xfrm>
-            <a:off x="685800" y="5440680"/>
-            <a:ext cx="10972800" cy="548640"/>
-          </a:xfrm>
-          <a:prstGeom prst="rect">
-            <a:avLst/>
-          </a:prstGeom>
-          <a:noFill/>
-        </p:spPr>
-        <p:txBody>
-          <a:bodyPr wrap="square" anchor="t" lIns="0" rIns="0" tIns="0" bIns="0">
-            <a:spAutoFit/>
-          </a:bodyPr>
-          <a:lstStyle/>
-          <a:p>
-            <a:pPr algn="l"/>
-            <a:r>
-              <a:rPr sz="1150" b="0">
-                <a:solidFill>
-                  <a:srgbClr val="6B7280"/>
-                </a:solidFill>
-                <a:latin typeface="Microsoft YaHei"/>
-              </a:rPr>
-              <a:t>三张图是同一个任务的连续三段：下发 → 落盘（人工审查 diff）→ 收敛。全程没有复制过一次报错。</a:t>
-            </a:r>
-          </a:p>
-        </p:txBody>
-      </p:sp>
-    </p:spTree>
-  </p:cSld>
-  <p:clrMapOvr>
-    <a:masterClrMapping/>
-  </p:clrMapOvr>
-</p:sld>
-</file>
-
-<file path=ppt/slides/slide8.xml><?xml version="1.0" encoding="utf-8"?>
-<p:sld xmlns:a="http://schemas.openxmlformats.org/drawingml/2006/main" xmlns:p="http://schemas.openxmlformats.org/presentationml/2006/main" xmlns:r="http://schemas.openxmlformats.org/officeDocument/2006/relationships">
-  <p:cSld>
-    <p:spTree>
-      <p:nvGrpSpPr>
-        <p:cNvPr id="1" name=""/>
-        <p:cNvGrpSpPr/>
-        <p:nvPr/>
-      </p:nvGrpSpPr>
-      <p:grpSpPr/>
-      <p:sp>
-        <p:nvSpPr>
-          <p:cNvPr id="2" name="Rectangle 1"/>
-          <p:cNvSpPr/>
-          <p:nvPr/>
-        </p:nvSpPr>
-        <p:spPr>
-          <a:xfrm>
-            <a:off x="0" y="0"/>
-            <a:ext cx="12191695" cy="91440"/>
-          </a:xfrm>
-          <a:prstGeom prst="rect">
-            <a:avLst/>
-          </a:prstGeom>
-          <a:solidFill>
-            <a:srgbClr val="2F6FEB"/>
-          </a:solidFill>
-          <a:ln>
-            <a:noFill/>
-          </a:ln>
-          <a:effectLst/>
-        </p:spPr>
-        <p:style>
-          <a:lnRef idx="1">
-            <a:schemeClr val="accent1"/>
-          </a:lnRef>
-          <a:fillRef idx="3">
-            <a:schemeClr val="accent1"/>
-          </a:fillRef>
-          <a:effectRef idx="2">
-            <a:schemeClr val="accent1"/>
-          </a:effectRef>
-          <a:fontRef idx="minor">
-            <a:schemeClr val="lt1"/>
-          </a:fontRef>
-        </p:style>
-        <p:txBody>
-          <a:bodyPr rtlCol="0" anchor="ctr"/>
-          <a:lstStyle/>
-          <a:p>
-            <a:pPr algn="ctr"/>
-          </a:p>
-        </p:txBody>
-      </p:sp>
-      <p:sp>
-        <p:nvSpPr>
-          <p:cNvPr id="3" name="TextBox 2"/>
-          <p:cNvSpPr txBox="1"/>
-          <p:nvPr/>
-        </p:nvSpPr>
-        <p:spPr>
-          <a:xfrm>
-            <a:off x="685800" y="384048"/>
-            <a:ext cx="10058400" cy="292608"/>
-          </a:xfrm>
-          <a:prstGeom prst="rect">
-            <a:avLst/>
-          </a:prstGeom>
-          <a:noFill/>
-        </p:spPr>
-        <p:txBody>
-          <a:bodyPr wrap="square" anchor="t" lIns="0" rIns="0" tIns="0" bIns="0">
-            <a:spAutoFit/>
-          </a:bodyPr>
-          <a:lstStyle/>
-          <a:p>
-            <a:pPr algn="l"/>
-            <a:r>
-              <a:rPr sz="1200" b="1">
-                <a:solidFill>
-                  <a:srgbClr val="2F6FEB"/>
-                </a:solidFill>
-                <a:latin typeface="Microsoft YaHei"/>
-              </a:rPr>
-              <a:t>方案一 vs 方案二</a:t>
-            </a:r>
-          </a:p>
-        </p:txBody>
-      </p:sp>
-      <p:sp>
-        <p:nvSpPr>
-          <p:cNvPr id="4" name="TextBox 3"/>
-          <p:cNvSpPr txBox="1"/>
-          <p:nvPr/>
-        </p:nvSpPr>
-        <p:spPr>
-          <a:xfrm>
-            <a:off x="685800" y="658368"/>
-            <a:ext cx="10789920" cy="566928"/>
-          </a:xfrm>
-          <a:prstGeom prst="rect">
-            <a:avLst/>
-          </a:prstGeom>
-          <a:noFill/>
-        </p:spPr>
-        <p:txBody>
-          <a:bodyPr wrap="square" anchor="t" lIns="0" rIns="0" tIns="0" bIns="0">
-            <a:spAutoFit/>
-          </a:bodyPr>
-          <a:lstStyle/>
-          <a:p>
-            <a:pPr algn="l"/>
-            <a:r>
-              <a:rPr sz="2900" b="1">
-                <a:solidFill>
-                  <a:srgbClr val="14213D"/>
-                </a:solidFill>
-                <a:latin typeface="Microsoft YaHei"/>
-              </a:rPr>
-              <a:t>对比：建议层 vs 执行层</a:t>
-            </a:r>
-          </a:p>
-        </p:txBody>
-      </p:sp>
-      <p:sp>
-        <p:nvSpPr>
-          <p:cNvPr id="5" name="Rectangle 4"/>
-          <p:cNvSpPr/>
-          <p:nvPr/>
-        </p:nvSpPr>
-        <p:spPr>
-          <a:xfrm>
-            <a:off x="685800" y="1298448"/>
-            <a:ext cx="822960" cy="50292"/>
-          </a:xfrm>
-          <a:prstGeom prst="rect">
-            <a:avLst/>
-          </a:prstGeom>
-          <a:solidFill>
-            <a:srgbClr val="2F6FEB"/>
-          </a:solidFill>
-          <a:ln>
-            <a:noFill/>
-          </a:ln>
-          <a:effectLst/>
-        </p:spPr>
-        <p:style>
-          <a:lnRef idx="1">
-            <a:schemeClr val="accent1"/>
-          </a:lnRef>
-          <a:fillRef idx="3">
-            <a:schemeClr val="accent1"/>
-          </a:fillRef>
-          <a:effectRef idx="2">
-            <a:schemeClr val="accent1"/>
-          </a:effectRef>
-          <a:fontRef idx="minor">
-            <a:schemeClr val="lt1"/>
-          </a:fontRef>
-        </p:style>
-        <p:txBody>
-          <a:bodyPr rtlCol="0" anchor="ctr"/>
-          <a:lstStyle/>
-          <a:p>
-            <a:pPr algn="ctr"/>
-          </a:p>
-        </p:txBody>
-      </p:sp>
-      <p:sp>
-        <p:nvSpPr>
-          <p:cNvPr id="6" name="TextBox 5"/>
-          <p:cNvSpPr txBox="1"/>
-          <p:nvPr/>
-        </p:nvSpPr>
-        <p:spPr>
-          <a:xfrm>
-            <a:off x="11155680" y="6355080"/>
-            <a:ext cx="457200" cy="274320"/>
-          </a:xfrm>
-          <a:prstGeom prst="rect">
-            <a:avLst/>
-          </a:prstGeom>
-          <a:noFill/>
-        </p:spPr>
-        <p:txBody>
-          <a:bodyPr wrap="square" anchor="t" lIns="0" rIns="0" tIns="0" bIns="0">
-            <a:spAutoFit/>
-          </a:bodyPr>
-          <a:lstStyle/>
-          <a:p>
-            <a:pPr algn="r"/>
-            <a:r>
-              <a:rPr sz="1100" b="0">
-                <a:solidFill>
-                  <a:srgbClr val="6B7280"/>
-                </a:solidFill>
-                <a:latin typeface="Microsoft YaHei"/>
+                <a:latin typeface="微软雅黑" panose="020B0503020204020204" charset="-122"/>
               </a:rPr>
               <a:t>8</a:t>
             </a:r>
+            <a:endParaRPr sz="1100" b="0">
+              <a:solidFill>
+                <a:srgbClr val="6B7280"/>
+              </a:solidFill>
+              <a:latin typeface="微软雅黑" panose="020B0503020204020204" charset="-122"/>
+            </a:endParaRPr>
           </a:p>
         </p:txBody>
       </p:sp>
@@ -8977,13 +8159,19 @@
                           <a:solidFill>
                             <a:srgbClr val="FFFFFF"/>
                           </a:solidFill>
-                          <a:latin typeface="Microsoft YaHei"/>
+                          <a:latin typeface="微软雅黑" panose="020B0503020204020204" charset="-122"/>
                         </a:rPr>
                         <a:t>维度</a:t>
                       </a:r>
+                      <a:endParaRPr sz="1250" b="1">
+                        <a:solidFill>
+                          <a:srgbClr val="FFFFFF"/>
+                        </a:solidFill>
+                        <a:latin typeface="微软雅黑" panose="020B0503020204020204" charset="-122"/>
+                      </a:endParaRPr>
                     </a:p>
                   </a:txBody>
-                  <a:tcPr marL="91440" marR="73152" marT="36576" marB="36576" anchor="ctr">
+                  <a:tcPr marR="73152" marT="36576" marB="36576" anchor="ctr">
                     <a:solidFill>
                       <a:srgbClr val="1B4AA8"/>
                     </a:solidFill>
@@ -8999,13 +8187,19 @@
                           <a:solidFill>
                             <a:srgbClr val="FFFFFF"/>
                           </a:solidFill>
-                          <a:latin typeface="Microsoft YaHei"/>
+                          <a:latin typeface="微软雅黑" panose="020B0503020204020204" charset="-122"/>
                         </a:rPr>
                         <a:t>方案一（纯 IDE 插件）</a:t>
                       </a:r>
+                      <a:endParaRPr sz="1250" b="1">
+                        <a:solidFill>
+                          <a:srgbClr val="FFFFFF"/>
+                        </a:solidFill>
+                        <a:latin typeface="微软雅黑" panose="020B0503020204020204" charset="-122"/>
+                      </a:endParaRPr>
                     </a:p>
                   </a:txBody>
-                  <a:tcPr marL="91440" marR="73152" marT="36576" marB="36576" anchor="ctr">
+                  <a:tcPr marR="73152" marT="36576" marB="36576" anchor="ctr">
                     <a:solidFill>
                       <a:srgbClr val="1B4AA8"/>
                     </a:solidFill>
@@ -9021,13 +8215,19 @@
                           <a:solidFill>
                             <a:srgbClr val="FFFFFF"/>
                           </a:solidFill>
-                          <a:latin typeface="Microsoft YaHei"/>
+                          <a:latin typeface="微软雅黑" panose="020B0503020204020204" charset="-122"/>
                         </a:rPr>
                         <a:t>方案二（Agent + 插件）</a:t>
                       </a:r>
+                      <a:endParaRPr sz="1250" b="1">
+                        <a:solidFill>
+                          <a:srgbClr val="FFFFFF"/>
+                        </a:solidFill>
+                        <a:latin typeface="微软雅黑" panose="020B0503020204020204" charset="-122"/>
+                      </a:endParaRPr>
                     </a:p>
                   </a:txBody>
-                  <a:tcPr marL="91440" marR="73152" marT="36576" marB="36576" anchor="ctr">
+                  <a:tcPr marR="73152" marT="36576" marB="36576" anchor="ctr">
                     <a:solidFill>
                       <a:srgbClr val="1B4AA8"/>
                     </a:solidFill>
@@ -9045,13 +8245,19 @@
                           <a:solidFill>
                             <a:srgbClr val="14213D"/>
                           </a:solidFill>
-                          <a:latin typeface="Microsoft YaHei"/>
+                          <a:latin typeface="微软雅黑" panose="020B0503020204020204" charset="-122"/>
                         </a:rPr>
                         <a:t>执行主体</a:t>
                       </a:r>
+                      <a:endParaRPr sz="1250">
+                        <a:solidFill>
+                          <a:srgbClr val="14213D"/>
+                        </a:solidFill>
+                        <a:latin typeface="微软雅黑" panose="020B0503020204020204" charset="-122"/>
+                      </a:endParaRPr>
                     </a:p>
                   </a:txBody>
-                  <a:tcPr marL="91440" marR="73152" marT="36576" marB="36576" anchor="ctr">
+                  <a:tcPr marR="73152" marT="36576" marB="36576" anchor="ctr">
                     <a:solidFill>
                       <a:srgbClr val="FFFFFF"/>
                     </a:solidFill>
@@ -9067,13 +8273,19 @@
                           <a:solidFill>
                             <a:srgbClr val="14213D"/>
                           </a:solidFill>
-                          <a:latin typeface="Microsoft YaHei"/>
+                          <a:latin typeface="微软雅黑" panose="020B0503020204020204" charset="-122"/>
                         </a:rPr>
                         <a:t>IDE 进程内的客户端，无执行权</a:t>
                       </a:r>
+                      <a:endParaRPr sz="1250">
+                        <a:solidFill>
+                          <a:srgbClr val="14213D"/>
+                        </a:solidFill>
+                        <a:latin typeface="微软雅黑" panose="020B0503020204020204" charset="-122"/>
+                      </a:endParaRPr>
                     </a:p>
                   </a:txBody>
-                  <a:tcPr marL="91440" marR="73152" marT="36576" marB="36576" anchor="ctr">
+                  <a:tcPr marR="73152" marT="36576" marB="36576" anchor="ctr">
                     <a:solidFill>
                       <a:srgbClr val="FFFFFF"/>
                     </a:solidFill>
@@ -9089,13 +8301,19 @@
                           <a:solidFill>
                             <a:srgbClr val="14213D"/>
                           </a:solidFill>
-                          <a:latin typeface="Microsoft YaHei"/>
+                          <a:latin typeface="微软雅黑" panose="020B0503020204020204" charset="-122"/>
                         </a:rPr>
                         <a:t>IDE 外的独立进程，有文件与命令执行权</a:t>
                       </a:r>
+                      <a:endParaRPr sz="1250">
+                        <a:solidFill>
+                          <a:srgbClr val="14213D"/>
+                        </a:solidFill>
+                        <a:latin typeface="微软雅黑" panose="020B0503020204020204" charset="-122"/>
+                      </a:endParaRPr>
                     </a:p>
                   </a:txBody>
-                  <a:tcPr marL="91440" marR="73152" marT="36576" marB="36576" anchor="ctr">
+                  <a:tcPr marR="73152" marT="36576" marB="36576" anchor="ctr">
                     <a:solidFill>
                       <a:srgbClr val="FFFFFF"/>
                     </a:solidFill>
@@ -9113,13 +8331,19 @@
                           <a:solidFill>
                             <a:srgbClr val="14213D"/>
                           </a:solidFill>
-                          <a:latin typeface="Microsoft YaHei"/>
+                          <a:latin typeface="微软雅黑" panose="020B0503020204020204" charset="-122"/>
                         </a:rPr>
                         <a:t>响应节奏</a:t>
                       </a:r>
+                      <a:endParaRPr sz="1250">
+                        <a:solidFill>
+                          <a:srgbClr val="14213D"/>
+                        </a:solidFill>
+                        <a:latin typeface="微软雅黑" panose="020B0503020204020204" charset="-122"/>
+                      </a:endParaRPr>
                     </a:p>
                   </a:txBody>
-                  <a:tcPr marL="91440" marR="73152" marT="36576" marB="36576" anchor="ctr">
+                  <a:tcPr marR="73152" marT="36576" marB="36576" anchor="ctr">
                     <a:solidFill>
                       <a:srgbClr val="EEF3FC"/>
                     </a:solidFill>
@@ -9135,13 +8359,19 @@
                           <a:solidFill>
                             <a:srgbClr val="14213D"/>
                           </a:solidFill>
-                          <a:latin typeface="Microsoft YaHei"/>
+                          <a:latin typeface="微软雅黑" panose="020B0503020204020204" charset="-122"/>
                         </a:rPr>
                         <a:t>0.5–1.5 秒内出补全（Comate 配置）</a:t>
                       </a:r>
+                      <a:endParaRPr sz="1250">
+                        <a:solidFill>
+                          <a:srgbClr val="14213D"/>
+                        </a:solidFill>
+                        <a:latin typeface="微软雅黑" panose="020B0503020204020204" charset="-122"/>
+                      </a:endParaRPr>
                     </a:p>
                   </a:txBody>
-                  <a:tcPr marL="91440" marR="73152" marT="36576" marB="36576" anchor="ctr">
+                  <a:tcPr marR="73152" marT="36576" marB="36576" anchor="ctr">
                     <a:solidFill>
                       <a:srgbClr val="EEF3FC"/>
                     </a:solidFill>
@@ -9157,13 +8387,19 @@
                           <a:solidFill>
                             <a:srgbClr val="14213D"/>
                           </a:solidFill>
-                          <a:latin typeface="Microsoft YaHei"/>
+                          <a:latin typeface="微软雅黑" panose="020B0503020204020204" charset="-122"/>
                         </a:rPr>
                         <a:t>单轮 API 约 80 秒，任务总时长可达数分钟</a:t>
                       </a:r>
+                      <a:endParaRPr sz="1250">
+                        <a:solidFill>
+                          <a:srgbClr val="14213D"/>
+                        </a:solidFill>
+                        <a:latin typeface="微软雅黑" panose="020B0503020204020204" charset="-122"/>
+                      </a:endParaRPr>
                     </a:p>
                   </a:txBody>
-                  <a:tcPr marL="91440" marR="73152" marT="36576" marB="36576" anchor="ctr">
+                  <a:tcPr marR="73152" marT="36576" marB="36576" anchor="ctr">
                     <a:solidFill>
                       <a:srgbClr val="EEF3FC"/>
                     </a:solidFill>
@@ -9181,13 +8417,19 @@
                           <a:solidFill>
                             <a:srgbClr val="14213D"/>
                           </a:solidFill>
-                          <a:latin typeface="Microsoft YaHei"/>
+                          <a:latin typeface="微软雅黑" panose="020B0503020204020204" charset="-122"/>
                         </a:rPr>
                         <a:t>上下文范围</a:t>
                       </a:r>
+                      <a:endParaRPr sz="1250">
+                        <a:solidFill>
+                          <a:srgbClr val="14213D"/>
+                        </a:solidFill>
+                        <a:latin typeface="微软雅黑" panose="020B0503020204020204" charset="-122"/>
+                      </a:endParaRPr>
                     </a:p>
                   </a:txBody>
-                  <a:tcPr marL="91440" marR="73152" marT="36576" marB="36576" anchor="ctr">
+                  <a:tcPr marR="73152" marT="36576" marB="36576" anchor="ctr">
                     <a:solidFill>
                       <a:srgbClr val="FFFFFF"/>
                     </a:solidFill>
@@ -9203,13 +8445,19 @@
                           <a:solidFill>
                             <a:srgbClr val="14213D"/>
                           </a:solidFill>
-                          <a:latin typeface="Microsoft YaHei"/>
+                          <a:latin typeface="微软雅黑" panose="020B0503020204020204" charset="-122"/>
                         </a:rPr>
                         <a:t>当前文件 + 约 30 行相邻上下文</a:t>
                       </a:r>
+                      <a:endParaRPr sz="1250">
+                        <a:solidFill>
+                          <a:srgbClr val="14213D"/>
+                        </a:solidFill>
+                        <a:latin typeface="微软雅黑" panose="020B0503020204020204" charset="-122"/>
+                      </a:endParaRPr>
                     </a:p>
                   </a:txBody>
-                  <a:tcPr marL="91440" marR="73152" marT="36576" marB="36576" anchor="ctr">
+                  <a:tcPr marR="73152" marT="36576" marB="36576" anchor="ctr">
                     <a:solidFill>
                       <a:srgbClr val="FFFFFF"/>
                     </a:solidFill>
@@ -9225,13 +8473,19 @@
                           <a:solidFill>
                             <a:srgbClr val="14213D"/>
                           </a:solidFill>
-                          <a:latin typeface="Microsoft YaHei"/>
+                          <a:latin typeface="微软雅黑" panose="020B0503020204020204" charset="-122"/>
                         </a:rPr>
                         <a:t>整个工程，可自行 Read / Grep 任意文件</a:t>
                       </a:r>
+                      <a:endParaRPr sz="1250">
+                        <a:solidFill>
+                          <a:srgbClr val="14213D"/>
+                        </a:solidFill>
+                        <a:latin typeface="微软雅黑" panose="020B0503020204020204" charset="-122"/>
+                      </a:endParaRPr>
                     </a:p>
                   </a:txBody>
-                  <a:tcPr marL="91440" marR="73152" marT="36576" marB="36576" anchor="ctr">
+                  <a:tcPr marR="73152" marT="36576" marB="36576" anchor="ctr">
                     <a:solidFill>
                       <a:srgbClr val="FFFFFF"/>
                     </a:solidFill>
@@ -9249,13 +8503,19 @@
                           <a:solidFill>
                             <a:srgbClr val="14213D"/>
                           </a:solidFill>
-                          <a:latin typeface="Microsoft YaHei"/>
+                          <a:latin typeface="微软雅黑" panose="020B0503020204020204" charset="-122"/>
                         </a:rPr>
                         <a:t>典型输入</a:t>
                       </a:r>
+                      <a:endParaRPr sz="1250">
+                        <a:solidFill>
+                          <a:srgbClr val="14213D"/>
+                        </a:solidFill>
+                        <a:latin typeface="微软雅黑" panose="020B0503020204020204" charset="-122"/>
+                      </a:endParaRPr>
                     </a:p>
                   </a:txBody>
-                  <a:tcPr marL="91440" marR="73152" marT="36576" marB="36576" anchor="ctr">
+                  <a:tcPr marR="73152" marT="36576" marB="36576" anchor="ctr">
                     <a:solidFill>
                       <a:srgbClr val="EEF3FC"/>
                     </a:solidFill>
@@ -9271,13 +8531,19 @@
                           <a:solidFill>
                             <a:srgbClr val="14213D"/>
                           </a:solidFill>
-                          <a:latin typeface="Microsoft YaHei"/>
+                          <a:latin typeface="微软雅黑" panose="020B0503020204020204" charset="-122"/>
                         </a:rPr>
                         <a:t>「补全这个函数」「解释这段」</a:t>
                       </a:r>
+                      <a:endParaRPr sz="1250">
+                        <a:solidFill>
+                          <a:srgbClr val="14213D"/>
+                        </a:solidFill>
+                        <a:latin typeface="微软雅黑" panose="020B0503020204020204" charset="-122"/>
+                      </a:endParaRPr>
                     </a:p>
                   </a:txBody>
-                  <a:tcPr marL="91440" marR="73152" marT="36576" marB="36576" anchor="ctr">
+                  <a:tcPr marR="73152" marT="36576" marB="36576" anchor="ctr">
                     <a:solidFill>
                       <a:srgbClr val="EEF3FC"/>
                     </a:solidFill>
@@ -9293,13 +8559,19 @@
                           <a:solidFill>
                             <a:srgbClr val="14213D"/>
                           </a:solidFill>
-                          <a:latin typeface="Microsoft YaHei"/>
+                          <a:latin typeface="微软雅黑" panose="020B0503020204020204" charset="-122"/>
                         </a:rPr>
                         <a:t>「跑通 test.py，报错就修好」</a:t>
                       </a:r>
+                      <a:endParaRPr sz="1250">
+                        <a:solidFill>
+                          <a:srgbClr val="14213D"/>
+                        </a:solidFill>
+                        <a:latin typeface="微软雅黑" panose="020B0503020204020204" charset="-122"/>
+                      </a:endParaRPr>
                     </a:p>
                   </a:txBody>
-                  <a:tcPr marL="91440" marR="73152" marT="36576" marB="36576" anchor="ctr">
+                  <a:tcPr marR="73152" marT="36576" marB="36576" anchor="ctr">
                     <a:solidFill>
                       <a:srgbClr val="EEF3FC"/>
                     </a:solidFill>
@@ -9317,13 +8589,19 @@
                           <a:solidFill>
                             <a:srgbClr val="14213D"/>
                           </a:solidFill>
-                          <a:latin typeface="Microsoft YaHei"/>
+                          <a:latin typeface="微软雅黑" panose="020B0503020204020204" charset="-122"/>
                         </a:rPr>
                         <a:t>主要成本</a:t>
                       </a:r>
+                      <a:endParaRPr sz="1250">
+                        <a:solidFill>
+                          <a:srgbClr val="14213D"/>
+                        </a:solidFill>
+                        <a:latin typeface="微软雅黑" panose="020B0503020204020204" charset="-122"/>
+                      </a:endParaRPr>
                     </a:p>
                   </a:txBody>
-                  <a:tcPr marL="91440" marR="73152" marT="36576" marB="36576" anchor="ctr">
+                  <a:tcPr marR="73152" marT="36576" marB="36576" anchor="ctr">
                     <a:solidFill>
                       <a:srgbClr val="FFFFFF"/>
                     </a:solidFill>
@@ -9339,13 +8617,19 @@
                           <a:solidFill>
                             <a:srgbClr val="14213D"/>
                           </a:solidFill>
-                          <a:latin typeface="Microsoft YaHei"/>
+                          <a:latin typeface="微软雅黑" panose="020B0503020204020204" charset="-122"/>
                         </a:rPr>
                         <a:t>订阅费固定，风险约等于零</a:t>
                       </a:r>
+                      <a:endParaRPr sz="1250">
+                        <a:solidFill>
+                          <a:srgbClr val="14213D"/>
+                        </a:solidFill>
+                        <a:latin typeface="微软雅黑" panose="020B0503020204020204" charset="-122"/>
+                      </a:endParaRPr>
                     </a:p>
                   </a:txBody>
-                  <a:tcPr marL="91440" marR="73152" marT="36576" marB="36576" anchor="ctr">
+                  <a:tcPr marR="73152" marT="36576" marB="36576" anchor="ctr">
                     <a:solidFill>
                       <a:srgbClr val="FFFFFF"/>
                     </a:solidFill>
@@ -9361,13 +8645,19 @@
                           <a:solidFill>
                             <a:srgbClr val="14213D"/>
                           </a:solidFill>
-                          <a:latin typeface="Microsoft YaHei"/>
+                          <a:latin typeface="微软雅黑" panose="020B0503020204020204" charset="-122"/>
                         </a:rPr>
                         <a:t>按 token 计费（单轮约 3 万 input），改错有代价</a:t>
                       </a:r>
+                      <a:endParaRPr sz="1250">
+                        <a:solidFill>
+                          <a:srgbClr val="14213D"/>
+                        </a:solidFill>
+                        <a:latin typeface="微软雅黑" panose="020B0503020204020204" charset="-122"/>
+                      </a:endParaRPr>
                     </a:p>
                   </a:txBody>
-                  <a:tcPr marL="91440" marR="73152" marT="36576" marB="36576" anchor="ctr">
+                  <a:tcPr marR="73152" marT="36576" marB="36576" anchor="ctr">
                     <a:solidFill>
                       <a:srgbClr val="FFFFFF"/>
                     </a:solidFill>
@@ -9439,7 +8729,7 @@
           <a:noFill/>
         </p:spPr>
         <p:txBody>
-          <a:bodyPr wrap="square" anchor="t" lIns="0" rIns="0" tIns="0" bIns="0">
+          <a:bodyPr wrap="square" lIns="0" tIns="0" rIns="0" bIns="0" anchor="t">
             <a:spAutoFit/>
           </a:bodyPr>
           <a:lstStyle/>
@@ -9450,10 +8740,16 @@
                 <a:solidFill>
                   <a:srgbClr val="1B4AA8"/>
                 </a:solidFill>
-                <a:latin typeface="Microsoft YaHei"/>
+                <a:latin typeface="微软雅黑" panose="020B0503020204020204" charset="-122"/>
               </a:rPr>
               <a:t>结论：不是替代关系 —— 方案一守「写」这一段，方案二覆盖「读进来」与「跑出去」两端。</a:t>
             </a:r>
+            <a:endParaRPr sz="1350" b="1">
+              <a:solidFill>
+                <a:srgbClr val="1B4AA8"/>
+              </a:solidFill>
+              <a:latin typeface="微软雅黑" panose="020B0503020204020204" charset="-122"/>
+            </a:endParaRPr>
           </a:p>
         </p:txBody>
       </p:sp>
@@ -9465,8 +8761,8 @@
 </p:sld>
 </file>
 
-<file path=ppt/slides/slide9.xml><?xml version="1.0" encoding="utf-8"?>
-<p:sld xmlns:a="http://schemas.openxmlformats.org/drawingml/2006/main" xmlns:p="http://schemas.openxmlformats.org/presentationml/2006/main" xmlns:r="http://schemas.openxmlformats.org/officeDocument/2006/relationships">
+<file path=ppt/slides/slide7.xml><?xml version="1.0" encoding="utf-8"?>
+<p:sld xmlns:a="http://schemas.openxmlformats.org/drawingml/2006/main" xmlns:r="http://schemas.openxmlformats.org/officeDocument/2006/relationships" xmlns:p="http://schemas.openxmlformats.org/presentationml/2006/main">
   <p:cSld>
     <p:spTree>
       <p:nvGrpSpPr>
@@ -9484,7 +8780,51 @@
         <p:spPr>
           <a:xfrm>
             <a:off x="0" y="0"/>
-            <a:ext cx="12191695" cy="91440"/>
+            <a:ext cx="12191695" cy="6858000"/>
+          </a:xfrm>
+          <a:prstGeom prst="rect">
+            <a:avLst/>
+          </a:prstGeom>
+          <a:solidFill>
+            <a:srgbClr val="14213D"/>
+          </a:solidFill>
+          <a:ln>
+            <a:noFill/>
+          </a:ln>
+          <a:effectLst/>
+        </p:spPr>
+        <p:style>
+          <a:lnRef idx="1">
+            <a:schemeClr val="accent1"/>
+          </a:lnRef>
+          <a:fillRef idx="3">
+            <a:schemeClr val="accent1"/>
+          </a:fillRef>
+          <a:effectRef idx="2">
+            <a:schemeClr val="accent1"/>
+          </a:effectRef>
+          <a:fontRef idx="minor">
+            <a:schemeClr val="lt1"/>
+          </a:fontRef>
+        </p:style>
+        <p:txBody>
+          <a:bodyPr rtlCol="0" anchor="ctr"/>
+          <a:lstStyle/>
+          <a:p>
+            <a:pPr algn="ctr"/>
+          </a:p>
+        </p:txBody>
+      </p:sp>
+      <p:sp>
+        <p:nvSpPr>
+          <p:cNvPr id="3" name="Rectangle 2"/>
+          <p:cNvSpPr/>
+          <p:nvPr/>
+        </p:nvSpPr>
+        <p:spPr>
+          <a:xfrm>
+            <a:off x="0" y="0"/>
+            <a:ext cx="12191695" cy="164592"/>
           </a:xfrm>
           <a:prstGeom prst="rect">
             <a:avLst/>
@@ -9521,14 +8861,14 @@
       </p:sp>
       <p:sp>
         <p:nvSpPr>
-          <p:cNvPr id="3" name="TextBox 2"/>
+          <p:cNvPr id="4" name="TextBox 3"/>
           <p:cNvSpPr txBox="1"/>
           <p:nvPr/>
         </p:nvSpPr>
         <p:spPr>
           <a:xfrm>
-            <a:off x="685800" y="384048"/>
-            <a:ext cx="10058400" cy="292608"/>
+            <a:off x="868680" y="2011680"/>
+            <a:ext cx="10515600" cy="365760"/>
           </a:xfrm>
           <a:prstGeom prst="rect">
             <a:avLst/>
@@ -9536,34 +8876,40 @@
           <a:noFill/>
         </p:spPr>
         <p:txBody>
-          <a:bodyPr wrap="square" anchor="t" lIns="0" rIns="0" tIns="0" bIns="0">
+          <a:bodyPr wrap="square" lIns="0" tIns="0" rIns="0" bIns="0" anchor="t">
             <a:spAutoFit/>
           </a:bodyPr>
           <a:lstStyle/>
           <a:p>
             <a:pPr algn="l"/>
             <a:r>
-              <a:rPr sz="1200" b="1">
-                <a:solidFill>
-                  <a:srgbClr val="2F6FEB"/>
-                </a:solidFill>
-                <a:latin typeface="Microsoft YaHei"/>
+              <a:rPr sz="1400" b="1">
+                <a:solidFill>
+                  <a:srgbClr val="8FB6FF"/>
+                </a:solidFill>
+                <a:latin typeface="微软雅黑" panose="020B0503020204020204" charset="-122"/>
               </a:rPr>
-              <a:t>复盘</a:t>
-            </a:r>
-          </a:p>
-        </p:txBody>
-      </p:sp>
-      <p:sp>
-        <p:nvSpPr>
-          <p:cNvPr id="4" name="TextBox 3"/>
+              <a:t>5 分钟分享 · 现场可操作</a:t>
+            </a:r>
+            <a:endParaRPr sz="1400" b="1">
+              <a:solidFill>
+                <a:srgbClr val="8FB6FF"/>
+              </a:solidFill>
+              <a:latin typeface="微软雅黑" panose="020B0503020204020204" charset="-122"/>
+            </a:endParaRPr>
+          </a:p>
+        </p:txBody>
+      </p:sp>
+      <p:sp>
+        <p:nvSpPr>
+          <p:cNvPr id="5" name="TextBox 4"/>
           <p:cNvSpPr txBox="1"/>
           <p:nvPr/>
         </p:nvSpPr>
         <p:spPr>
           <a:xfrm>
-            <a:off x="685800" y="658368"/>
-            <a:ext cx="10789920" cy="566928"/>
+            <a:off x="868680" y="2468880"/>
+            <a:ext cx="10424160" cy="1097280"/>
           </a:xfrm>
           <a:prstGeom prst="rect">
             <a:avLst/>
@@ -9571,65 +8917,27 @@
           <a:noFill/>
         </p:spPr>
         <p:txBody>
-          <a:bodyPr wrap="square" anchor="t" lIns="0" rIns="0" tIns="0" bIns="0">
+          <a:bodyPr wrap="square" lIns="0" tIns="0" rIns="0" bIns="0" anchor="t">
             <a:spAutoFit/>
           </a:bodyPr>
           <a:lstStyle/>
           <a:p>
             <a:pPr algn="l"/>
             <a:r>
-              <a:rPr sz="2900" b="1">
-                <a:solidFill>
-                  <a:srgbClr val="14213D"/>
-                </a:solidFill>
-                <a:latin typeface="Microsoft YaHei"/>
+              <a:rPr sz="4400" b="1">
+                <a:solidFill>
+                  <a:srgbClr val="FFFFFF"/>
+                </a:solidFill>
+                <a:latin typeface="微软雅黑" panose="020B0503020204020204" charset="-122"/>
               </a:rPr>
-              <a:t>踩过的坑，和如果重来</a:t>
-            </a:r>
-          </a:p>
-        </p:txBody>
-      </p:sp>
-      <p:sp>
-        <p:nvSpPr>
-          <p:cNvPr id="5" name="Rectangle 4"/>
-          <p:cNvSpPr/>
-          <p:nvPr/>
-        </p:nvSpPr>
-        <p:spPr>
-          <a:xfrm>
-            <a:off x="685800" y="1298448"/>
-            <a:ext cx="822960" cy="50292"/>
-          </a:xfrm>
-          <a:prstGeom prst="rect">
-            <a:avLst/>
-          </a:prstGeom>
-          <a:solidFill>
-            <a:srgbClr val="2F6FEB"/>
-          </a:solidFill>
-          <a:ln>
-            <a:noFill/>
-          </a:ln>
-          <a:effectLst/>
-        </p:spPr>
-        <p:style>
-          <a:lnRef idx="1">
-            <a:schemeClr val="accent1"/>
-          </a:lnRef>
-          <a:fillRef idx="3">
-            <a:schemeClr val="accent1"/>
-          </a:fillRef>
-          <a:effectRef idx="2">
-            <a:schemeClr val="accent1"/>
-          </a:effectRef>
-          <a:fontRef idx="minor">
-            <a:schemeClr val="lt1"/>
-          </a:fontRef>
-        </p:style>
-        <p:txBody>
-          <a:bodyPr rtlCol="0" anchor="ctr"/>
-          <a:lstStyle/>
-          <a:p>
-            <a:pPr algn="ctr"/>
+              <a:t>谢谢，欢迎提问</a:t>
+            </a:r>
+            <a:endParaRPr sz="4400" b="1">
+              <a:solidFill>
+                <a:srgbClr val="FFFFFF"/>
+              </a:solidFill>
+              <a:latin typeface="微软雅黑" panose="020B0503020204020204" charset="-122"/>
+            </a:endParaRPr>
           </a:p>
         </p:txBody>
       </p:sp>
@@ -9641,8 +8949,8 @@
         </p:nvSpPr>
         <p:spPr>
           <a:xfrm>
-            <a:off x="11155680" y="6355080"/>
-            <a:ext cx="457200" cy="274320"/>
+            <a:off x="868680" y="3611880"/>
+            <a:ext cx="10424160" cy="914400"/>
           </a:xfrm>
           <a:prstGeom prst="rect">
             <a:avLst/>
@@ -9650,736 +8958,7 @@
           <a:noFill/>
         </p:spPr>
         <p:txBody>
-          <a:bodyPr wrap="square" anchor="t" lIns="0" rIns="0" tIns="0" bIns="0">
-            <a:spAutoFit/>
-          </a:bodyPr>
-          <a:lstStyle/>
-          <a:p>
-            <a:pPr algn="r"/>
-            <a:r>
-              <a:rPr sz="1100" b="0">
-                <a:solidFill>
-                  <a:srgbClr val="6B7280"/>
-                </a:solidFill>
-                <a:latin typeface="Microsoft YaHei"/>
-              </a:rPr>
-              <a:t>9</a:t>
-            </a:r>
-          </a:p>
-        </p:txBody>
-      </p:sp>
-      <p:sp>
-        <p:nvSpPr>
-          <p:cNvPr id="7" name="TextBox 6"/>
-          <p:cNvSpPr txBox="1"/>
-          <p:nvPr/>
-        </p:nvSpPr>
-        <p:spPr>
-          <a:xfrm>
-            <a:off x="685800" y="1572768"/>
-            <a:ext cx="5029200" cy="310896"/>
-          </a:xfrm>
-          <a:prstGeom prst="rect">
-            <a:avLst/>
-          </a:prstGeom>
-          <a:noFill/>
-        </p:spPr>
-        <p:txBody>
-          <a:bodyPr wrap="square" anchor="t" lIns="0" rIns="0" tIns="0" bIns="0">
-            <a:spAutoFit/>
-          </a:bodyPr>
-          <a:lstStyle/>
-          <a:p>
-            <a:pPr algn="l"/>
-            <a:r>
-              <a:rPr sz="1300" b="1">
-                <a:solidFill>
-                  <a:srgbClr val="1B4AA8"/>
-                </a:solidFill>
-                <a:latin typeface="Microsoft YaHei"/>
-              </a:rPr>
-              <a:t>真实踩坑（均有报错/痕迹为证）</a:t>
-            </a:r>
-          </a:p>
-        </p:txBody>
-      </p:sp>
-      <p:sp>
-        <p:nvSpPr>
-          <p:cNvPr id="8" name="Rectangle 7"/>
-          <p:cNvSpPr/>
-          <p:nvPr/>
-        </p:nvSpPr>
-        <p:spPr>
-          <a:xfrm>
-            <a:off x="685800" y="1938528"/>
-            <a:ext cx="5074920" cy="713232"/>
-          </a:xfrm>
-          <a:prstGeom prst="rect">
-            <a:avLst/>
-          </a:prstGeom>
-          <a:solidFill>
-            <a:srgbClr val="FFFFFF"/>
-          </a:solidFill>
-          <a:ln w="12700">
-            <a:solidFill>
-              <a:srgbClr val="D6DEEA"/>
-            </a:solidFill>
-          </a:ln>
-          <a:effectLst/>
-        </p:spPr>
-        <p:style>
-          <a:lnRef idx="1">
-            <a:schemeClr val="accent1"/>
-          </a:lnRef>
-          <a:fillRef idx="3">
-            <a:schemeClr val="accent1"/>
-          </a:fillRef>
-          <a:effectRef idx="2">
-            <a:schemeClr val="accent1"/>
-          </a:effectRef>
-          <a:fontRef idx="minor">
-            <a:schemeClr val="lt1"/>
-          </a:fontRef>
-        </p:style>
-        <p:txBody>
-          <a:bodyPr rtlCol="0" anchor="ctr"/>
-          <a:lstStyle/>
-          <a:p>
-            <a:pPr algn="ctr"/>
-          </a:p>
-        </p:txBody>
-      </p:sp>
-      <p:sp>
-        <p:nvSpPr>
-          <p:cNvPr id="9" name="TextBox 8"/>
-          <p:cNvSpPr txBox="1"/>
-          <p:nvPr/>
-        </p:nvSpPr>
-        <p:spPr>
-          <a:xfrm>
-            <a:off x="868680" y="2029968"/>
-            <a:ext cx="4754880" cy="274320"/>
-          </a:xfrm>
-          <a:prstGeom prst="rect">
-            <a:avLst/>
-          </a:prstGeom>
-          <a:noFill/>
-        </p:spPr>
-        <p:txBody>
-          <a:bodyPr wrap="square" anchor="t" lIns="0" rIns="0" tIns="0" bIns="0">
-            <a:spAutoFit/>
-          </a:bodyPr>
-          <a:lstStyle/>
-          <a:p>
-            <a:pPr algn="l"/>
-            <a:r>
-              <a:rPr sz="1150" b="1">
-                <a:solidFill>
-                  <a:srgbClr val="14213D"/>
-                </a:solidFill>
-                <a:latin typeface="Microsoft YaHei"/>
-              </a:rPr>
-              <a:t>%matplotlib inline 报 SyntaxError</a:t>
-            </a:r>
-          </a:p>
-        </p:txBody>
-      </p:sp>
-      <p:sp>
-        <p:nvSpPr>
-          <p:cNvPr id="10" name="TextBox 9"/>
-          <p:cNvSpPr txBox="1"/>
-          <p:nvPr/>
-        </p:nvSpPr>
-        <p:spPr>
-          <a:xfrm>
-            <a:off x="868680" y="2322576"/>
-            <a:ext cx="4754880" cy="274320"/>
-          </a:xfrm>
-          <a:prstGeom prst="rect">
-            <a:avLst/>
-          </a:prstGeom>
-          <a:noFill/>
-        </p:spPr>
-        <p:txBody>
-          <a:bodyPr wrap="square" anchor="t" lIns="0" rIns="0" tIns="0" bIns="0">
-            <a:spAutoFit/>
-          </a:bodyPr>
-          <a:lstStyle/>
-          <a:p>
-            <a:pPr algn="l"/>
-            <a:r>
-              <a:rPr sz="1050" b="0">
-                <a:solidFill>
-                  <a:srgbClr val="6B7280"/>
-                </a:solidFill>
-                <a:latin typeface="Microsoft YaHei"/>
-              </a:rPr>
-              <a:t>魔法命令只在 .ipynb 有效</a:t>
-            </a:r>
-          </a:p>
-        </p:txBody>
-      </p:sp>
-      <p:sp>
-        <p:nvSpPr>
-          <p:cNvPr id="11" name="Rectangle 10"/>
-          <p:cNvSpPr/>
-          <p:nvPr/>
-        </p:nvSpPr>
-        <p:spPr>
-          <a:xfrm>
-            <a:off x="685800" y="2743200"/>
-            <a:ext cx="5074920" cy="713232"/>
-          </a:xfrm>
-          <a:prstGeom prst="rect">
-            <a:avLst/>
-          </a:prstGeom>
-          <a:solidFill>
-            <a:srgbClr val="FFFFFF"/>
-          </a:solidFill>
-          <a:ln w="12700">
-            <a:solidFill>
-              <a:srgbClr val="D6DEEA"/>
-            </a:solidFill>
-          </a:ln>
-          <a:effectLst/>
-        </p:spPr>
-        <p:style>
-          <a:lnRef idx="1">
-            <a:schemeClr val="accent1"/>
-          </a:lnRef>
-          <a:fillRef idx="3">
-            <a:schemeClr val="accent1"/>
-          </a:fillRef>
-          <a:effectRef idx="2">
-            <a:schemeClr val="accent1"/>
-          </a:effectRef>
-          <a:fontRef idx="minor">
-            <a:schemeClr val="lt1"/>
-          </a:fontRef>
-        </p:style>
-        <p:txBody>
-          <a:bodyPr rtlCol="0" anchor="ctr"/>
-          <a:lstStyle/>
-          <a:p>
-            <a:pPr algn="ctr"/>
-          </a:p>
-        </p:txBody>
-      </p:sp>
-      <p:sp>
-        <p:nvSpPr>
-          <p:cNvPr id="12" name="TextBox 11"/>
-          <p:cNvSpPr txBox="1"/>
-          <p:nvPr/>
-        </p:nvSpPr>
-        <p:spPr>
-          <a:xfrm>
-            <a:off x="868680" y="2834640"/>
-            <a:ext cx="4754880" cy="274320"/>
-          </a:xfrm>
-          <a:prstGeom prst="rect">
-            <a:avLst/>
-          </a:prstGeom>
-          <a:noFill/>
-        </p:spPr>
-        <p:txBody>
-          <a:bodyPr wrap="square" anchor="t" lIns="0" rIns="0" tIns="0" bIns="0">
-            <a:spAutoFit/>
-          </a:bodyPr>
-          <a:lstStyle/>
-          <a:p>
-            <a:pPr algn="l"/>
-            <a:r>
-              <a:rPr sz="1150" b="1">
-                <a:solidFill>
-                  <a:srgbClr val="14213D"/>
-                </a:solidFill>
-                <a:latin typeface="Microsoft YaHei"/>
-              </a:rPr>
-              <a:t>sklearn 私有模块 _samples_generator</a:t>
-            </a:r>
-          </a:p>
-        </p:txBody>
-      </p:sp>
-      <p:sp>
-        <p:nvSpPr>
-          <p:cNvPr id="13" name="TextBox 12"/>
-          <p:cNvSpPr txBox="1"/>
-          <p:nvPr/>
-        </p:nvSpPr>
-        <p:spPr>
-          <a:xfrm>
-            <a:off x="868680" y="3127248"/>
-            <a:ext cx="4754880" cy="274320"/>
-          </a:xfrm>
-          <a:prstGeom prst="rect">
-            <a:avLst/>
-          </a:prstGeom>
-          <a:noFill/>
-        </p:spPr>
-        <p:txBody>
-          <a:bodyPr wrap="square" anchor="t" lIns="0" rIns="0" tIns="0" bIns="0">
-            <a:spAutoFit/>
-          </a:bodyPr>
-          <a:lstStyle/>
-          <a:p>
-            <a:pPr algn="l"/>
-            <a:r>
-              <a:rPr sz="1050" b="0">
-                <a:solidFill>
-                  <a:srgbClr val="6B7280"/>
-                </a:solidFill>
-                <a:latin typeface="Microsoft YaHei"/>
-              </a:rPr>
-              <a:t>公开 API 是 datasets.make_blobs</a:t>
-            </a:r>
-          </a:p>
-        </p:txBody>
-      </p:sp>
-      <p:sp>
-        <p:nvSpPr>
-          <p:cNvPr id="14" name="Rectangle 13"/>
-          <p:cNvSpPr/>
-          <p:nvPr/>
-        </p:nvSpPr>
-        <p:spPr>
-          <a:xfrm>
-            <a:off x="685800" y="3547872"/>
-            <a:ext cx="5074920" cy="713232"/>
-          </a:xfrm>
-          <a:prstGeom prst="rect">
-            <a:avLst/>
-          </a:prstGeom>
-          <a:solidFill>
-            <a:srgbClr val="FFFFFF"/>
-          </a:solidFill>
-          <a:ln w="12700">
-            <a:solidFill>
-              <a:srgbClr val="D6DEEA"/>
-            </a:solidFill>
-          </a:ln>
-          <a:effectLst/>
-        </p:spPr>
-        <p:style>
-          <a:lnRef idx="1">
-            <a:schemeClr val="accent1"/>
-          </a:lnRef>
-          <a:fillRef idx="3">
-            <a:schemeClr val="accent1"/>
-          </a:fillRef>
-          <a:effectRef idx="2">
-            <a:schemeClr val="accent1"/>
-          </a:effectRef>
-          <a:fontRef idx="minor">
-            <a:schemeClr val="lt1"/>
-          </a:fontRef>
-        </p:style>
-        <p:txBody>
-          <a:bodyPr rtlCol="0" anchor="ctr"/>
-          <a:lstStyle/>
-          <a:p>
-            <a:pPr algn="ctr"/>
-          </a:p>
-        </p:txBody>
-      </p:sp>
-      <p:sp>
-        <p:nvSpPr>
-          <p:cNvPr id="15" name="TextBox 14"/>
-          <p:cNvSpPr txBox="1"/>
-          <p:nvPr/>
-        </p:nvSpPr>
-        <p:spPr>
-          <a:xfrm>
-            <a:off x="868680" y="3639312"/>
-            <a:ext cx="4754880" cy="274320"/>
-          </a:xfrm>
-          <a:prstGeom prst="rect">
-            <a:avLst/>
-          </a:prstGeom>
-          <a:noFill/>
-        </p:spPr>
-        <p:txBody>
-          <a:bodyPr wrap="square" anchor="t" lIns="0" rIns="0" tIns="0" bIns="0">
-            <a:spAutoFit/>
-          </a:bodyPr>
-          <a:lstStyle/>
-          <a:p>
-            <a:pPr algn="l"/>
-            <a:r>
-              <a:rPr sz="1150" b="1">
-                <a:solidFill>
-                  <a:srgbClr val="14213D"/>
-                </a:solidFill>
-                <a:latin typeface="Microsoft YaHei"/>
-              </a:rPr>
-              <a:t>面板空白 / 找不到 claude</a:t>
-            </a:r>
-          </a:p>
-        </p:txBody>
-      </p:sp>
-      <p:sp>
-        <p:nvSpPr>
-          <p:cNvPr id="16" name="TextBox 15"/>
-          <p:cNvSpPr txBox="1"/>
-          <p:nvPr/>
-        </p:nvSpPr>
-        <p:spPr>
-          <a:xfrm>
-            <a:off x="868680" y="3931920"/>
-            <a:ext cx="4754880" cy="274320"/>
-          </a:xfrm>
-          <a:prstGeom prst="rect">
-            <a:avLst/>
-          </a:prstGeom>
-          <a:noFill/>
-        </p:spPr>
-        <p:txBody>
-          <a:bodyPr wrap="square" anchor="t" lIns="0" rIns="0" tIns="0" bIns="0">
-            <a:spAutoFit/>
-          </a:bodyPr>
-          <a:lstStyle/>
-          <a:p>
-            <a:pPr algn="l"/>
-            <a:r>
-              <a:rPr sz="1050" b="0">
-                <a:solidFill>
-                  <a:srgbClr val="6B7280"/>
-                </a:solidFill>
-                <a:latin typeface="Microsoft YaHei"/>
-              </a:rPr>
-              <a:t>插件只是窗口，CLI 必须先在 PATH</a:t>
-            </a:r>
-          </a:p>
-        </p:txBody>
-      </p:sp>
-      <p:sp>
-        <p:nvSpPr>
-          <p:cNvPr id="17" name="Rectangle 16"/>
-          <p:cNvSpPr/>
-          <p:nvPr/>
-        </p:nvSpPr>
-        <p:spPr>
-          <a:xfrm>
-            <a:off x="685800" y="4352544"/>
-            <a:ext cx="5074920" cy="713232"/>
-          </a:xfrm>
-          <a:prstGeom prst="rect">
-            <a:avLst/>
-          </a:prstGeom>
-          <a:solidFill>
-            <a:srgbClr val="FFFFFF"/>
-          </a:solidFill>
-          <a:ln w="12700">
-            <a:solidFill>
-              <a:srgbClr val="D6DEEA"/>
-            </a:solidFill>
-          </a:ln>
-          <a:effectLst/>
-        </p:spPr>
-        <p:style>
-          <a:lnRef idx="1">
-            <a:schemeClr val="accent1"/>
-          </a:lnRef>
-          <a:fillRef idx="3">
-            <a:schemeClr val="accent1"/>
-          </a:fillRef>
-          <a:effectRef idx="2">
-            <a:schemeClr val="accent1"/>
-          </a:effectRef>
-          <a:fontRef idx="minor">
-            <a:schemeClr val="lt1"/>
-          </a:fontRef>
-        </p:style>
-        <p:txBody>
-          <a:bodyPr rtlCol="0" anchor="ctr"/>
-          <a:lstStyle/>
-          <a:p>
-            <a:pPr algn="ctr"/>
-          </a:p>
-        </p:txBody>
-      </p:sp>
-      <p:sp>
-        <p:nvSpPr>
-          <p:cNvPr id="18" name="TextBox 17"/>
-          <p:cNvSpPr txBox="1"/>
-          <p:nvPr/>
-        </p:nvSpPr>
-        <p:spPr>
-          <a:xfrm>
-            <a:off x="868680" y="4443983"/>
-            <a:ext cx="4754880" cy="274320"/>
-          </a:xfrm>
-          <a:prstGeom prst="rect">
-            <a:avLst/>
-          </a:prstGeom>
-          <a:noFill/>
-        </p:spPr>
-        <p:txBody>
-          <a:bodyPr wrap="square" anchor="t" lIns="0" rIns="0" tIns="0" bIns="0">
-            <a:spAutoFit/>
-          </a:bodyPr>
-          <a:lstStyle/>
-          <a:p>
-            <a:pPr algn="l"/>
-            <a:r>
-              <a:rPr sz="1150" b="1">
-                <a:solidFill>
-                  <a:srgbClr val="14213D"/>
-                </a:solidFill>
-                <a:latin typeface="Microsoft YaHei"/>
-              </a:rPr>
-              <a:t>第三方端点 401 / model not found</a:t>
-            </a:r>
-          </a:p>
-        </p:txBody>
-      </p:sp>
-      <p:sp>
-        <p:nvSpPr>
-          <p:cNvPr id="19" name="TextBox 18"/>
-          <p:cNvSpPr txBox="1"/>
-          <p:nvPr/>
-        </p:nvSpPr>
-        <p:spPr>
-          <a:xfrm>
-            <a:off x="868680" y="4736592"/>
-            <a:ext cx="4754880" cy="274320"/>
-          </a:xfrm>
-          <a:prstGeom prst="rect">
-            <a:avLst/>
-          </a:prstGeom>
-          <a:noFill/>
-        </p:spPr>
-        <p:txBody>
-          <a:bodyPr wrap="square" anchor="t" lIns="0" rIns="0" tIns="0" bIns="0">
-            <a:spAutoFit/>
-          </a:bodyPr>
-          <a:lstStyle/>
-          <a:p>
-            <a:pPr algn="l"/>
-            <a:r>
-              <a:rPr sz="1050" b="0">
-                <a:solidFill>
-                  <a:srgbClr val="6B7280"/>
-                </a:solidFill>
-                <a:latin typeface="Microsoft YaHei"/>
-              </a:rPr>
-              <a:t>URL 要带 /anthropic、四个别名要写全</a:t>
-            </a:r>
-          </a:p>
-        </p:txBody>
-      </p:sp>
-      <p:sp>
-        <p:nvSpPr>
-          <p:cNvPr id="20" name="Rectangle 19"/>
-          <p:cNvSpPr/>
-          <p:nvPr/>
-        </p:nvSpPr>
-        <p:spPr>
-          <a:xfrm>
-            <a:off x="685800" y="5157216"/>
-            <a:ext cx="5074920" cy="713232"/>
-          </a:xfrm>
-          <a:prstGeom prst="rect">
-            <a:avLst/>
-          </a:prstGeom>
-          <a:solidFill>
-            <a:srgbClr val="FFFFFF"/>
-          </a:solidFill>
-          <a:ln w="12700">
-            <a:solidFill>
-              <a:srgbClr val="D6DEEA"/>
-            </a:solidFill>
-          </a:ln>
-          <a:effectLst/>
-        </p:spPr>
-        <p:style>
-          <a:lnRef idx="1">
-            <a:schemeClr val="accent1"/>
-          </a:lnRef>
-          <a:fillRef idx="3">
-            <a:schemeClr val="accent1"/>
-          </a:fillRef>
-          <a:effectRef idx="2">
-            <a:schemeClr val="accent1"/>
-          </a:effectRef>
-          <a:fontRef idx="minor">
-            <a:schemeClr val="lt1"/>
-          </a:fontRef>
-        </p:style>
-        <p:txBody>
-          <a:bodyPr rtlCol="0" anchor="ctr"/>
-          <a:lstStyle/>
-          <a:p>
-            <a:pPr algn="ctr"/>
-          </a:p>
-        </p:txBody>
-      </p:sp>
-      <p:sp>
-        <p:nvSpPr>
-          <p:cNvPr id="21" name="TextBox 20"/>
-          <p:cNvSpPr txBox="1"/>
-          <p:nvPr/>
-        </p:nvSpPr>
-        <p:spPr>
-          <a:xfrm>
-            <a:off x="868680" y="5248655"/>
-            <a:ext cx="4754880" cy="274320"/>
-          </a:xfrm>
-          <a:prstGeom prst="rect">
-            <a:avLst/>
-          </a:prstGeom>
-          <a:noFill/>
-        </p:spPr>
-        <p:txBody>
-          <a:bodyPr wrap="square" anchor="t" lIns="0" rIns="0" tIns="0" bIns="0">
-            <a:spAutoFit/>
-          </a:bodyPr>
-          <a:lstStyle/>
-          <a:p>
-            <a:pPr algn="l"/>
-            <a:r>
-              <a:rPr sz="1150" b="1">
-                <a:solidFill>
-                  <a:srgbClr val="14213D"/>
-                </a:solidFill>
-                <a:latin typeface="Microsoft YaHei"/>
-              </a:rPr>
-              <a:t>中文注释乱码（鏇存敼…）</a:t>
-            </a:r>
-          </a:p>
-        </p:txBody>
-      </p:sp>
-      <p:sp>
-        <p:nvSpPr>
-          <p:cNvPr id="22" name="TextBox 21"/>
-          <p:cNvSpPr txBox="1"/>
-          <p:nvPr/>
-        </p:nvSpPr>
-        <p:spPr>
-          <a:xfrm>
-            <a:off x="868680" y="5541264"/>
-            <a:ext cx="4754880" cy="274320"/>
-          </a:xfrm>
-          <a:prstGeom prst="rect">
-            <a:avLst/>
-          </a:prstGeom>
-          <a:noFill/>
-        </p:spPr>
-        <p:txBody>
-          <a:bodyPr wrap="square" anchor="t" lIns="0" rIns="0" tIns="0" bIns="0">
-            <a:spAutoFit/>
-          </a:bodyPr>
-          <a:lstStyle/>
-          <a:p>
-            <a:pPr algn="l"/>
-            <a:r>
-              <a:rPr sz="1050" b="0">
-                <a:solidFill>
-                  <a:srgbClr val="6B7280"/>
-                </a:solidFill>
-                <a:latin typeface="Microsoft YaHei"/>
-              </a:rPr>
-              <a:t>File Encodings 三项统一 UTF-8</a:t>
-            </a:r>
-          </a:p>
-        </p:txBody>
-      </p:sp>
-      <p:sp>
-        <p:nvSpPr>
-          <p:cNvPr id="23" name="Rectangle 22"/>
-          <p:cNvSpPr/>
-          <p:nvPr/>
-        </p:nvSpPr>
-        <p:spPr>
-          <a:xfrm>
-            <a:off x="6126480" y="1572768"/>
-            <a:ext cx="5394960" cy="1874519"/>
-          </a:xfrm>
-          <a:prstGeom prst="rect">
-            <a:avLst/>
-          </a:prstGeom>
-          <a:solidFill>
-            <a:srgbClr val="14213D"/>
-          </a:solidFill>
-          <a:ln>
-            <a:noFill/>
-          </a:ln>
-          <a:effectLst/>
-        </p:spPr>
-        <p:style>
-          <a:lnRef idx="1">
-            <a:schemeClr val="accent1"/>
-          </a:lnRef>
-          <a:fillRef idx="3">
-            <a:schemeClr val="accent1"/>
-          </a:fillRef>
-          <a:effectRef idx="2">
-            <a:schemeClr val="accent1"/>
-          </a:effectRef>
-          <a:fontRef idx="minor">
-            <a:schemeClr val="lt1"/>
-          </a:fontRef>
-        </p:style>
-        <p:txBody>
-          <a:bodyPr rtlCol="0" anchor="ctr"/>
-          <a:lstStyle/>
-          <a:p>
-            <a:pPr algn="ctr"/>
-          </a:p>
-        </p:txBody>
-      </p:sp>
-      <p:sp>
-        <p:nvSpPr>
-          <p:cNvPr id="24" name="TextBox 23"/>
-          <p:cNvSpPr txBox="1"/>
-          <p:nvPr/>
-        </p:nvSpPr>
-        <p:spPr>
-          <a:xfrm>
-            <a:off x="6355080" y="1737360"/>
-            <a:ext cx="4937760" cy="274320"/>
-          </a:xfrm>
-          <a:prstGeom prst="rect">
-            <a:avLst/>
-          </a:prstGeom>
-          <a:noFill/>
-        </p:spPr>
-        <p:txBody>
-          <a:bodyPr wrap="square" anchor="t" lIns="0" rIns="0" tIns="0" bIns="0">
-            <a:spAutoFit/>
-          </a:bodyPr>
-          <a:lstStyle/>
-          <a:p>
-            <a:pPr algn="l"/>
-            <a:r>
-              <a:rPr sz="1200" b="1">
-                <a:solidFill>
-                  <a:srgbClr val="8FB6FF"/>
-                </a:solidFill>
-                <a:latin typeface="Microsoft YaHei"/>
-              </a:rPr>
-              <a:t>使用心得</a:t>
-            </a:r>
-          </a:p>
-        </p:txBody>
-      </p:sp>
-      <p:sp>
-        <p:nvSpPr>
-          <p:cNvPr id="25" name="TextBox 24"/>
-          <p:cNvSpPr txBox="1"/>
-          <p:nvPr/>
-        </p:nvSpPr>
-        <p:spPr>
-          <a:xfrm>
-            <a:off x="6355080" y="2084831"/>
-            <a:ext cx="4937760" cy="1234440"/>
-          </a:xfrm>
-          <a:prstGeom prst="rect">
-            <a:avLst/>
-          </a:prstGeom>
-          <a:noFill/>
-        </p:spPr>
-        <p:txBody>
-          <a:bodyPr wrap="square" anchor="t" lIns="0" rIns="0" tIns="0" bIns="0">
+          <a:bodyPr wrap="square" lIns="0" tIns="0" rIns="0" bIns="0" anchor="t">
             <a:spAutoFit/>
           </a:bodyPr>
           <a:lstStyle/>
@@ -10390,14 +8969,20 @@
               </a:lnSpc>
             </a:pPr>
             <a:r>
-              <a:rPr sz="1200" b="0">
-                <a:solidFill>
-                  <a:srgbClr val="FFFFFF"/>
-                </a:solidFill>
-                <a:latin typeface="Microsoft YaHei"/>
+              <a:rPr sz="1500" b="0">
+                <a:solidFill>
+                  <a:srgbClr val="C7D3E6"/>
+                </a:solidFill>
+                <a:latin typeface="微软雅黑" panose="020B0503020204020204" charset="-122"/>
               </a:rPr>
-              <a:t>① 「问」和「派活」是两种交互，别混用。</a:t>
-            </a:r>
+              <a:t>一个可以直接复现的结论：</a:t>
+            </a:r>
+            <a:endParaRPr sz="1500" b="0">
+              <a:solidFill>
+                <a:srgbClr val="C7D3E6"/>
+              </a:solidFill>
+              <a:latin typeface="微软雅黑" panose="020B0503020204020204" charset="-122"/>
+            </a:endParaRPr>
           </a:p>
           <a:p>
             <a:pPr algn="l">
@@ -10406,87 +8991,33 @@
               </a:lnSpc>
             </a:pPr>
             <a:r>
-              <a:rPr sz="1200" b="0">
-                <a:solidFill>
-                  <a:srgbClr val="FFFFFF"/>
-                </a:solidFill>
-                <a:latin typeface="Microsoft YaHei"/>
+              <a:rPr sz="1500" b="0">
+                <a:solidFill>
+                  <a:srgbClr val="C7D3E6"/>
+                </a:solidFill>
+                <a:latin typeface="微软雅黑" panose="020B0503020204020204" charset="-122"/>
               </a:rPr>
-              <a:t>② 让 Agent 先 Read + 说计划，再放开写权限。</a:t>
-            </a:r>
-          </a:p>
-          <a:p>
-            <a:pPr algn="l">
-              <a:lnSpc>
-                <a:spcPct val="145000"/>
-              </a:lnSpc>
-            </a:pPr>
-            <a:r>
-              <a:rPr sz="1200" b="0">
-                <a:solidFill>
-                  <a:srgbClr val="FFFFFF"/>
-                </a:solidFill>
-                <a:latin typeface="Microsoft YaHei"/>
-              </a:rPr>
-              <a:t>③ 读码用默认模式，机械活用 acceptEdits。</a:t>
-            </a:r>
-          </a:p>
-        </p:txBody>
-      </p:sp>
-      <p:sp>
-        <p:nvSpPr>
-          <p:cNvPr id="26" name="Rectangle 25"/>
-          <p:cNvSpPr/>
-          <p:nvPr/>
-        </p:nvSpPr>
-        <p:spPr>
-          <a:xfrm>
-            <a:off x="6126480" y="3630168"/>
-            <a:ext cx="5394960" cy="2331720"/>
-          </a:xfrm>
-          <a:prstGeom prst="rect">
-            <a:avLst/>
-          </a:prstGeom>
-          <a:solidFill>
-            <a:srgbClr val="EEF3FC"/>
-          </a:solidFill>
-          <a:ln>
-            <a:noFill/>
-          </a:ln>
-          <a:effectLst/>
-        </p:spPr>
-        <p:style>
-          <a:lnRef idx="1">
-            <a:schemeClr val="accent1"/>
-          </a:lnRef>
-          <a:fillRef idx="3">
-            <a:schemeClr val="accent1"/>
-          </a:fillRef>
-          <a:effectRef idx="2">
-            <a:schemeClr val="accent1"/>
-          </a:effectRef>
-          <a:fontRef idx="minor">
-            <a:schemeClr val="lt1"/>
-          </a:fontRef>
-        </p:style>
-        <p:txBody>
-          <a:bodyPr rtlCol="0" anchor="ctr"/>
-          <a:lstStyle/>
-          <a:p>
-            <a:pPr algn="ctr"/>
-          </a:p>
-        </p:txBody>
-      </p:sp>
-      <p:sp>
-        <p:nvSpPr>
-          <p:cNvPr id="27" name="TextBox 26"/>
+              <a:t>先装手（Agent），再装窗口（插件），配置收口到 settings.json 一处。</a:t>
+            </a:r>
+            <a:endParaRPr sz="1500" b="0">
+              <a:solidFill>
+                <a:srgbClr val="C7D3E6"/>
+              </a:solidFill>
+              <a:latin typeface="微软雅黑" panose="020B0503020204020204" charset="-122"/>
+            </a:endParaRPr>
+          </a:p>
+        </p:txBody>
+      </p:sp>
+      <p:sp>
+        <p:nvSpPr>
+          <p:cNvPr id="7" name="TextBox 6"/>
           <p:cNvSpPr txBox="1"/>
           <p:nvPr/>
         </p:nvSpPr>
         <p:spPr>
           <a:xfrm>
-            <a:off x="6355080" y="3785615"/>
-            <a:ext cx="4937760" cy="274320"/>
+            <a:off x="868680" y="5394960"/>
+            <a:ext cx="10424160" cy="365760"/>
           </a:xfrm>
           <a:prstGeom prst="rect">
             <a:avLst/>
@@ -10494,108 +9025,27 @@
           <a:noFill/>
         </p:spPr>
         <p:txBody>
-          <a:bodyPr wrap="square" anchor="t" lIns="0" rIns="0" tIns="0" bIns="0">
+          <a:bodyPr wrap="square" lIns="0" tIns="0" rIns="0" bIns="0" anchor="t">
             <a:spAutoFit/>
           </a:bodyPr>
           <a:lstStyle/>
           <a:p>
             <a:pPr algn="l"/>
             <a:r>
-              <a:rPr sz="1200" b="1">
-                <a:solidFill>
-                  <a:srgbClr val="1B4AA8"/>
-                </a:solidFill>
-                <a:latin typeface="Microsoft YaHei"/>
+              <a:rPr sz="1200" b="0">
+                <a:solidFill>
+                  <a:srgbClr val="9FAFC6"/>
+                </a:solidFill>
+                <a:latin typeface="微软雅黑" panose="020B0503020204020204" charset="-122"/>
               </a:rPr>
-              <a:t>如果重来：换插件侧，不换 Agent 侧</a:t>
-            </a:r>
-          </a:p>
-        </p:txBody>
-      </p:sp>
-      <p:sp>
-        <p:nvSpPr>
-          <p:cNvPr id="28" name="TextBox 27"/>
-          <p:cNvSpPr txBox="1"/>
-          <p:nvPr/>
-        </p:nvSpPr>
-        <p:spPr>
-          <a:xfrm>
-            <a:off x="6355080" y="4160520"/>
-            <a:ext cx="4983480" cy="1737360"/>
-          </a:xfrm>
-          <a:prstGeom prst="rect">
-            <a:avLst/>
-          </a:prstGeom>
-          <a:noFill/>
-        </p:spPr>
-        <p:txBody>
-          <a:bodyPr wrap="square" anchor="t" lIns="0" rIns="0" tIns="0" bIns="0">
-            <a:spAutoFit/>
-          </a:bodyPr>
-          <a:lstStyle/>
-          <a:p>
-            <a:pPr algn="l">
-              <a:lnSpc>
-                <a:spcPct val="145000"/>
-              </a:lnSpc>
-            </a:pPr>
-            <a:r>
-              <a:rPr sz="1100" b="0">
-                <a:solidFill>
-                  <a:srgbClr val="14213D"/>
-                </a:solidFill>
-                <a:latin typeface="Microsoft YaHei"/>
-              </a:rPr>
-              <a:t>「插件 + 外部 CLI」的版本耦合与上下文延迟是真实摩擦；</a:t>
-            </a:r>
-          </a:p>
-          <a:p>
-            <a:pPr algn="l">
-              <a:lnSpc>
-                <a:spcPct val="145000"/>
-              </a:lnSpc>
-            </a:pPr>
-            <a:r>
-              <a:rPr sz="1100" b="0">
-                <a:solidFill>
-                  <a:srgbClr val="14213D"/>
-                </a:solidFill>
-                <a:latin typeface="Microsoft YaHei"/>
-              </a:rPr>
-              <a:t>一体化 IDE（Qoder / Trae 一类）把三个件收进一个发布包。</a:t>
-            </a:r>
-          </a:p>
-          <a:p>
-            <a:pPr algn="l">
-              <a:lnSpc>
-                <a:spcPct val="145000"/>
-              </a:lnSpc>
-            </a:pPr>
-            <a:r>
-              <a:rPr sz="1100" b="0">
-                <a:solidFill>
-                  <a:srgbClr val="14213D"/>
-                </a:solidFill>
-                <a:latin typeface="Microsoft YaHei"/>
-              </a:rPr>
-              <a:t>但选型的分界线不变：任务里有没有「执行」这一环。</a:t>
-            </a:r>
-          </a:p>
-          <a:p>
-            <a:pPr algn="l">
-              <a:lnSpc>
-                <a:spcPct val="145000"/>
-              </a:lnSpc>
-            </a:pPr>
-            <a:r>
-              <a:rPr sz="1100" b="0">
-                <a:solidFill>
-                  <a:srgbClr val="14213D"/>
-                </a:solidFill>
-                <a:latin typeface="Microsoft YaHei"/>
-              </a:rPr>
-              <a:t>所以重来一次换的只是窗口，Agent 那双手不动。</a:t>
-            </a:r>
+              <a:t>肖俊涛 · 2405100606 · 2026-10-21</a:t>
+            </a:r>
+            <a:endParaRPr sz="1200" b="0">
+              <a:solidFill>
+                <a:srgbClr val="9FAFC6"/>
+              </a:solidFill>
+              <a:latin typeface="微软雅黑" panose="020B0503020204020204" charset="-122"/>
+            </a:endParaRPr>
           </a:p>
         </p:txBody>
       </p:sp>
@@ -10923,6 +9373,10 @@
       </a:style>
     </a:lnDef>
   </a:objectDefaults>
-  <a:extraClrSchemeLst/>
+  <a:extLst>
+    <a:ext uri="{05A4C25C-085E-4340-85A3-A5531E510DB2}">
+      <thm15:themeFamily xmlns:thm15="http://schemas.microsoft.com/office/thememl/2012/main" name="Office Theme" id="{62F939B6-93AF-4DB8-9C6B-D6C7DFDC589F}" vid="{4A3C46E8-61CC-4603-A589-7422A47A8E4A}"/>
+    </a:ext>
+  </a:extLst>
 </a:theme>
 </file>